--- a/pitch_deck_jefferson_ems.pptx
+++ b/pitch_deck_jefferson_ems.pptx
@@ -3109,8 +3109,8 @@
         </p:blipFill>
         <p:spPr>
           <a:xfrm>
-            <a:off x="228600" y="914400"/>
-            <a:ext cx="11704320" cy="5486400"/>
+            <a:off x="228600" y="822960"/>
+            <a:ext cx="11704320" cy="5577840"/>
           </a:xfrm>
           <a:prstGeom prst="rect">
             <a:avLst/>
@@ -3125,8 +3125,8 @@
         </p:nvSpPr>
         <p:spPr>
           <a:xfrm>
-            <a:off x="457200" y="182880"/>
-            <a:ext cx="11247120" cy="548640"/>
+            <a:off x="457200" y="137160"/>
+            <a:ext cx="8229600" cy="457200"/>
           </a:xfrm>
           <a:prstGeom prst="rect">
             <a:avLst/>
@@ -3134,12 +3134,16 @@
           <a:noFill/>
         </p:spPr>
         <p:txBody>
-          <a:bodyPr wrap="square">
+          <a:bodyPr wrap="square" anchor="t" lIns="73152" rIns="73152">
             <a:spAutoFit/>
           </a:bodyPr>
           <a:lstStyle/>
           <a:p>
-            <a:pPr algn="l"/>
+            <a:pPr algn="l">
+              <a:lnSpc>
+                <a:spcPct val="115000"/>
+              </a:lnSpc>
+            </a:pPr>
             <a:r>
               <a:rPr sz="2000" b="1" i="0">
                 <a:solidFill>
@@ -3147,7 +3151,7 @@
                 </a:solidFill>
                 <a:latin typeface="Calibri"/>
               </a:rPr>
-              <a:t>ISyE 450 Capstone  |  Team: [Your names here]</a:t>
+              <a:t>ISyE 450 Capstone — Jefferson County EMS</a:t>
             </a:r>
           </a:p>
         </p:txBody>
@@ -3160,6 +3164,45 @@
         </p:nvSpPr>
         <p:spPr>
           <a:xfrm>
+            <a:off x="8686800" y="137160"/>
+            <a:ext cx="3200400" cy="457200"/>
+          </a:xfrm>
+          <a:prstGeom prst="rect">
+            <a:avLst/>
+          </a:prstGeom>
+          <a:noFill/>
+        </p:spPr>
+        <p:txBody>
+          <a:bodyPr wrap="square" anchor="t" lIns="73152" rIns="73152">
+            <a:spAutoFit/>
+          </a:bodyPr>
+          <a:lstStyle/>
+          <a:p>
+            <a:pPr algn="r">
+              <a:lnSpc>
+                <a:spcPct val="115000"/>
+              </a:lnSpc>
+            </a:pPr>
+            <a:r>
+              <a:rPr sz="1400" b="0" i="1">
+                <a:solidFill>
+                  <a:srgbClr val="555555"/>
+                </a:solidFill>
+                <a:latin typeface="Calibri"/>
+              </a:rPr>
+              <a:t>Team: [Your names here]</a:t>
+            </a:r>
+          </a:p>
+        </p:txBody>
+      </p:sp>
+      <p:sp>
+        <p:nvSpPr>
+          <p:cNvPr id="5" name="TextBox 4"/>
+          <p:cNvSpPr txBox="1"/>
+          <p:nvPr/>
+        </p:nvSpPr>
+        <p:spPr>
+          <a:xfrm>
             <a:off x="365760" y="6537960"/>
             <a:ext cx="11430000" cy="274320"/>
           </a:xfrm>
@@ -3169,12 +3212,16 @@
           <a:noFill/>
         </p:spPr>
         <p:txBody>
-          <a:bodyPr wrap="square">
+          <a:bodyPr wrap="square" anchor="t" lIns="73152" rIns="73152">
             <a:spAutoFit/>
           </a:bodyPr>
           <a:lstStyle/>
           <a:p>
-            <a:pPr algn="ctr"/>
+            <a:pPr algn="ctr">
+              <a:lnSpc>
+                <a:spcPct val="115000"/>
+              </a:lnSpc>
+            </a:pPr>
             <a:r>
               <a:rPr sz="900" b="0" i="1">
                 <a:solidFill>
@@ -3182,7 +3229,7 @@
                 </a:solidFill>
                 <a:latin typeface="Calibri"/>
               </a:rPr>
-              <a:t>Data: CY2024 NFIRS (n=8,396 EMS calls, Jefferson geography) · P-Median + ORS road-network isochrones</a:t>
+              <a:t>Data: CY2024 NFIRS (n=8,396 EMS calls, Jefferson geography) · P-Median optimization · OpenRouteService road-network isochrones</a:t>
             </a:r>
           </a:p>
         </p:txBody>
@@ -3222,14 +3269,18 @@
           <a:noFill/>
         </p:spPr>
         <p:txBody>
-          <a:bodyPr wrap="square">
+          <a:bodyPr wrap="square" anchor="t" lIns="73152" rIns="73152">
             <a:spAutoFit/>
           </a:bodyPr>
           <a:lstStyle/>
           <a:p>
-            <a:pPr algn="l"/>
-            <a:r>
-              <a:rPr sz="3200" b="1" i="0">
+            <a:pPr algn="l">
+              <a:lnSpc>
+                <a:spcPct val="115000"/>
+              </a:lnSpc>
+            </a:pPr>
+            <a:r>
+              <a:rPr sz="3400" b="1" i="0">
                 <a:solidFill>
                   <a:srgbClr val="111111"/>
                 </a:solidFill>
@@ -3248,7 +3299,7 @@
         </p:nvSpPr>
         <p:spPr>
           <a:xfrm>
-            <a:off x="457200" y="868680"/>
+            <a:off x="457200" y="960120"/>
             <a:ext cx="11247120" cy="457200"/>
           </a:xfrm>
           <a:prstGeom prst="rect">
@@ -3257,12 +3308,16 @@
           <a:noFill/>
         </p:spPr>
         <p:txBody>
-          <a:bodyPr wrap="square">
+          <a:bodyPr wrap="square" anchor="t" lIns="73152" rIns="73152">
             <a:spAutoFit/>
           </a:bodyPr>
           <a:lstStyle/>
           <a:p>
-            <a:pPr algn="l"/>
+            <a:pPr algn="l">
+              <a:lnSpc>
+                <a:spcPct val="115000"/>
+              </a:lnSpc>
+            </a:pPr>
             <a:r>
               <a:rPr sz="1500" b="0" i="1">
                 <a:solidFill>
@@ -3270,7 +3325,7 @@
                 </a:solidFill>
                 <a:latin typeface="Calibri"/>
               </a:rPr>
-              <a:t>Each of Jefferson County's 12 departments funds its own backup ambulance — used 10-15% of the time, yet still leaving 41 coverage gaps per year.</a:t>
+              <a:t>Each of Jefferson County's 12 departments funds its own backup ambulance — used 10–15% of the time, yet still leaving 41 coverage gaps per year.</a:t>
             </a:r>
           </a:p>
         </p:txBody>
@@ -3291,8 +3346,8 @@
         </p:blipFill>
         <p:spPr>
           <a:xfrm>
-            <a:off x="457200" y="1463040"/>
-            <a:ext cx="7772400" cy="4846320"/>
+            <a:off x="365760" y="1554480"/>
+            <a:ext cx="7589520" cy="4754880"/>
           </a:xfrm>
           <a:prstGeom prst="rect">
             <a:avLst/>
@@ -3301,14 +3356,57 @@
       </p:pic>
       <p:sp>
         <p:nvSpPr>
-          <p:cNvPr id="5" name="TextBox 4"/>
+          <p:cNvPr id="5" name="Rounded Rectangle 4"/>
+          <p:cNvSpPr/>
+          <p:nvPr/>
+        </p:nvSpPr>
+        <p:spPr>
+          <a:xfrm>
+            <a:off x="8229600" y="1737360"/>
+            <a:ext cx="3566160" cy="4572000"/>
+          </a:xfrm>
+          <a:prstGeom prst="roundRect">
+            <a:avLst/>
+          </a:prstGeom>
+          <a:solidFill>
+            <a:srgbClr val="FFF5F5"/>
+          </a:solidFill>
+          <a:ln w="25400">
+            <a:solidFill>
+              <a:srgbClr val="B22222"/>
+            </a:solidFill>
+          </a:ln>
+        </p:spPr>
+        <p:style>
+          <a:lnRef idx="1">
+            <a:schemeClr val="accent1"/>
+          </a:lnRef>
+          <a:fillRef idx="3">
+            <a:schemeClr val="accent1"/>
+          </a:fillRef>
+          <a:effectRef idx="2">
+            <a:schemeClr val="accent1"/>
+          </a:effectRef>
+          <a:fontRef idx="minor">
+            <a:schemeClr val="lt1"/>
+          </a:fontRef>
+        </p:style>
+        <p:txBody>
+          <a:bodyPr rtlCol="0" anchor="ctr"/>
+          <a:lstStyle/>
+          <a:p/>
+        </p:txBody>
+      </p:sp>
+      <p:sp>
+        <p:nvSpPr>
+          <p:cNvPr id="6" name="TextBox 5"/>
           <p:cNvSpPr txBox="1"/>
           <p:nvPr/>
         </p:nvSpPr>
         <p:spPr>
           <a:xfrm>
-            <a:off x="8503920" y="1737360"/>
-            <a:ext cx="3383280" cy="457200"/>
+            <a:off x="8412480" y="1874519"/>
+            <a:ext cx="3200400" cy="457200"/>
           </a:xfrm>
           <a:prstGeom prst="rect">
             <a:avLst/>
@@ -3316,14 +3414,18 @@
           <a:noFill/>
         </p:spPr>
         <p:txBody>
-          <a:bodyPr wrap="square">
+          <a:bodyPr wrap="square" anchor="t" lIns="73152" rIns="73152">
             <a:spAutoFit/>
           </a:bodyPr>
           <a:lstStyle/>
           <a:p>
-            <a:pPr algn="l"/>
-            <a:r>
-              <a:rPr sz="1400" b="1" i="0">
+            <a:pPr algn="l">
+              <a:lnSpc>
+                <a:spcPct val="115000"/>
+              </a:lnSpc>
+            </a:pPr>
+            <a:r>
+              <a:rPr sz="1500" b="1" i="0">
                 <a:solidFill>
                   <a:srgbClr val="B22222"/>
                 </a:solidFill>
@@ -3336,14 +3438,14 @@
       </p:sp>
       <p:sp>
         <p:nvSpPr>
-          <p:cNvPr id="6" name="TextBox 5"/>
+          <p:cNvPr id="7" name="TextBox 6"/>
           <p:cNvSpPr txBox="1"/>
           <p:nvPr/>
         </p:nvSpPr>
         <p:spPr>
           <a:xfrm>
-            <a:off x="8503920" y="2194560"/>
-            <a:ext cx="3383280" cy="3657600"/>
+            <a:off x="8412480" y="2331720"/>
+            <a:ext cx="3200400" cy="3840480"/>
           </a:xfrm>
           <a:prstGeom prst="rect">
             <a:avLst/>
@@ -3351,37 +3453,110 @@
           <a:noFill/>
         </p:spPr>
         <p:txBody>
-          <a:bodyPr wrap="square">
+          <a:bodyPr wrap="square" anchor="t" lIns="73152" rIns="73152">
             <a:spAutoFit/>
           </a:bodyPr>
           <a:lstStyle/>
           <a:p>
-            <a:pPr algn="l"/>
-            <a:r>
-              <a:rPr sz="1400" b="0" i="0">
-                <a:solidFill>
-                  <a:srgbClr val="555555"/>
+            <a:pPr algn="l">
+              <a:spcAft>
+                <a:spcPts val="200"/>
+              </a:spcAft>
+            </a:pPr>
+            <a:r>
+              <a:rPr sz="3600" b="1" i="0">
+                <a:solidFill>
+                  <a:srgbClr val="B22222"/>
                 </a:solidFill>
                 <a:latin typeface="Calibri"/>
               </a:rPr>
-              <a:t>21  all-busy events/yr
-     in Ixonia alone
-     (≈ once every 2.5 weeks)
-12  all-busy events/yr
-     in Waterloo
-41  total countywide
-     where NO ambulance
-     was available
-— Every one of these calls
-waits for mutual aid from
-another county.</a:t>
-            </a:r>
-          </a:p>
-        </p:txBody>
-      </p:sp>
-      <p:sp>
-        <p:nvSpPr>
-          <p:cNvPr id="7" name="TextBox 6"/>
+              <a:t>21</a:t>
+            </a:r>
+          </a:p>
+          <a:p>
+            <a:pPr algn="l">
+              <a:spcAft>
+                <a:spcPts val="1200"/>
+              </a:spcAft>
+            </a:pPr>
+            <a:r>
+              <a:rPr sz="1100" b="0" i="1">
+                <a:solidFill>
+                  <a:srgbClr val="555555"/>
+                </a:solidFill>
+                <a:latin typeface="Calibri"/>
+              </a:rPr>
+              <a:t>all-busy events / year
+in Ixonia (≈ once / 2.5 weeks)</a:t>
+            </a:r>
+          </a:p>
+          <a:p>
+            <a:pPr algn="l">
+              <a:spcAft>
+                <a:spcPts val="200"/>
+              </a:spcAft>
+            </a:pPr>
+            <a:r>
+              <a:rPr sz="3600" b="1" i="0">
+                <a:solidFill>
+                  <a:srgbClr val="B22222"/>
+                </a:solidFill>
+                <a:latin typeface="Calibri"/>
+              </a:rPr>
+              <a:t>12</a:t>
+            </a:r>
+          </a:p>
+          <a:p>
+            <a:pPr algn="l">
+              <a:spcAft>
+                <a:spcPts val="1200"/>
+              </a:spcAft>
+            </a:pPr>
+            <a:r>
+              <a:rPr sz="1100" b="0" i="1">
+                <a:solidFill>
+                  <a:srgbClr val="555555"/>
+                </a:solidFill>
+                <a:latin typeface="Calibri"/>
+              </a:rPr>
+              <a:t>all-busy events / year
+in Waterloo</a:t>
+            </a:r>
+          </a:p>
+          <a:p>
+            <a:pPr algn="l">
+              <a:spcAft>
+                <a:spcPts val="200"/>
+              </a:spcAft>
+            </a:pPr>
+            <a:r>
+              <a:rPr sz="3600" b="1" i="0">
+                <a:solidFill>
+                  <a:srgbClr val="B22222"/>
+                </a:solidFill>
+                <a:latin typeface="Calibri"/>
+              </a:rPr>
+              <a:t>41</a:t>
+            </a:r>
+          </a:p>
+          <a:p>
+            <a:pPr algn="l"/>
+            <a:r>
+              <a:rPr sz="1100" b="0" i="1">
+                <a:solidFill>
+                  <a:srgbClr val="555555"/>
+                </a:solidFill>
+                <a:latin typeface="Calibri"/>
+              </a:rPr>
+              <a:t>countywide — NO ambulance
+was available for that 911 call</a:t>
+            </a:r>
+          </a:p>
+        </p:txBody>
+      </p:sp>
+      <p:sp>
+        <p:nvSpPr>
+          <p:cNvPr id="8" name="TextBox 7"/>
           <p:cNvSpPr txBox="1"/>
           <p:nvPr/>
         </p:nvSpPr>
@@ -3396,12 +3571,16 @@
           <a:noFill/>
         </p:spPr>
         <p:txBody>
-          <a:bodyPr wrap="square">
+          <a:bodyPr wrap="square" anchor="t" lIns="73152" rIns="73152">
             <a:spAutoFit/>
           </a:bodyPr>
           <a:lstStyle/>
           <a:p>
-            <a:pPr algn="ctr"/>
+            <a:pPr algn="ctr">
+              <a:lnSpc>
+                <a:spcPct val="115000"/>
+              </a:lnSpc>
+            </a:pPr>
             <a:r>
               <a:rPr sz="900" b="0" i="1">
                 <a:solidFill>
@@ -3432,30 +3611,45 @@
         <p:nvPr/>
       </p:nvGrpSpPr>
       <p:grpSpPr/>
-      <p:pic>
-        <p:nvPicPr>
-          <p:cNvPr id="2" name="Picture 1" descr="pitch_slide3_concept.png"/>
-          <p:cNvPicPr>
-            <a:picLocks noChangeAspect="1"/>
-          </p:cNvPicPr>
-          <p:nvPr/>
-        </p:nvPicPr>
-        <p:blipFill>
-          <a:blip r:embed="rId2"/>
-          <a:stretch>
-            <a:fillRect/>
-          </a:stretch>
-        </p:blipFill>
-        <p:spPr>
-          <a:xfrm>
-            <a:off x="274320" y="228600"/>
-            <a:ext cx="11643055" cy="6309360"/>
-          </a:xfrm>
-          <a:prstGeom prst="rect">
-            <a:avLst/>
-          </a:prstGeom>
-        </p:spPr>
-      </p:pic>
+      <p:sp>
+        <p:nvSpPr>
+          <p:cNvPr id="2" name="TextBox 1"/>
+          <p:cNvSpPr txBox="1"/>
+          <p:nvPr/>
+        </p:nvSpPr>
+        <p:spPr>
+          <a:xfrm>
+            <a:off x="457200" y="274320"/>
+            <a:ext cx="11247120" cy="640080"/>
+          </a:xfrm>
+          <a:prstGeom prst="rect">
+            <a:avLst/>
+          </a:prstGeom>
+          <a:noFill/>
+        </p:spPr>
+        <p:txBody>
+          <a:bodyPr wrap="square" anchor="t" lIns="73152" rIns="73152">
+            <a:spAutoFit/>
+          </a:bodyPr>
+          <a:lstStyle/>
+          <a:p>
+            <a:pPr algn="l">
+              <a:lnSpc>
+                <a:spcPct val="115000"/>
+              </a:lnSpc>
+            </a:pPr>
+            <a:r>
+              <a:rPr sz="3400" b="1" i="0">
+                <a:solidFill>
+                  <a:srgbClr val="111111"/>
+                </a:solidFill>
+                <a:latin typeface="Calibri"/>
+              </a:rPr>
+              <a:t>The IE Intervention: Hybrid Local + Regional</a:t>
+            </a:r>
+          </a:p>
+        </p:txBody>
+      </p:sp>
       <p:sp>
         <p:nvSpPr>
           <p:cNvPr id="3" name="TextBox 2"/>
@@ -3464,6 +3658,2625 @@
         </p:nvSpPr>
         <p:spPr>
           <a:xfrm>
+            <a:off x="457200" y="960120"/>
+            <a:ext cx="11247120" cy="457200"/>
+          </a:xfrm>
+          <a:prstGeom prst="rect">
+            <a:avLst/>
+          </a:prstGeom>
+          <a:noFill/>
+        </p:spPr>
+        <p:txBody>
+          <a:bodyPr wrap="square" anchor="t" lIns="73152" rIns="73152">
+            <a:spAutoFit/>
+          </a:bodyPr>
+          <a:lstStyle/>
+          <a:p>
+            <a:pPr algn="l">
+              <a:lnSpc>
+                <a:spcPct val="115000"/>
+              </a:lnSpc>
+            </a:pPr>
+            <a:r>
+              <a:rPr sz="1500" b="0" i="1">
+                <a:solidFill>
+                  <a:srgbClr val="2C7FB8"/>
+                </a:solidFill>
+                <a:latin typeface="Calibri"/>
+              </a:rPr>
+              <a:t>Primaries stay local. Secondaries go regional. Dispatch routes whichever unit reaches the patient fastest.</a:t>
+            </a:r>
+          </a:p>
+        </p:txBody>
+      </p:sp>
+      <p:sp>
+        <p:nvSpPr>
+          <p:cNvPr id="4" name="Rounded Rectangle 3"/>
+          <p:cNvSpPr/>
+          <p:nvPr/>
+        </p:nvSpPr>
+        <p:spPr>
+          <a:xfrm>
+            <a:off x="457200" y="1645920"/>
+            <a:ext cx="5303520" cy="4572000"/>
+          </a:xfrm>
+          <a:prstGeom prst="roundRect">
+            <a:avLst/>
+          </a:prstGeom>
+          <a:solidFill>
+            <a:srgbClr val="FFF5F5"/>
+          </a:solidFill>
+          <a:ln w="25400">
+            <a:solidFill>
+              <a:srgbClr val="B22222"/>
+            </a:solidFill>
+          </a:ln>
+        </p:spPr>
+        <p:style>
+          <a:lnRef idx="1">
+            <a:schemeClr val="accent1"/>
+          </a:lnRef>
+          <a:fillRef idx="3">
+            <a:schemeClr val="accent1"/>
+          </a:fillRef>
+          <a:effectRef idx="2">
+            <a:schemeClr val="accent1"/>
+          </a:effectRef>
+          <a:fontRef idx="minor">
+            <a:schemeClr val="lt1"/>
+          </a:fontRef>
+        </p:style>
+        <p:txBody>
+          <a:bodyPr rtlCol="0" anchor="ctr"/>
+          <a:lstStyle/>
+          <a:p/>
+        </p:txBody>
+      </p:sp>
+      <p:sp>
+        <p:nvSpPr>
+          <p:cNvPr id="5" name="TextBox 4"/>
+          <p:cNvSpPr txBox="1"/>
+          <p:nvPr/>
+        </p:nvSpPr>
+        <p:spPr>
+          <a:xfrm>
+            <a:off x="457200" y="1737360"/>
+            <a:ext cx="5303520" cy="457200"/>
+          </a:xfrm>
+          <a:prstGeom prst="rect">
+            <a:avLst/>
+          </a:prstGeom>
+          <a:noFill/>
+        </p:spPr>
+        <p:txBody>
+          <a:bodyPr wrap="square" anchor="t" lIns="73152" rIns="73152">
+            <a:spAutoFit/>
+          </a:bodyPr>
+          <a:lstStyle/>
+          <a:p>
+            <a:pPr algn="ctr">
+              <a:lnSpc>
+                <a:spcPct val="115000"/>
+              </a:lnSpc>
+            </a:pPr>
+            <a:r>
+              <a:rPr sz="2200" b="1" i="0">
+                <a:solidFill>
+                  <a:srgbClr val="B22222"/>
+                </a:solidFill>
+                <a:latin typeface="Calibri"/>
+              </a:rPr>
+              <a:t>TODAY</a:t>
+            </a:r>
+          </a:p>
+        </p:txBody>
+      </p:sp>
+      <p:sp>
+        <p:nvSpPr>
+          <p:cNvPr id="6" name="TextBox 5"/>
+          <p:cNvSpPr txBox="1"/>
+          <p:nvPr/>
+        </p:nvSpPr>
+        <p:spPr>
+          <a:xfrm>
+            <a:off x="457200" y="2194560"/>
+            <a:ext cx="5303520" cy="365760"/>
+          </a:xfrm>
+          <a:prstGeom prst="rect">
+            <a:avLst/>
+          </a:prstGeom>
+          <a:noFill/>
+        </p:spPr>
+        <p:txBody>
+          <a:bodyPr wrap="square" anchor="t" lIns="73152" rIns="73152">
+            <a:spAutoFit/>
+          </a:bodyPr>
+          <a:lstStyle/>
+          <a:p>
+            <a:pPr algn="ctr">
+              <a:lnSpc>
+                <a:spcPct val="115000"/>
+              </a:lnSpc>
+            </a:pPr>
+            <a:r>
+              <a:rPr sz="1300" b="0" i="1">
+                <a:solidFill>
+                  <a:srgbClr val="555555"/>
+                </a:solidFill>
+                <a:latin typeface="Calibri"/>
+              </a:rPr>
+              <a:t>12 independent departments</a:t>
+            </a:r>
+          </a:p>
+        </p:txBody>
+      </p:sp>
+      <p:sp>
+        <p:nvSpPr>
+          <p:cNvPr id="7" name="Rounded Rectangle 6"/>
+          <p:cNvSpPr/>
+          <p:nvPr/>
+        </p:nvSpPr>
+        <p:spPr>
+          <a:xfrm>
+            <a:off x="617219" y="2697480"/>
+            <a:ext cx="960120" cy="2103120"/>
+          </a:xfrm>
+          <a:prstGeom prst="roundRect">
+            <a:avLst/>
+          </a:prstGeom>
+          <a:solidFill>
+            <a:srgbClr val="FFFFFF"/>
+          </a:solidFill>
+          <a:ln w="15240">
+            <a:solidFill>
+              <a:srgbClr val="B22222"/>
+            </a:solidFill>
+          </a:ln>
+        </p:spPr>
+        <p:style>
+          <a:lnRef idx="1">
+            <a:schemeClr val="accent1"/>
+          </a:lnRef>
+          <a:fillRef idx="3">
+            <a:schemeClr val="accent1"/>
+          </a:fillRef>
+          <a:effectRef idx="2">
+            <a:schemeClr val="accent1"/>
+          </a:effectRef>
+          <a:fontRef idx="minor">
+            <a:schemeClr val="lt1"/>
+          </a:fontRef>
+        </p:style>
+        <p:txBody>
+          <a:bodyPr rtlCol="0" anchor="ctr"/>
+          <a:lstStyle/>
+          <a:p/>
+        </p:txBody>
+      </p:sp>
+      <p:sp>
+        <p:nvSpPr>
+          <p:cNvPr id="8" name="TextBox 7"/>
+          <p:cNvSpPr txBox="1"/>
+          <p:nvPr/>
+        </p:nvSpPr>
+        <p:spPr>
+          <a:xfrm>
+            <a:off x="617219" y="2788920"/>
+            <a:ext cx="960120" cy="274320"/>
+          </a:xfrm>
+          <a:prstGeom prst="rect">
+            <a:avLst/>
+          </a:prstGeom>
+          <a:noFill/>
+        </p:spPr>
+        <p:txBody>
+          <a:bodyPr wrap="square" anchor="t" lIns="73152" rIns="73152">
+            <a:spAutoFit/>
+          </a:bodyPr>
+          <a:lstStyle/>
+          <a:p>
+            <a:pPr algn="ctr">
+              <a:lnSpc>
+                <a:spcPct val="115000"/>
+              </a:lnSpc>
+            </a:pPr>
+            <a:r>
+              <a:rPr sz="1000" b="1" i="0">
+                <a:solidFill>
+                  <a:srgbClr val="B22222"/>
+                </a:solidFill>
+                <a:latin typeface="Calibri"/>
+              </a:rPr>
+              <a:t>Dept A</a:t>
+            </a:r>
+          </a:p>
+        </p:txBody>
+      </p:sp>
+      <p:sp>
+        <p:nvSpPr>
+          <p:cNvPr id="9" name="Rounded Rectangle 8"/>
+          <p:cNvSpPr/>
+          <p:nvPr/>
+        </p:nvSpPr>
+        <p:spPr>
+          <a:xfrm>
+            <a:off x="845819" y="3108960"/>
+            <a:ext cx="502920" cy="502920"/>
+          </a:xfrm>
+          <a:prstGeom prst="roundRect">
+            <a:avLst/>
+          </a:prstGeom>
+          <a:solidFill>
+            <a:srgbClr val="B22222"/>
+          </a:solidFill>
+          <a:ln w="6350">
+            <a:solidFill>
+              <a:srgbClr val="B22222"/>
+            </a:solidFill>
+          </a:ln>
+        </p:spPr>
+        <p:style>
+          <a:lnRef idx="1">
+            <a:schemeClr val="accent1"/>
+          </a:lnRef>
+          <a:fillRef idx="3">
+            <a:schemeClr val="accent1"/>
+          </a:fillRef>
+          <a:effectRef idx="2">
+            <a:schemeClr val="accent1"/>
+          </a:effectRef>
+          <a:fontRef idx="minor">
+            <a:schemeClr val="lt1"/>
+          </a:fontRef>
+        </p:style>
+        <p:txBody>
+          <a:bodyPr rtlCol="0" anchor="ctr"/>
+          <a:lstStyle/>
+          <a:p/>
+        </p:txBody>
+      </p:sp>
+      <p:sp>
+        <p:nvSpPr>
+          <p:cNvPr id="10" name="TextBox 9"/>
+          <p:cNvSpPr txBox="1"/>
+          <p:nvPr/>
+        </p:nvSpPr>
+        <p:spPr>
+          <a:xfrm>
+            <a:off x="617219" y="3657600"/>
+            <a:ext cx="960120" cy="274320"/>
+          </a:xfrm>
+          <a:prstGeom prst="rect">
+            <a:avLst/>
+          </a:prstGeom>
+          <a:noFill/>
+        </p:spPr>
+        <p:txBody>
+          <a:bodyPr wrap="square" anchor="t" lIns="73152" rIns="73152">
+            <a:spAutoFit/>
+          </a:bodyPr>
+          <a:lstStyle/>
+          <a:p>
+            <a:pPr algn="ctr">
+              <a:lnSpc>
+                <a:spcPct val="115000"/>
+              </a:lnSpc>
+            </a:pPr>
+            <a:r>
+              <a:rPr sz="900" b="0" i="0">
+                <a:solidFill>
+                  <a:srgbClr val="111111"/>
+                </a:solidFill>
+                <a:latin typeface="Calibri"/>
+              </a:rPr>
+              <a:t>Primary</a:t>
+            </a:r>
+          </a:p>
+        </p:txBody>
+      </p:sp>
+      <p:sp>
+        <p:nvSpPr>
+          <p:cNvPr id="11" name="Rounded Rectangle 10"/>
+          <p:cNvSpPr/>
+          <p:nvPr/>
+        </p:nvSpPr>
+        <p:spPr>
+          <a:xfrm>
+            <a:off x="845819" y="3931920"/>
+            <a:ext cx="502920" cy="502920"/>
+          </a:xfrm>
+          <a:prstGeom prst="roundRect">
+            <a:avLst/>
+          </a:prstGeom>
+          <a:solidFill>
+            <a:srgbClr val="FFFFFF"/>
+          </a:solidFill>
+          <a:ln w="12700">
+            <a:solidFill>
+              <a:srgbClr val="777777"/>
+            </a:solidFill>
+          </a:ln>
+        </p:spPr>
+        <p:style>
+          <a:lnRef idx="1">
+            <a:schemeClr val="accent1"/>
+          </a:lnRef>
+          <a:fillRef idx="3">
+            <a:schemeClr val="accent1"/>
+          </a:fillRef>
+          <a:effectRef idx="2">
+            <a:schemeClr val="accent1"/>
+          </a:effectRef>
+          <a:fontRef idx="minor">
+            <a:schemeClr val="lt1"/>
+          </a:fontRef>
+        </p:style>
+        <p:txBody>
+          <a:bodyPr rtlCol="0" anchor="ctr"/>
+          <a:lstStyle/>
+          <a:p/>
+        </p:txBody>
+      </p:sp>
+      <p:sp>
+        <p:nvSpPr>
+          <p:cNvPr id="12" name="TextBox 11"/>
+          <p:cNvSpPr txBox="1"/>
+          <p:nvPr/>
+        </p:nvSpPr>
+        <p:spPr>
+          <a:xfrm>
+            <a:off x="617219" y="4480560"/>
+            <a:ext cx="960120" cy="274320"/>
+          </a:xfrm>
+          <a:prstGeom prst="rect">
+            <a:avLst/>
+          </a:prstGeom>
+          <a:noFill/>
+        </p:spPr>
+        <p:txBody>
+          <a:bodyPr wrap="square" anchor="t" lIns="73152" rIns="73152">
+            <a:spAutoFit/>
+          </a:bodyPr>
+          <a:lstStyle/>
+          <a:p>
+            <a:pPr algn="ctr">
+              <a:lnSpc>
+                <a:spcPct val="115000"/>
+              </a:lnSpc>
+            </a:pPr>
+            <a:r>
+              <a:rPr sz="900" b="0" i="1">
+                <a:solidFill>
+                  <a:srgbClr val="777777"/>
+                </a:solidFill>
+                <a:latin typeface="Calibri"/>
+              </a:rPr>
+              <a:t>Backup</a:t>
+            </a:r>
+          </a:p>
+        </p:txBody>
+      </p:sp>
+      <p:sp>
+        <p:nvSpPr>
+          <p:cNvPr id="13" name="Rounded Rectangle 12"/>
+          <p:cNvSpPr/>
+          <p:nvPr/>
+        </p:nvSpPr>
+        <p:spPr>
+          <a:xfrm>
+            <a:off x="1623060" y="2697480"/>
+            <a:ext cx="960120" cy="2103120"/>
+          </a:xfrm>
+          <a:prstGeom prst="roundRect">
+            <a:avLst/>
+          </a:prstGeom>
+          <a:solidFill>
+            <a:srgbClr val="FFFFFF"/>
+          </a:solidFill>
+          <a:ln w="15240">
+            <a:solidFill>
+              <a:srgbClr val="B22222"/>
+            </a:solidFill>
+          </a:ln>
+        </p:spPr>
+        <p:style>
+          <a:lnRef idx="1">
+            <a:schemeClr val="accent1"/>
+          </a:lnRef>
+          <a:fillRef idx="3">
+            <a:schemeClr val="accent1"/>
+          </a:fillRef>
+          <a:effectRef idx="2">
+            <a:schemeClr val="accent1"/>
+          </a:effectRef>
+          <a:fontRef idx="minor">
+            <a:schemeClr val="lt1"/>
+          </a:fontRef>
+        </p:style>
+        <p:txBody>
+          <a:bodyPr rtlCol="0" anchor="ctr"/>
+          <a:lstStyle/>
+          <a:p/>
+        </p:txBody>
+      </p:sp>
+      <p:sp>
+        <p:nvSpPr>
+          <p:cNvPr id="14" name="TextBox 13"/>
+          <p:cNvSpPr txBox="1"/>
+          <p:nvPr/>
+        </p:nvSpPr>
+        <p:spPr>
+          <a:xfrm>
+            <a:off x="1623060" y="2788920"/>
+            <a:ext cx="960120" cy="274320"/>
+          </a:xfrm>
+          <a:prstGeom prst="rect">
+            <a:avLst/>
+          </a:prstGeom>
+          <a:noFill/>
+        </p:spPr>
+        <p:txBody>
+          <a:bodyPr wrap="square" anchor="t" lIns="73152" rIns="73152">
+            <a:spAutoFit/>
+          </a:bodyPr>
+          <a:lstStyle/>
+          <a:p>
+            <a:pPr algn="ctr">
+              <a:lnSpc>
+                <a:spcPct val="115000"/>
+              </a:lnSpc>
+            </a:pPr>
+            <a:r>
+              <a:rPr sz="1000" b="1" i="0">
+                <a:solidFill>
+                  <a:srgbClr val="B22222"/>
+                </a:solidFill>
+                <a:latin typeface="Calibri"/>
+              </a:rPr>
+              <a:t>Dept B</a:t>
+            </a:r>
+          </a:p>
+        </p:txBody>
+      </p:sp>
+      <p:sp>
+        <p:nvSpPr>
+          <p:cNvPr id="15" name="Rounded Rectangle 14"/>
+          <p:cNvSpPr/>
+          <p:nvPr/>
+        </p:nvSpPr>
+        <p:spPr>
+          <a:xfrm>
+            <a:off x="1851660" y="3108960"/>
+            <a:ext cx="502920" cy="502920"/>
+          </a:xfrm>
+          <a:prstGeom prst="roundRect">
+            <a:avLst/>
+          </a:prstGeom>
+          <a:solidFill>
+            <a:srgbClr val="B22222"/>
+          </a:solidFill>
+          <a:ln w="6350">
+            <a:solidFill>
+              <a:srgbClr val="B22222"/>
+            </a:solidFill>
+          </a:ln>
+        </p:spPr>
+        <p:style>
+          <a:lnRef idx="1">
+            <a:schemeClr val="accent1"/>
+          </a:lnRef>
+          <a:fillRef idx="3">
+            <a:schemeClr val="accent1"/>
+          </a:fillRef>
+          <a:effectRef idx="2">
+            <a:schemeClr val="accent1"/>
+          </a:effectRef>
+          <a:fontRef idx="minor">
+            <a:schemeClr val="lt1"/>
+          </a:fontRef>
+        </p:style>
+        <p:txBody>
+          <a:bodyPr rtlCol="0" anchor="ctr"/>
+          <a:lstStyle/>
+          <a:p/>
+        </p:txBody>
+      </p:sp>
+      <p:sp>
+        <p:nvSpPr>
+          <p:cNvPr id="16" name="TextBox 15"/>
+          <p:cNvSpPr txBox="1"/>
+          <p:nvPr/>
+        </p:nvSpPr>
+        <p:spPr>
+          <a:xfrm>
+            <a:off x="1623060" y="3657600"/>
+            <a:ext cx="960120" cy="274320"/>
+          </a:xfrm>
+          <a:prstGeom prst="rect">
+            <a:avLst/>
+          </a:prstGeom>
+          <a:noFill/>
+        </p:spPr>
+        <p:txBody>
+          <a:bodyPr wrap="square" anchor="t" lIns="73152" rIns="73152">
+            <a:spAutoFit/>
+          </a:bodyPr>
+          <a:lstStyle/>
+          <a:p>
+            <a:pPr algn="ctr">
+              <a:lnSpc>
+                <a:spcPct val="115000"/>
+              </a:lnSpc>
+            </a:pPr>
+            <a:r>
+              <a:rPr sz="900" b="0" i="0">
+                <a:solidFill>
+                  <a:srgbClr val="111111"/>
+                </a:solidFill>
+                <a:latin typeface="Calibri"/>
+              </a:rPr>
+              <a:t>Primary</a:t>
+            </a:r>
+          </a:p>
+        </p:txBody>
+      </p:sp>
+      <p:sp>
+        <p:nvSpPr>
+          <p:cNvPr id="17" name="Rounded Rectangle 16"/>
+          <p:cNvSpPr/>
+          <p:nvPr/>
+        </p:nvSpPr>
+        <p:spPr>
+          <a:xfrm>
+            <a:off x="1851660" y="3931920"/>
+            <a:ext cx="502920" cy="502920"/>
+          </a:xfrm>
+          <a:prstGeom prst="roundRect">
+            <a:avLst/>
+          </a:prstGeom>
+          <a:solidFill>
+            <a:srgbClr val="FFFFFF"/>
+          </a:solidFill>
+          <a:ln w="12700">
+            <a:solidFill>
+              <a:srgbClr val="777777"/>
+            </a:solidFill>
+          </a:ln>
+        </p:spPr>
+        <p:style>
+          <a:lnRef idx="1">
+            <a:schemeClr val="accent1"/>
+          </a:lnRef>
+          <a:fillRef idx="3">
+            <a:schemeClr val="accent1"/>
+          </a:fillRef>
+          <a:effectRef idx="2">
+            <a:schemeClr val="accent1"/>
+          </a:effectRef>
+          <a:fontRef idx="minor">
+            <a:schemeClr val="lt1"/>
+          </a:fontRef>
+        </p:style>
+        <p:txBody>
+          <a:bodyPr rtlCol="0" anchor="ctr"/>
+          <a:lstStyle/>
+          <a:p/>
+        </p:txBody>
+      </p:sp>
+      <p:sp>
+        <p:nvSpPr>
+          <p:cNvPr id="18" name="TextBox 17"/>
+          <p:cNvSpPr txBox="1"/>
+          <p:nvPr/>
+        </p:nvSpPr>
+        <p:spPr>
+          <a:xfrm>
+            <a:off x="1623060" y="4480560"/>
+            <a:ext cx="960120" cy="274320"/>
+          </a:xfrm>
+          <a:prstGeom prst="rect">
+            <a:avLst/>
+          </a:prstGeom>
+          <a:noFill/>
+        </p:spPr>
+        <p:txBody>
+          <a:bodyPr wrap="square" anchor="t" lIns="73152" rIns="73152">
+            <a:spAutoFit/>
+          </a:bodyPr>
+          <a:lstStyle/>
+          <a:p>
+            <a:pPr algn="ctr">
+              <a:lnSpc>
+                <a:spcPct val="115000"/>
+              </a:lnSpc>
+            </a:pPr>
+            <a:r>
+              <a:rPr sz="900" b="0" i="1">
+                <a:solidFill>
+                  <a:srgbClr val="777777"/>
+                </a:solidFill>
+                <a:latin typeface="Calibri"/>
+              </a:rPr>
+              <a:t>Backup</a:t>
+            </a:r>
+          </a:p>
+        </p:txBody>
+      </p:sp>
+      <p:sp>
+        <p:nvSpPr>
+          <p:cNvPr id="19" name="Rounded Rectangle 18"/>
+          <p:cNvSpPr/>
+          <p:nvPr/>
+        </p:nvSpPr>
+        <p:spPr>
+          <a:xfrm>
+            <a:off x="2628900" y="2697480"/>
+            <a:ext cx="960120" cy="2103120"/>
+          </a:xfrm>
+          <a:prstGeom prst="roundRect">
+            <a:avLst/>
+          </a:prstGeom>
+          <a:solidFill>
+            <a:srgbClr val="FFFFFF"/>
+          </a:solidFill>
+          <a:ln w="15240">
+            <a:solidFill>
+              <a:srgbClr val="B22222"/>
+            </a:solidFill>
+          </a:ln>
+        </p:spPr>
+        <p:style>
+          <a:lnRef idx="1">
+            <a:schemeClr val="accent1"/>
+          </a:lnRef>
+          <a:fillRef idx="3">
+            <a:schemeClr val="accent1"/>
+          </a:fillRef>
+          <a:effectRef idx="2">
+            <a:schemeClr val="accent1"/>
+          </a:effectRef>
+          <a:fontRef idx="minor">
+            <a:schemeClr val="lt1"/>
+          </a:fontRef>
+        </p:style>
+        <p:txBody>
+          <a:bodyPr rtlCol="0" anchor="ctr"/>
+          <a:lstStyle/>
+          <a:p/>
+        </p:txBody>
+      </p:sp>
+      <p:sp>
+        <p:nvSpPr>
+          <p:cNvPr id="20" name="TextBox 19"/>
+          <p:cNvSpPr txBox="1"/>
+          <p:nvPr/>
+        </p:nvSpPr>
+        <p:spPr>
+          <a:xfrm>
+            <a:off x="2628900" y="2788920"/>
+            <a:ext cx="960120" cy="274320"/>
+          </a:xfrm>
+          <a:prstGeom prst="rect">
+            <a:avLst/>
+          </a:prstGeom>
+          <a:noFill/>
+        </p:spPr>
+        <p:txBody>
+          <a:bodyPr wrap="square" anchor="t" lIns="73152" rIns="73152">
+            <a:spAutoFit/>
+          </a:bodyPr>
+          <a:lstStyle/>
+          <a:p>
+            <a:pPr algn="ctr">
+              <a:lnSpc>
+                <a:spcPct val="115000"/>
+              </a:lnSpc>
+            </a:pPr>
+            <a:r>
+              <a:rPr sz="1000" b="1" i="0">
+                <a:solidFill>
+                  <a:srgbClr val="B22222"/>
+                </a:solidFill>
+                <a:latin typeface="Calibri"/>
+              </a:rPr>
+              <a:t>Dept C</a:t>
+            </a:r>
+          </a:p>
+        </p:txBody>
+      </p:sp>
+      <p:sp>
+        <p:nvSpPr>
+          <p:cNvPr id="21" name="Rounded Rectangle 20"/>
+          <p:cNvSpPr/>
+          <p:nvPr/>
+        </p:nvSpPr>
+        <p:spPr>
+          <a:xfrm>
+            <a:off x="2857500" y="3108960"/>
+            <a:ext cx="502920" cy="502920"/>
+          </a:xfrm>
+          <a:prstGeom prst="roundRect">
+            <a:avLst/>
+          </a:prstGeom>
+          <a:solidFill>
+            <a:srgbClr val="B22222"/>
+          </a:solidFill>
+          <a:ln w="6350">
+            <a:solidFill>
+              <a:srgbClr val="B22222"/>
+            </a:solidFill>
+          </a:ln>
+        </p:spPr>
+        <p:style>
+          <a:lnRef idx="1">
+            <a:schemeClr val="accent1"/>
+          </a:lnRef>
+          <a:fillRef idx="3">
+            <a:schemeClr val="accent1"/>
+          </a:fillRef>
+          <a:effectRef idx="2">
+            <a:schemeClr val="accent1"/>
+          </a:effectRef>
+          <a:fontRef idx="minor">
+            <a:schemeClr val="lt1"/>
+          </a:fontRef>
+        </p:style>
+        <p:txBody>
+          <a:bodyPr rtlCol="0" anchor="ctr"/>
+          <a:lstStyle/>
+          <a:p/>
+        </p:txBody>
+      </p:sp>
+      <p:sp>
+        <p:nvSpPr>
+          <p:cNvPr id="22" name="TextBox 21"/>
+          <p:cNvSpPr txBox="1"/>
+          <p:nvPr/>
+        </p:nvSpPr>
+        <p:spPr>
+          <a:xfrm>
+            <a:off x="2628900" y="3657600"/>
+            <a:ext cx="960120" cy="274320"/>
+          </a:xfrm>
+          <a:prstGeom prst="rect">
+            <a:avLst/>
+          </a:prstGeom>
+          <a:noFill/>
+        </p:spPr>
+        <p:txBody>
+          <a:bodyPr wrap="square" anchor="t" lIns="73152" rIns="73152">
+            <a:spAutoFit/>
+          </a:bodyPr>
+          <a:lstStyle/>
+          <a:p>
+            <a:pPr algn="ctr">
+              <a:lnSpc>
+                <a:spcPct val="115000"/>
+              </a:lnSpc>
+            </a:pPr>
+            <a:r>
+              <a:rPr sz="900" b="0" i="0">
+                <a:solidFill>
+                  <a:srgbClr val="111111"/>
+                </a:solidFill>
+                <a:latin typeface="Calibri"/>
+              </a:rPr>
+              <a:t>Primary</a:t>
+            </a:r>
+          </a:p>
+        </p:txBody>
+      </p:sp>
+      <p:sp>
+        <p:nvSpPr>
+          <p:cNvPr id="23" name="Rounded Rectangle 22"/>
+          <p:cNvSpPr/>
+          <p:nvPr/>
+        </p:nvSpPr>
+        <p:spPr>
+          <a:xfrm>
+            <a:off x="2857500" y="3931920"/>
+            <a:ext cx="502920" cy="502920"/>
+          </a:xfrm>
+          <a:prstGeom prst="roundRect">
+            <a:avLst/>
+          </a:prstGeom>
+          <a:solidFill>
+            <a:srgbClr val="FFFFFF"/>
+          </a:solidFill>
+          <a:ln w="12700">
+            <a:solidFill>
+              <a:srgbClr val="777777"/>
+            </a:solidFill>
+          </a:ln>
+        </p:spPr>
+        <p:style>
+          <a:lnRef idx="1">
+            <a:schemeClr val="accent1"/>
+          </a:lnRef>
+          <a:fillRef idx="3">
+            <a:schemeClr val="accent1"/>
+          </a:fillRef>
+          <a:effectRef idx="2">
+            <a:schemeClr val="accent1"/>
+          </a:effectRef>
+          <a:fontRef idx="minor">
+            <a:schemeClr val="lt1"/>
+          </a:fontRef>
+        </p:style>
+        <p:txBody>
+          <a:bodyPr rtlCol="0" anchor="ctr"/>
+          <a:lstStyle/>
+          <a:p/>
+        </p:txBody>
+      </p:sp>
+      <p:sp>
+        <p:nvSpPr>
+          <p:cNvPr id="24" name="TextBox 23"/>
+          <p:cNvSpPr txBox="1"/>
+          <p:nvPr/>
+        </p:nvSpPr>
+        <p:spPr>
+          <a:xfrm>
+            <a:off x="2628900" y="4480560"/>
+            <a:ext cx="960120" cy="274320"/>
+          </a:xfrm>
+          <a:prstGeom prst="rect">
+            <a:avLst/>
+          </a:prstGeom>
+          <a:noFill/>
+        </p:spPr>
+        <p:txBody>
+          <a:bodyPr wrap="square" anchor="t" lIns="73152" rIns="73152">
+            <a:spAutoFit/>
+          </a:bodyPr>
+          <a:lstStyle/>
+          <a:p>
+            <a:pPr algn="ctr">
+              <a:lnSpc>
+                <a:spcPct val="115000"/>
+              </a:lnSpc>
+            </a:pPr>
+            <a:r>
+              <a:rPr sz="900" b="0" i="1">
+                <a:solidFill>
+                  <a:srgbClr val="777777"/>
+                </a:solidFill>
+                <a:latin typeface="Calibri"/>
+              </a:rPr>
+              <a:t>Backup</a:t>
+            </a:r>
+          </a:p>
+        </p:txBody>
+      </p:sp>
+      <p:sp>
+        <p:nvSpPr>
+          <p:cNvPr id="25" name="Rounded Rectangle 24"/>
+          <p:cNvSpPr/>
+          <p:nvPr/>
+        </p:nvSpPr>
+        <p:spPr>
+          <a:xfrm>
+            <a:off x="3634740" y="2697480"/>
+            <a:ext cx="960120" cy="2103120"/>
+          </a:xfrm>
+          <a:prstGeom prst="roundRect">
+            <a:avLst/>
+          </a:prstGeom>
+          <a:solidFill>
+            <a:srgbClr val="FFFFFF"/>
+          </a:solidFill>
+          <a:ln w="15240">
+            <a:solidFill>
+              <a:srgbClr val="B22222"/>
+            </a:solidFill>
+          </a:ln>
+        </p:spPr>
+        <p:style>
+          <a:lnRef idx="1">
+            <a:schemeClr val="accent1"/>
+          </a:lnRef>
+          <a:fillRef idx="3">
+            <a:schemeClr val="accent1"/>
+          </a:fillRef>
+          <a:effectRef idx="2">
+            <a:schemeClr val="accent1"/>
+          </a:effectRef>
+          <a:fontRef idx="minor">
+            <a:schemeClr val="lt1"/>
+          </a:fontRef>
+        </p:style>
+        <p:txBody>
+          <a:bodyPr rtlCol="0" anchor="ctr"/>
+          <a:lstStyle/>
+          <a:p/>
+        </p:txBody>
+      </p:sp>
+      <p:sp>
+        <p:nvSpPr>
+          <p:cNvPr id="26" name="TextBox 25"/>
+          <p:cNvSpPr txBox="1"/>
+          <p:nvPr/>
+        </p:nvSpPr>
+        <p:spPr>
+          <a:xfrm>
+            <a:off x="3634740" y="2788920"/>
+            <a:ext cx="960120" cy="274320"/>
+          </a:xfrm>
+          <a:prstGeom prst="rect">
+            <a:avLst/>
+          </a:prstGeom>
+          <a:noFill/>
+        </p:spPr>
+        <p:txBody>
+          <a:bodyPr wrap="square" anchor="t" lIns="73152" rIns="73152">
+            <a:spAutoFit/>
+          </a:bodyPr>
+          <a:lstStyle/>
+          <a:p>
+            <a:pPr algn="ctr">
+              <a:lnSpc>
+                <a:spcPct val="115000"/>
+              </a:lnSpc>
+            </a:pPr>
+            <a:r>
+              <a:rPr sz="1000" b="1" i="0">
+                <a:solidFill>
+                  <a:srgbClr val="B22222"/>
+                </a:solidFill>
+                <a:latin typeface="Calibri"/>
+              </a:rPr>
+              <a:t>Dept D</a:t>
+            </a:r>
+          </a:p>
+        </p:txBody>
+      </p:sp>
+      <p:sp>
+        <p:nvSpPr>
+          <p:cNvPr id="27" name="Rounded Rectangle 26"/>
+          <p:cNvSpPr/>
+          <p:nvPr/>
+        </p:nvSpPr>
+        <p:spPr>
+          <a:xfrm>
+            <a:off x="3863339" y="3108960"/>
+            <a:ext cx="502920" cy="502920"/>
+          </a:xfrm>
+          <a:prstGeom prst="roundRect">
+            <a:avLst/>
+          </a:prstGeom>
+          <a:solidFill>
+            <a:srgbClr val="B22222"/>
+          </a:solidFill>
+          <a:ln w="6350">
+            <a:solidFill>
+              <a:srgbClr val="B22222"/>
+            </a:solidFill>
+          </a:ln>
+        </p:spPr>
+        <p:style>
+          <a:lnRef idx="1">
+            <a:schemeClr val="accent1"/>
+          </a:lnRef>
+          <a:fillRef idx="3">
+            <a:schemeClr val="accent1"/>
+          </a:fillRef>
+          <a:effectRef idx="2">
+            <a:schemeClr val="accent1"/>
+          </a:effectRef>
+          <a:fontRef idx="minor">
+            <a:schemeClr val="lt1"/>
+          </a:fontRef>
+        </p:style>
+        <p:txBody>
+          <a:bodyPr rtlCol="0" anchor="ctr"/>
+          <a:lstStyle/>
+          <a:p/>
+        </p:txBody>
+      </p:sp>
+      <p:sp>
+        <p:nvSpPr>
+          <p:cNvPr id="28" name="TextBox 27"/>
+          <p:cNvSpPr txBox="1"/>
+          <p:nvPr/>
+        </p:nvSpPr>
+        <p:spPr>
+          <a:xfrm>
+            <a:off x="3634740" y="3657600"/>
+            <a:ext cx="960120" cy="274320"/>
+          </a:xfrm>
+          <a:prstGeom prst="rect">
+            <a:avLst/>
+          </a:prstGeom>
+          <a:noFill/>
+        </p:spPr>
+        <p:txBody>
+          <a:bodyPr wrap="square" anchor="t" lIns="73152" rIns="73152">
+            <a:spAutoFit/>
+          </a:bodyPr>
+          <a:lstStyle/>
+          <a:p>
+            <a:pPr algn="ctr">
+              <a:lnSpc>
+                <a:spcPct val="115000"/>
+              </a:lnSpc>
+            </a:pPr>
+            <a:r>
+              <a:rPr sz="900" b="0" i="0">
+                <a:solidFill>
+                  <a:srgbClr val="111111"/>
+                </a:solidFill>
+                <a:latin typeface="Calibri"/>
+              </a:rPr>
+              <a:t>Primary</a:t>
+            </a:r>
+          </a:p>
+        </p:txBody>
+      </p:sp>
+      <p:sp>
+        <p:nvSpPr>
+          <p:cNvPr id="29" name="Rounded Rectangle 28"/>
+          <p:cNvSpPr/>
+          <p:nvPr/>
+        </p:nvSpPr>
+        <p:spPr>
+          <a:xfrm>
+            <a:off x="3863339" y="3931920"/>
+            <a:ext cx="502920" cy="502920"/>
+          </a:xfrm>
+          <a:prstGeom prst="roundRect">
+            <a:avLst/>
+          </a:prstGeom>
+          <a:solidFill>
+            <a:srgbClr val="FFFFFF"/>
+          </a:solidFill>
+          <a:ln w="12700">
+            <a:solidFill>
+              <a:srgbClr val="777777"/>
+            </a:solidFill>
+          </a:ln>
+        </p:spPr>
+        <p:style>
+          <a:lnRef idx="1">
+            <a:schemeClr val="accent1"/>
+          </a:lnRef>
+          <a:fillRef idx="3">
+            <a:schemeClr val="accent1"/>
+          </a:fillRef>
+          <a:effectRef idx="2">
+            <a:schemeClr val="accent1"/>
+          </a:effectRef>
+          <a:fontRef idx="minor">
+            <a:schemeClr val="lt1"/>
+          </a:fontRef>
+        </p:style>
+        <p:txBody>
+          <a:bodyPr rtlCol="0" anchor="ctr"/>
+          <a:lstStyle/>
+          <a:p/>
+        </p:txBody>
+      </p:sp>
+      <p:sp>
+        <p:nvSpPr>
+          <p:cNvPr id="30" name="TextBox 29"/>
+          <p:cNvSpPr txBox="1"/>
+          <p:nvPr/>
+        </p:nvSpPr>
+        <p:spPr>
+          <a:xfrm>
+            <a:off x="3634740" y="4480560"/>
+            <a:ext cx="960120" cy="274320"/>
+          </a:xfrm>
+          <a:prstGeom prst="rect">
+            <a:avLst/>
+          </a:prstGeom>
+          <a:noFill/>
+        </p:spPr>
+        <p:txBody>
+          <a:bodyPr wrap="square" anchor="t" lIns="73152" rIns="73152">
+            <a:spAutoFit/>
+          </a:bodyPr>
+          <a:lstStyle/>
+          <a:p>
+            <a:pPr algn="ctr">
+              <a:lnSpc>
+                <a:spcPct val="115000"/>
+              </a:lnSpc>
+            </a:pPr>
+            <a:r>
+              <a:rPr sz="900" b="0" i="1">
+                <a:solidFill>
+                  <a:srgbClr val="777777"/>
+                </a:solidFill>
+                <a:latin typeface="Calibri"/>
+              </a:rPr>
+              <a:t>Backup</a:t>
+            </a:r>
+          </a:p>
+        </p:txBody>
+      </p:sp>
+      <p:sp>
+        <p:nvSpPr>
+          <p:cNvPr id="31" name="Rounded Rectangle 30"/>
+          <p:cNvSpPr/>
+          <p:nvPr/>
+        </p:nvSpPr>
+        <p:spPr>
+          <a:xfrm>
+            <a:off x="4640580" y="2697480"/>
+            <a:ext cx="960120" cy="2103120"/>
+          </a:xfrm>
+          <a:prstGeom prst="roundRect">
+            <a:avLst/>
+          </a:prstGeom>
+          <a:solidFill>
+            <a:srgbClr val="FFFFFF"/>
+          </a:solidFill>
+          <a:ln w="15240">
+            <a:solidFill>
+              <a:srgbClr val="B22222"/>
+            </a:solidFill>
+          </a:ln>
+        </p:spPr>
+        <p:style>
+          <a:lnRef idx="1">
+            <a:schemeClr val="accent1"/>
+          </a:lnRef>
+          <a:fillRef idx="3">
+            <a:schemeClr val="accent1"/>
+          </a:fillRef>
+          <a:effectRef idx="2">
+            <a:schemeClr val="accent1"/>
+          </a:effectRef>
+          <a:fontRef idx="minor">
+            <a:schemeClr val="lt1"/>
+          </a:fontRef>
+        </p:style>
+        <p:txBody>
+          <a:bodyPr rtlCol="0" anchor="ctr"/>
+          <a:lstStyle/>
+          <a:p/>
+        </p:txBody>
+      </p:sp>
+      <p:sp>
+        <p:nvSpPr>
+          <p:cNvPr id="32" name="TextBox 31"/>
+          <p:cNvSpPr txBox="1"/>
+          <p:nvPr/>
+        </p:nvSpPr>
+        <p:spPr>
+          <a:xfrm>
+            <a:off x="4640580" y="2788920"/>
+            <a:ext cx="960120" cy="274320"/>
+          </a:xfrm>
+          <a:prstGeom prst="rect">
+            <a:avLst/>
+          </a:prstGeom>
+          <a:noFill/>
+        </p:spPr>
+        <p:txBody>
+          <a:bodyPr wrap="square" anchor="t" lIns="73152" rIns="73152">
+            <a:spAutoFit/>
+          </a:bodyPr>
+          <a:lstStyle/>
+          <a:p>
+            <a:pPr algn="ctr">
+              <a:lnSpc>
+                <a:spcPct val="115000"/>
+              </a:lnSpc>
+            </a:pPr>
+            <a:r>
+              <a:rPr sz="1000" b="1" i="0">
+                <a:solidFill>
+                  <a:srgbClr val="B22222"/>
+                </a:solidFill>
+                <a:latin typeface="Calibri"/>
+              </a:rPr>
+              <a:t>Dept E</a:t>
+            </a:r>
+          </a:p>
+        </p:txBody>
+      </p:sp>
+      <p:sp>
+        <p:nvSpPr>
+          <p:cNvPr id="33" name="Rounded Rectangle 32"/>
+          <p:cNvSpPr/>
+          <p:nvPr/>
+        </p:nvSpPr>
+        <p:spPr>
+          <a:xfrm>
+            <a:off x="4869180" y="3108960"/>
+            <a:ext cx="502920" cy="502920"/>
+          </a:xfrm>
+          <a:prstGeom prst="roundRect">
+            <a:avLst/>
+          </a:prstGeom>
+          <a:solidFill>
+            <a:srgbClr val="B22222"/>
+          </a:solidFill>
+          <a:ln w="6350">
+            <a:solidFill>
+              <a:srgbClr val="B22222"/>
+            </a:solidFill>
+          </a:ln>
+        </p:spPr>
+        <p:style>
+          <a:lnRef idx="1">
+            <a:schemeClr val="accent1"/>
+          </a:lnRef>
+          <a:fillRef idx="3">
+            <a:schemeClr val="accent1"/>
+          </a:fillRef>
+          <a:effectRef idx="2">
+            <a:schemeClr val="accent1"/>
+          </a:effectRef>
+          <a:fontRef idx="minor">
+            <a:schemeClr val="lt1"/>
+          </a:fontRef>
+        </p:style>
+        <p:txBody>
+          <a:bodyPr rtlCol="0" anchor="ctr"/>
+          <a:lstStyle/>
+          <a:p/>
+        </p:txBody>
+      </p:sp>
+      <p:sp>
+        <p:nvSpPr>
+          <p:cNvPr id="34" name="TextBox 33"/>
+          <p:cNvSpPr txBox="1"/>
+          <p:nvPr/>
+        </p:nvSpPr>
+        <p:spPr>
+          <a:xfrm>
+            <a:off x="4640580" y="3657600"/>
+            <a:ext cx="960120" cy="274320"/>
+          </a:xfrm>
+          <a:prstGeom prst="rect">
+            <a:avLst/>
+          </a:prstGeom>
+          <a:noFill/>
+        </p:spPr>
+        <p:txBody>
+          <a:bodyPr wrap="square" anchor="t" lIns="73152" rIns="73152">
+            <a:spAutoFit/>
+          </a:bodyPr>
+          <a:lstStyle/>
+          <a:p>
+            <a:pPr algn="ctr">
+              <a:lnSpc>
+                <a:spcPct val="115000"/>
+              </a:lnSpc>
+            </a:pPr>
+            <a:r>
+              <a:rPr sz="900" b="0" i="0">
+                <a:solidFill>
+                  <a:srgbClr val="111111"/>
+                </a:solidFill>
+                <a:latin typeface="Calibri"/>
+              </a:rPr>
+              <a:t>Primary</a:t>
+            </a:r>
+          </a:p>
+        </p:txBody>
+      </p:sp>
+      <p:sp>
+        <p:nvSpPr>
+          <p:cNvPr id="35" name="Rounded Rectangle 34"/>
+          <p:cNvSpPr/>
+          <p:nvPr/>
+        </p:nvSpPr>
+        <p:spPr>
+          <a:xfrm>
+            <a:off x="4869180" y="3931920"/>
+            <a:ext cx="502920" cy="502920"/>
+          </a:xfrm>
+          <a:prstGeom prst="roundRect">
+            <a:avLst/>
+          </a:prstGeom>
+          <a:solidFill>
+            <a:srgbClr val="FFFFFF"/>
+          </a:solidFill>
+          <a:ln w="12700">
+            <a:solidFill>
+              <a:srgbClr val="777777"/>
+            </a:solidFill>
+          </a:ln>
+        </p:spPr>
+        <p:style>
+          <a:lnRef idx="1">
+            <a:schemeClr val="accent1"/>
+          </a:lnRef>
+          <a:fillRef idx="3">
+            <a:schemeClr val="accent1"/>
+          </a:fillRef>
+          <a:effectRef idx="2">
+            <a:schemeClr val="accent1"/>
+          </a:effectRef>
+          <a:fontRef idx="minor">
+            <a:schemeClr val="lt1"/>
+          </a:fontRef>
+        </p:style>
+        <p:txBody>
+          <a:bodyPr rtlCol="0" anchor="ctr"/>
+          <a:lstStyle/>
+          <a:p/>
+        </p:txBody>
+      </p:sp>
+      <p:sp>
+        <p:nvSpPr>
+          <p:cNvPr id="36" name="TextBox 35"/>
+          <p:cNvSpPr txBox="1"/>
+          <p:nvPr/>
+        </p:nvSpPr>
+        <p:spPr>
+          <a:xfrm>
+            <a:off x="4640580" y="4480560"/>
+            <a:ext cx="960120" cy="274320"/>
+          </a:xfrm>
+          <a:prstGeom prst="rect">
+            <a:avLst/>
+          </a:prstGeom>
+          <a:noFill/>
+        </p:spPr>
+        <p:txBody>
+          <a:bodyPr wrap="square" anchor="t" lIns="73152" rIns="73152">
+            <a:spAutoFit/>
+          </a:bodyPr>
+          <a:lstStyle/>
+          <a:p>
+            <a:pPr algn="ctr">
+              <a:lnSpc>
+                <a:spcPct val="115000"/>
+              </a:lnSpc>
+            </a:pPr>
+            <a:r>
+              <a:rPr sz="900" b="0" i="1">
+                <a:solidFill>
+                  <a:srgbClr val="777777"/>
+                </a:solidFill>
+                <a:latin typeface="Calibri"/>
+              </a:rPr>
+              <a:t>Backup</a:t>
+            </a:r>
+          </a:p>
+        </p:txBody>
+      </p:sp>
+      <p:sp>
+        <p:nvSpPr>
+          <p:cNvPr id="37" name="TextBox 36"/>
+          <p:cNvSpPr txBox="1"/>
+          <p:nvPr/>
+        </p:nvSpPr>
+        <p:spPr>
+          <a:xfrm>
+            <a:off x="457200" y="5394960"/>
+            <a:ext cx="5303520" cy="731520"/>
+          </a:xfrm>
+          <a:prstGeom prst="rect">
+            <a:avLst/>
+          </a:prstGeom>
+          <a:noFill/>
+        </p:spPr>
+        <p:txBody>
+          <a:bodyPr wrap="square" anchor="t" lIns="73152" rIns="73152">
+            <a:spAutoFit/>
+          </a:bodyPr>
+          <a:lstStyle/>
+          <a:p>
+            <a:pPr algn="ctr">
+              <a:lnSpc>
+                <a:spcPct val="125000"/>
+              </a:lnSpc>
+            </a:pPr>
+            <a:r>
+              <a:rPr sz="1300" b="1" i="1">
+                <a:solidFill>
+                  <a:srgbClr val="B22222"/>
+                </a:solidFill>
+                <a:latin typeface="Calibri"/>
+              </a:rPr>
+              <a:t>Each department funds its own backup.
+Still 41 all-busy events per year.</a:t>
+            </a:r>
+          </a:p>
+        </p:txBody>
+      </p:sp>
+      <p:cxnSp>
+        <p:nvCxnSpPr>
+          <p:cNvPr id="38" name="Connector 37"/>
+          <p:cNvCxnSpPr/>
+          <p:nvPr/>
+        </p:nvCxnSpPr>
+        <p:spPr>
+          <a:xfrm>
+            <a:off x="5897880" y="3840480"/>
+            <a:ext cx="548640" cy="0"/>
+          </a:xfrm>
+          <a:prstGeom prst="line">
+            <a:avLst/>
+          </a:prstGeom>
+          <a:ln w="50800">
+            <a:solidFill>
+              <a:srgbClr val="111111"/>
+            </a:solidFill>
+            <a:tailEnd type="triangle" w="med" h="med"/>
+          </a:ln>
+        </p:spPr>
+        <p:style>
+          <a:lnRef idx="2">
+            <a:schemeClr val="accent1"/>
+          </a:lnRef>
+          <a:fillRef idx="0">
+            <a:schemeClr val="accent1"/>
+          </a:fillRef>
+          <a:effectRef idx="1">
+            <a:schemeClr val="accent1"/>
+          </a:effectRef>
+          <a:fontRef idx="minor">
+            <a:schemeClr val="tx1"/>
+          </a:fontRef>
+        </p:style>
+      </p:cxnSp>
+      <p:sp>
+        <p:nvSpPr>
+          <p:cNvPr id="39" name="Rounded Rectangle 38"/>
+          <p:cNvSpPr/>
+          <p:nvPr/>
+        </p:nvSpPr>
+        <p:spPr>
+          <a:xfrm>
+            <a:off x="6537960" y="1645920"/>
+            <a:ext cx="5212080" cy="4572000"/>
+          </a:xfrm>
+          <a:prstGeom prst="roundRect">
+            <a:avLst/>
+          </a:prstGeom>
+          <a:solidFill>
+            <a:srgbClr val="F0F8FF"/>
+          </a:solidFill>
+          <a:ln w="25400">
+            <a:solidFill>
+              <a:srgbClr val="2C7FB8"/>
+            </a:solidFill>
+          </a:ln>
+        </p:spPr>
+        <p:style>
+          <a:lnRef idx="1">
+            <a:schemeClr val="accent1"/>
+          </a:lnRef>
+          <a:fillRef idx="3">
+            <a:schemeClr val="accent1"/>
+          </a:fillRef>
+          <a:effectRef idx="2">
+            <a:schemeClr val="accent1"/>
+          </a:effectRef>
+          <a:fontRef idx="minor">
+            <a:schemeClr val="lt1"/>
+          </a:fontRef>
+        </p:style>
+        <p:txBody>
+          <a:bodyPr rtlCol="0" anchor="ctr"/>
+          <a:lstStyle/>
+          <a:p/>
+        </p:txBody>
+      </p:sp>
+      <p:sp>
+        <p:nvSpPr>
+          <p:cNvPr id="40" name="TextBox 39"/>
+          <p:cNvSpPr txBox="1"/>
+          <p:nvPr/>
+        </p:nvSpPr>
+        <p:spPr>
+          <a:xfrm>
+            <a:off x="6537960" y="1737360"/>
+            <a:ext cx="5212080" cy="457200"/>
+          </a:xfrm>
+          <a:prstGeom prst="rect">
+            <a:avLst/>
+          </a:prstGeom>
+          <a:noFill/>
+        </p:spPr>
+        <p:txBody>
+          <a:bodyPr wrap="square" anchor="t" lIns="73152" rIns="73152">
+            <a:spAutoFit/>
+          </a:bodyPr>
+          <a:lstStyle/>
+          <a:p>
+            <a:pPr algn="ctr">
+              <a:lnSpc>
+                <a:spcPct val="115000"/>
+              </a:lnSpc>
+            </a:pPr>
+            <a:r>
+              <a:rPr sz="2200" b="1" i="0">
+                <a:solidFill>
+                  <a:srgbClr val="2C7FB8"/>
+                </a:solidFill>
+                <a:latin typeface="Calibri"/>
+              </a:rPr>
+              <a:t>PROPOSED</a:t>
+            </a:r>
+          </a:p>
+        </p:txBody>
+      </p:sp>
+      <p:sp>
+        <p:nvSpPr>
+          <p:cNvPr id="41" name="TextBox 40"/>
+          <p:cNvSpPr txBox="1"/>
+          <p:nvPr/>
+        </p:nvSpPr>
+        <p:spPr>
+          <a:xfrm>
+            <a:off x="6537960" y="2194560"/>
+            <a:ext cx="5212080" cy="365760"/>
+          </a:xfrm>
+          <a:prstGeom prst="rect">
+            <a:avLst/>
+          </a:prstGeom>
+          <a:noFill/>
+        </p:spPr>
+        <p:txBody>
+          <a:bodyPr wrap="square" anchor="t" lIns="73152" rIns="73152">
+            <a:spAutoFit/>
+          </a:bodyPr>
+          <a:lstStyle/>
+          <a:p>
+            <a:pPr algn="ctr">
+              <a:lnSpc>
+                <a:spcPct val="115000"/>
+              </a:lnSpc>
+            </a:pPr>
+            <a:r>
+              <a:rPr sz="1300" b="0" i="1">
+                <a:solidFill>
+                  <a:srgbClr val="555555"/>
+                </a:solidFill>
+                <a:latin typeface="Calibri"/>
+              </a:rPr>
+              <a:t>Local primaries + 4 shared regional secondaries</a:t>
+            </a:r>
+          </a:p>
+        </p:txBody>
+      </p:sp>
+      <p:sp>
+        <p:nvSpPr>
+          <p:cNvPr id="42" name="Rounded Rectangle 41"/>
+          <p:cNvSpPr/>
+          <p:nvPr/>
+        </p:nvSpPr>
+        <p:spPr>
+          <a:xfrm>
+            <a:off x="6880860" y="2743200"/>
+            <a:ext cx="868680" cy="822960"/>
+          </a:xfrm>
+          <a:prstGeom prst="roundRect">
+            <a:avLst/>
+          </a:prstGeom>
+          <a:solidFill>
+            <a:srgbClr val="FFFFFF"/>
+          </a:solidFill>
+          <a:ln w="12700">
+            <a:solidFill>
+              <a:srgbClr val="2C7FB8"/>
+            </a:solidFill>
+          </a:ln>
+        </p:spPr>
+        <p:style>
+          <a:lnRef idx="1">
+            <a:schemeClr val="accent1"/>
+          </a:lnRef>
+          <a:fillRef idx="3">
+            <a:schemeClr val="accent1"/>
+          </a:fillRef>
+          <a:effectRef idx="2">
+            <a:schemeClr val="accent1"/>
+          </a:effectRef>
+          <a:fontRef idx="minor">
+            <a:schemeClr val="lt1"/>
+          </a:fontRef>
+        </p:style>
+        <p:txBody>
+          <a:bodyPr rtlCol="0" anchor="ctr"/>
+          <a:lstStyle/>
+          <a:p/>
+        </p:txBody>
+      </p:sp>
+      <p:sp>
+        <p:nvSpPr>
+          <p:cNvPr id="43" name="TextBox 42"/>
+          <p:cNvSpPr txBox="1"/>
+          <p:nvPr/>
+        </p:nvSpPr>
+        <p:spPr>
+          <a:xfrm>
+            <a:off x="6880860" y="2816352"/>
+            <a:ext cx="868680" cy="274320"/>
+          </a:xfrm>
+          <a:prstGeom prst="rect">
+            <a:avLst/>
+          </a:prstGeom>
+          <a:noFill/>
+        </p:spPr>
+        <p:txBody>
+          <a:bodyPr wrap="square" anchor="t" lIns="73152" rIns="73152">
+            <a:spAutoFit/>
+          </a:bodyPr>
+          <a:lstStyle/>
+          <a:p>
+            <a:pPr algn="ctr">
+              <a:lnSpc>
+                <a:spcPct val="115000"/>
+              </a:lnSpc>
+            </a:pPr>
+            <a:r>
+              <a:rPr sz="900" b="1" i="0">
+                <a:solidFill>
+                  <a:srgbClr val="2C7FB8"/>
+                </a:solidFill>
+                <a:latin typeface="Calibri"/>
+              </a:rPr>
+              <a:t>Dept A</a:t>
+            </a:r>
+          </a:p>
+        </p:txBody>
+      </p:sp>
+      <p:sp>
+        <p:nvSpPr>
+          <p:cNvPr id="44" name="Rounded Rectangle 43"/>
+          <p:cNvSpPr/>
+          <p:nvPr/>
+        </p:nvSpPr>
+        <p:spPr>
+          <a:xfrm>
+            <a:off x="7155180" y="3108960"/>
+            <a:ext cx="320040" cy="320040"/>
+          </a:xfrm>
+          <a:prstGeom prst="roundRect">
+            <a:avLst/>
+          </a:prstGeom>
+          <a:solidFill>
+            <a:srgbClr val="2C7FB8"/>
+          </a:solidFill>
+          <a:ln w="6350">
+            <a:solidFill>
+              <a:srgbClr val="2C7FB8"/>
+            </a:solidFill>
+          </a:ln>
+        </p:spPr>
+        <p:style>
+          <a:lnRef idx="1">
+            <a:schemeClr val="accent1"/>
+          </a:lnRef>
+          <a:fillRef idx="3">
+            <a:schemeClr val="accent1"/>
+          </a:fillRef>
+          <a:effectRef idx="2">
+            <a:schemeClr val="accent1"/>
+          </a:effectRef>
+          <a:fontRef idx="minor">
+            <a:schemeClr val="lt1"/>
+          </a:fontRef>
+        </p:style>
+        <p:txBody>
+          <a:bodyPr rtlCol="0" anchor="ctr"/>
+          <a:lstStyle/>
+          <a:p/>
+        </p:txBody>
+      </p:sp>
+      <p:sp>
+        <p:nvSpPr>
+          <p:cNvPr id="45" name="Rounded Rectangle 44"/>
+          <p:cNvSpPr/>
+          <p:nvPr/>
+        </p:nvSpPr>
+        <p:spPr>
+          <a:xfrm>
+            <a:off x="7795260" y="2743200"/>
+            <a:ext cx="868680" cy="822960"/>
+          </a:xfrm>
+          <a:prstGeom prst="roundRect">
+            <a:avLst/>
+          </a:prstGeom>
+          <a:solidFill>
+            <a:srgbClr val="FFFFFF"/>
+          </a:solidFill>
+          <a:ln w="12700">
+            <a:solidFill>
+              <a:srgbClr val="2C7FB8"/>
+            </a:solidFill>
+          </a:ln>
+        </p:spPr>
+        <p:style>
+          <a:lnRef idx="1">
+            <a:schemeClr val="accent1"/>
+          </a:lnRef>
+          <a:fillRef idx="3">
+            <a:schemeClr val="accent1"/>
+          </a:fillRef>
+          <a:effectRef idx="2">
+            <a:schemeClr val="accent1"/>
+          </a:effectRef>
+          <a:fontRef idx="minor">
+            <a:schemeClr val="lt1"/>
+          </a:fontRef>
+        </p:style>
+        <p:txBody>
+          <a:bodyPr rtlCol="0" anchor="ctr"/>
+          <a:lstStyle/>
+          <a:p/>
+        </p:txBody>
+      </p:sp>
+      <p:sp>
+        <p:nvSpPr>
+          <p:cNvPr id="46" name="TextBox 45"/>
+          <p:cNvSpPr txBox="1"/>
+          <p:nvPr/>
+        </p:nvSpPr>
+        <p:spPr>
+          <a:xfrm>
+            <a:off x="7795260" y="2816352"/>
+            <a:ext cx="868680" cy="274320"/>
+          </a:xfrm>
+          <a:prstGeom prst="rect">
+            <a:avLst/>
+          </a:prstGeom>
+          <a:noFill/>
+        </p:spPr>
+        <p:txBody>
+          <a:bodyPr wrap="square" anchor="t" lIns="73152" rIns="73152">
+            <a:spAutoFit/>
+          </a:bodyPr>
+          <a:lstStyle/>
+          <a:p>
+            <a:pPr algn="ctr">
+              <a:lnSpc>
+                <a:spcPct val="115000"/>
+              </a:lnSpc>
+            </a:pPr>
+            <a:r>
+              <a:rPr sz="900" b="1" i="0">
+                <a:solidFill>
+                  <a:srgbClr val="2C7FB8"/>
+                </a:solidFill>
+                <a:latin typeface="Calibri"/>
+              </a:rPr>
+              <a:t>Dept B</a:t>
+            </a:r>
+          </a:p>
+        </p:txBody>
+      </p:sp>
+      <p:sp>
+        <p:nvSpPr>
+          <p:cNvPr id="47" name="Rounded Rectangle 46"/>
+          <p:cNvSpPr/>
+          <p:nvPr/>
+        </p:nvSpPr>
+        <p:spPr>
+          <a:xfrm>
+            <a:off x="8069580" y="3108960"/>
+            <a:ext cx="320040" cy="320040"/>
+          </a:xfrm>
+          <a:prstGeom prst="roundRect">
+            <a:avLst/>
+          </a:prstGeom>
+          <a:solidFill>
+            <a:srgbClr val="2C7FB8"/>
+          </a:solidFill>
+          <a:ln w="6350">
+            <a:solidFill>
+              <a:srgbClr val="2C7FB8"/>
+            </a:solidFill>
+          </a:ln>
+        </p:spPr>
+        <p:style>
+          <a:lnRef idx="1">
+            <a:schemeClr val="accent1"/>
+          </a:lnRef>
+          <a:fillRef idx="3">
+            <a:schemeClr val="accent1"/>
+          </a:fillRef>
+          <a:effectRef idx="2">
+            <a:schemeClr val="accent1"/>
+          </a:effectRef>
+          <a:fontRef idx="minor">
+            <a:schemeClr val="lt1"/>
+          </a:fontRef>
+        </p:style>
+        <p:txBody>
+          <a:bodyPr rtlCol="0" anchor="ctr"/>
+          <a:lstStyle/>
+          <a:p/>
+        </p:txBody>
+      </p:sp>
+      <p:sp>
+        <p:nvSpPr>
+          <p:cNvPr id="48" name="Rounded Rectangle 47"/>
+          <p:cNvSpPr/>
+          <p:nvPr/>
+        </p:nvSpPr>
+        <p:spPr>
+          <a:xfrm>
+            <a:off x="8709660" y="2743200"/>
+            <a:ext cx="868680" cy="822960"/>
+          </a:xfrm>
+          <a:prstGeom prst="roundRect">
+            <a:avLst/>
+          </a:prstGeom>
+          <a:solidFill>
+            <a:srgbClr val="FFFFFF"/>
+          </a:solidFill>
+          <a:ln w="12700">
+            <a:solidFill>
+              <a:srgbClr val="2C7FB8"/>
+            </a:solidFill>
+          </a:ln>
+        </p:spPr>
+        <p:style>
+          <a:lnRef idx="1">
+            <a:schemeClr val="accent1"/>
+          </a:lnRef>
+          <a:fillRef idx="3">
+            <a:schemeClr val="accent1"/>
+          </a:fillRef>
+          <a:effectRef idx="2">
+            <a:schemeClr val="accent1"/>
+          </a:effectRef>
+          <a:fontRef idx="minor">
+            <a:schemeClr val="lt1"/>
+          </a:fontRef>
+        </p:style>
+        <p:txBody>
+          <a:bodyPr rtlCol="0" anchor="ctr"/>
+          <a:lstStyle/>
+          <a:p/>
+        </p:txBody>
+      </p:sp>
+      <p:sp>
+        <p:nvSpPr>
+          <p:cNvPr id="49" name="TextBox 48"/>
+          <p:cNvSpPr txBox="1"/>
+          <p:nvPr/>
+        </p:nvSpPr>
+        <p:spPr>
+          <a:xfrm>
+            <a:off x="8709660" y="2816352"/>
+            <a:ext cx="868680" cy="274320"/>
+          </a:xfrm>
+          <a:prstGeom prst="rect">
+            <a:avLst/>
+          </a:prstGeom>
+          <a:noFill/>
+        </p:spPr>
+        <p:txBody>
+          <a:bodyPr wrap="square" anchor="t" lIns="73152" rIns="73152">
+            <a:spAutoFit/>
+          </a:bodyPr>
+          <a:lstStyle/>
+          <a:p>
+            <a:pPr algn="ctr">
+              <a:lnSpc>
+                <a:spcPct val="115000"/>
+              </a:lnSpc>
+            </a:pPr>
+            <a:r>
+              <a:rPr sz="900" b="1" i="0">
+                <a:solidFill>
+                  <a:srgbClr val="2C7FB8"/>
+                </a:solidFill>
+                <a:latin typeface="Calibri"/>
+              </a:rPr>
+              <a:t>Dept C</a:t>
+            </a:r>
+          </a:p>
+        </p:txBody>
+      </p:sp>
+      <p:sp>
+        <p:nvSpPr>
+          <p:cNvPr id="50" name="Rounded Rectangle 49"/>
+          <p:cNvSpPr/>
+          <p:nvPr/>
+        </p:nvSpPr>
+        <p:spPr>
+          <a:xfrm>
+            <a:off x="8983980" y="3108960"/>
+            <a:ext cx="320040" cy="320040"/>
+          </a:xfrm>
+          <a:prstGeom prst="roundRect">
+            <a:avLst/>
+          </a:prstGeom>
+          <a:solidFill>
+            <a:srgbClr val="2C7FB8"/>
+          </a:solidFill>
+          <a:ln w="6350">
+            <a:solidFill>
+              <a:srgbClr val="2C7FB8"/>
+            </a:solidFill>
+          </a:ln>
+        </p:spPr>
+        <p:style>
+          <a:lnRef idx="1">
+            <a:schemeClr val="accent1"/>
+          </a:lnRef>
+          <a:fillRef idx="3">
+            <a:schemeClr val="accent1"/>
+          </a:fillRef>
+          <a:effectRef idx="2">
+            <a:schemeClr val="accent1"/>
+          </a:effectRef>
+          <a:fontRef idx="minor">
+            <a:schemeClr val="lt1"/>
+          </a:fontRef>
+        </p:style>
+        <p:txBody>
+          <a:bodyPr rtlCol="0" anchor="ctr"/>
+          <a:lstStyle/>
+          <a:p/>
+        </p:txBody>
+      </p:sp>
+      <p:sp>
+        <p:nvSpPr>
+          <p:cNvPr id="51" name="Rounded Rectangle 50"/>
+          <p:cNvSpPr/>
+          <p:nvPr/>
+        </p:nvSpPr>
+        <p:spPr>
+          <a:xfrm>
+            <a:off x="9624060" y="2743200"/>
+            <a:ext cx="868680" cy="822960"/>
+          </a:xfrm>
+          <a:prstGeom prst="roundRect">
+            <a:avLst/>
+          </a:prstGeom>
+          <a:solidFill>
+            <a:srgbClr val="FFFFFF"/>
+          </a:solidFill>
+          <a:ln w="12700">
+            <a:solidFill>
+              <a:srgbClr val="2C7FB8"/>
+            </a:solidFill>
+          </a:ln>
+        </p:spPr>
+        <p:style>
+          <a:lnRef idx="1">
+            <a:schemeClr val="accent1"/>
+          </a:lnRef>
+          <a:fillRef idx="3">
+            <a:schemeClr val="accent1"/>
+          </a:fillRef>
+          <a:effectRef idx="2">
+            <a:schemeClr val="accent1"/>
+          </a:effectRef>
+          <a:fontRef idx="minor">
+            <a:schemeClr val="lt1"/>
+          </a:fontRef>
+        </p:style>
+        <p:txBody>
+          <a:bodyPr rtlCol="0" anchor="ctr"/>
+          <a:lstStyle/>
+          <a:p/>
+        </p:txBody>
+      </p:sp>
+      <p:sp>
+        <p:nvSpPr>
+          <p:cNvPr id="52" name="TextBox 51"/>
+          <p:cNvSpPr txBox="1"/>
+          <p:nvPr/>
+        </p:nvSpPr>
+        <p:spPr>
+          <a:xfrm>
+            <a:off x="9624060" y="2816352"/>
+            <a:ext cx="868680" cy="274320"/>
+          </a:xfrm>
+          <a:prstGeom prst="rect">
+            <a:avLst/>
+          </a:prstGeom>
+          <a:noFill/>
+        </p:spPr>
+        <p:txBody>
+          <a:bodyPr wrap="square" anchor="t" lIns="73152" rIns="73152">
+            <a:spAutoFit/>
+          </a:bodyPr>
+          <a:lstStyle/>
+          <a:p>
+            <a:pPr algn="ctr">
+              <a:lnSpc>
+                <a:spcPct val="115000"/>
+              </a:lnSpc>
+            </a:pPr>
+            <a:r>
+              <a:rPr sz="900" b="1" i="0">
+                <a:solidFill>
+                  <a:srgbClr val="2C7FB8"/>
+                </a:solidFill>
+                <a:latin typeface="Calibri"/>
+              </a:rPr>
+              <a:t>Dept D</a:t>
+            </a:r>
+          </a:p>
+        </p:txBody>
+      </p:sp>
+      <p:sp>
+        <p:nvSpPr>
+          <p:cNvPr id="53" name="Rounded Rectangle 52"/>
+          <p:cNvSpPr/>
+          <p:nvPr/>
+        </p:nvSpPr>
+        <p:spPr>
+          <a:xfrm>
+            <a:off x="9898380" y="3108960"/>
+            <a:ext cx="320040" cy="320040"/>
+          </a:xfrm>
+          <a:prstGeom prst="roundRect">
+            <a:avLst/>
+          </a:prstGeom>
+          <a:solidFill>
+            <a:srgbClr val="2C7FB8"/>
+          </a:solidFill>
+          <a:ln w="6350">
+            <a:solidFill>
+              <a:srgbClr val="2C7FB8"/>
+            </a:solidFill>
+          </a:ln>
+        </p:spPr>
+        <p:style>
+          <a:lnRef idx="1">
+            <a:schemeClr val="accent1"/>
+          </a:lnRef>
+          <a:fillRef idx="3">
+            <a:schemeClr val="accent1"/>
+          </a:fillRef>
+          <a:effectRef idx="2">
+            <a:schemeClr val="accent1"/>
+          </a:effectRef>
+          <a:fontRef idx="minor">
+            <a:schemeClr val="lt1"/>
+          </a:fontRef>
+        </p:style>
+        <p:txBody>
+          <a:bodyPr rtlCol="0" anchor="ctr"/>
+          <a:lstStyle/>
+          <a:p/>
+        </p:txBody>
+      </p:sp>
+      <p:sp>
+        <p:nvSpPr>
+          <p:cNvPr id="54" name="Rounded Rectangle 53"/>
+          <p:cNvSpPr/>
+          <p:nvPr/>
+        </p:nvSpPr>
+        <p:spPr>
+          <a:xfrm>
+            <a:off x="10538460" y="2743200"/>
+            <a:ext cx="868680" cy="822960"/>
+          </a:xfrm>
+          <a:prstGeom prst="roundRect">
+            <a:avLst/>
+          </a:prstGeom>
+          <a:solidFill>
+            <a:srgbClr val="FFFFFF"/>
+          </a:solidFill>
+          <a:ln w="12700">
+            <a:solidFill>
+              <a:srgbClr val="2C7FB8"/>
+            </a:solidFill>
+          </a:ln>
+        </p:spPr>
+        <p:style>
+          <a:lnRef idx="1">
+            <a:schemeClr val="accent1"/>
+          </a:lnRef>
+          <a:fillRef idx="3">
+            <a:schemeClr val="accent1"/>
+          </a:fillRef>
+          <a:effectRef idx="2">
+            <a:schemeClr val="accent1"/>
+          </a:effectRef>
+          <a:fontRef idx="minor">
+            <a:schemeClr val="lt1"/>
+          </a:fontRef>
+        </p:style>
+        <p:txBody>
+          <a:bodyPr rtlCol="0" anchor="ctr"/>
+          <a:lstStyle/>
+          <a:p/>
+        </p:txBody>
+      </p:sp>
+      <p:sp>
+        <p:nvSpPr>
+          <p:cNvPr id="55" name="TextBox 54"/>
+          <p:cNvSpPr txBox="1"/>
+          <p:nvPr/>
+        </p:nvSpPr>
+        <p:spPr>
+          <a:xfrm>
+            <a:off x="10538460" y="2816352"/>
+            <a:ext cx="868680" cy="274320"/>
+          </a:xfrm>
+          <a:prstGeom prst="rect">
+            <a:avLst/>
+          </a:prstGeom>
+          <a:noFill/>
+        </p:spPr>
+        <p:txBody>
+          <a:bodyPr wrap="square" anchor="t" lIns="73152" rIns="73152">
+            <a:spAutoFit/>
+          </a:bodyPr>
+          <a:lstStyle/>
+          <a:p>
+            <a:pPr algn="ctr">
+              <a:lnSpc>
+                <a:spcPct val="115000"/>
+              </a:lnSpc>
+            </a:pPr>
+            <a:r>
+              <a:rPr sz="900" b="1" i="0">
+                <a:solidFill>
+                  <a:srgbClr val="2C7FB8"/>
+                </a:solidFill>
+                <a:latin typeface="Calibri"/>
+              </a:rPr>
+              <a:t>Dept E</a:t>
+            </a:r>
+          </a:p>
+        </p:txBody>
+      </p:sp>
+      <p:sp>
+        <p:nvSpPr>
+          <p:cNvPr id="56" name="Rounded Rectangle 55"/>
+          <p:cNvSpPr/>
+          <p:nvPr/>
+        </p:nvSpPr>
+        <p:spPr>
+          <a:xfrm>
+            <a:off x="10812780" y="3108960"/>
+            <a:ext cx="320040" cy="320040"/>
+          </a:xfrm>
+          <a:prstGeom prst="roundRect">
+            <a:avLst/>
+          </a:prstGeom>
+          <a:solidFill>
+            <a:srgbClr val="2C7FB8"/>
+          </a:solidFill>
+          <a:ln w="6350">
+            <a:solidFill>
+              <a:srgbClr val="2C7FB8"/>
+            </a:solidFill>
+          </a:ln>
+        </p:spPr>
+        <p:style>
+          <a:lnRef idx="1">
+            <a:schemeClr val="accent1"/>
+          </a:lnRef>
+          <a:fillRef idx="3">
+            <a:schemeClr val="accent1"/>
+          </a:fillRef>
+          <a:effectRef idx="2">
+            <a:schemeClr val="accent1"/>
+          </a:effectRef>
+          <a:fontRef idx="minor">
+            <a:schemeClr val="lt1"/>
+          </a:fontRef>
+        </p:style>
+        <p:txBody>
+          <a:bodyPr rtlCol="0" anchor="ctr"/>
+          <a:lstStyle/>
+          <a:p/>
+        </p:txBody>
+      </p:sp>
+      <p:sp>
+        <p:nvSpPr>
+          <p:cNvPr id="57" name="TextBox 56"/>
+          <p:cNvSpPr txBox="1"/>
+          <p:nvPr/>
+        </p:nvSpPr>
+        <p:spPr>
+          <a:xfrm>
+            <a:off x="6537960" y="3703320"/>
+            <a:ext cx="5212080" cy="320040"/>
+          </a:xfrm>
+          <a:prstGeom prst="rect">
+            <a:avLst/>
+          </a:prstGeom>
+          <a:noFill/>
+        </p:spPr>
+        <p:txBody>
+          <a:bodyPr wrap="square" anchor="t" lIns="73152" rIns="73152">
+            <a:spAutoFit/>
+          </a:bodyPr>
+          <a:lstStyle/>
+          <a:p>
+            <a:pPr algn="ctr">
+              <a:lnSpc>
+                <a:spcPct val="115000"/>
+              </a:lnSpc>
+            </a:pPr>
+            <a:r>
+              <a:rPr sz="1100" b="1" i="1">
+                <a:solidFill>
+                  <a:srgbClr val="2C7FB8"/>
+                </a:solidFill>
+                <a:latin typeface="Calibri"/>
+              </a:rPr>
+              <a:t>Primaries stay local — autonomy preserved</a:t>
+            </a:r>
+          </a:p>
+        </p:txBody>
+      </p:sp>
+      <p:sp>
+        <p:nvSpPr>
+          <p:cNvPr id="58" name="5-Point Star 57"/>
+          <p:cNvSpPr/>
+          <p:nvPr/>
+        </p:nvSpPr>
+        <p:spPr>
+          <a:xfrm>
+            <a:off x="7498079" y="4114800"/>
+            <a:ext cx="640080" cy="640080"/>
+          </a:xfrm>
+          <a:prstGeom prst="star5">
+            <a:avLst/>
+          </a:prstGeom>
+          <a:solidFill>
+            <a:srgbClr val="B22222"/>
+          </a:solidFill>
+          <a:ln w="19050">
+            <a:solidFill>
+              <a:srgbClr val="FFFFFF"/>
+            </a:solidFill>
+          </a:ln>
+        </p:spPr>
+        <p:style>
+          <a:lnRef idx="1">
+            <a:schemeClr val="accent1"/>
+          </a:lnRef>
+          <a:fillRef idx="3">
+            <a:schemeClr val="accent1"/>
+          </a:fillRef>
+          <a:effectRef idx="2">
+            <a:schemeClr val="accent1"/>
+          </a:effectRef>
+          <a:fontRef idx="minor">
+            <a:schemeClr val="lt1"/>
+          </a:fontRef>
+        </p:style>
+        <p:txBody>
+          <a:bodyPr rtlCol="0" anchor="ctr"/>
+          <a:lstStyle/>
+          <a:p/>
+        </p:txBody>
+      </p:sp>
+      <p:sp>
+        <p:nvSpPr>
+          <p:cNvPr id="59" name="TextBox 58"/>
+          <p:cNvSpPr txBox="1"/>
+          <p:nvPr/>
+        </p:nvSpPr>
+        <p:spPr>
+          <a:xfrm>
+            <a:off x="7360919" y="4800600"/>
+            <a:ext cx="914400" cy="320040"/>
+          </a:xfrm>
+          <a:prstGeom prst="rect">
+            <a:avLst/>
+          </a:prstGeom>
+          <a:noFill/>
+        </p:spPr>
+        <p:txBody>
+          <a:bodyPr wrap="square" anchor="t" lIns="73152" rIns="73152">
+            <a:spAutoFit/>
+          </a:bodyPr>
+          <a:lstStyle/>
+          <a:p>
+            <a:pPr algn="ctr">
+              <a:lnSpc>
+                <a:spcPct val="115000"/>
+              </a:lnSpc>
+            </a:pPr>
+            <a:r>
+              <a:rPr sz="1100" b="1" i="0">
+                <a:solidFill>
+                  <a:srgbClr val="B22222"/>
+                </a:solidFill>
+                <a:latin typeface="Calibri"/>
+              </a:rPr>
+              <a:t>SEC-1</a:t>
+            </a:r>
+          </a:p>
+        </p:txBody>
+      </p:sp>
+      <p:sp>
+        <p:nvSpPr>
+          <p:cNvPr id="60" name="5-Point Star 59"/>
+          <p:cNvSpPr/>
+          <p:nvPr/>
+        </p:nvSpPr>
+        <p:spPr>
+          <a:xfrm>
+            <a:off x="8503919" y="4114800"/>
+            <a:ext cx="640080" cy="640080"/>
+          </a:xfrm>
+          <a:prstGeom prst="star5">
+            <a:avLst/>
+          </a:prstGeom>
+          <a:solidFill>
+            <a:srgbClr val="B22222"/>
+          </a:solidFill>
+          <a:ln w="19050">
+            <a:solidFill>
+              <a:srgbClr val="FFFFFF"/>
+            </a:solidFill>
+          </a:ln>
+        </p:spPr>
+        <p:style>
+          <a:lnRef idx="1">
+            <a:schemeClr val="accent1"/>
+          </a:lnRef>
+          <a:fillRef idx="3">
+            <a:schemeClr val="accent1"/>
+          </a:fillRef>
+          <a:effectRef idx="2">
+            <a:schemeClr val="accent1"/>
+          </a:effectRef>
+          <a:fontRef idx="minor">
+            <a:schemeClr val="lt1"/>
+          </a:fontRef>
+        </p:style>
+        <p:txBody>
+          <a:bodyPr rtlCol="0" anchor="ctr"/>
+          <a:lstStyle/>
+          <a:p/>
+        </p:txBody>
+      </p:sp>
+      <p:sp>
+        <p:nvSpPr>
+          <p:cNvPr id="61" name="TextBox 60"/>
+          <p:cNvSpPr txBox="1"/>
+          <p:nvPr/>
+        </p:nvSpPr>
+        <p:spPr>
+          <a:xfrm>
+            <a:off x="8366759" y="4800600"/>
+            <a:ext cx="914400" cy="320040"/>
+          </a:xfrm>
+          <a:prstGeom prst="rect">
+            <a:avLst/>
+          </a:prstGeom>
+          <a:noFill/>
+        </p:spPr>
+        <p:txBody>
+          <a:bodyPr wrap="square" anchor="t" lIns="73152" rIns="73152">
+            <a:spAutoFit/>
+          </a:bodyPr>
+          <a:lstStyle/>
+          <a:p>
+            <a:pPr algn="ctr">
+              <a:lnSpc>
+                <a:spcPct val="115000"/>
+              </a:lnSpc>
+            </a:pPr>
+            <a:r>
+              <a:rPr sz="1100" b="1" i="0">
+                <a:solidFill>
+                  <a:srgbClr val="B22222"/>
+                </a:solidFill>
+                <a:latin typeface="Calibri"/>
+              </a:rPr>
+              <a:t>SEC-2</a:t>
+            </a:r>
+          </a:p>
+        </p:txBody>
+      </p:sp>
+      <p:sp>
+        <p:nvSpPr>
+          <p:cNvPr id="62" name="5-Point Star 61"/>
+          <p:cNvSpPr/>
+          <p:nvPr/>
+        </p:nvSpPr>
+        <p:spPr>
+          <a:xfrm>
+            <a:off x="9509759" y="4114800"/>
+            <a:ext cx="640080" cy="640080"/>
+          </a:xfrm>
+          <a:prstGeom prst="star5">
+            <a:avLst/>
+          </a:prstGeom>
+          <a:solidFill>
+            <a:srgbClr val="B22222"/>
+          </a:solidFill>
+          <a:ln w="19050">
+            <a:solidFill>
+              <a:srgbClr val="FFFFFF"/>
+            </a:solidFill>
+          </a:ln>
+        </p:spPr>
+        <p:style>
+          <a:lnRef idx="1">
+            <a:schemeClr val="accent1"/>
+          </a:lnRef>
+          <a:fillRef idx="3">
+            <a:schemeClr val="accent1"/>
+          </a:fillRef>
+          <a:effectRef idx="2">
+            <a:schemeClr val="accent1"/>
+          </a:effectRef>
+          <a:fontRef idx="minor">
+            <a:schemeClr val="lt1"/>
+          </a:fontRef>
+        </p:style>
+        <p:txBody>
+          <a:bodyPr rtlCol="0" anchor="ctr"/>
+          <a:lstStyle/>
+          <a:p/>
+        </p:txBody>
+      </p:sp>
+      <p:sp>
+        <p:nvSpPr>
+          <p:cNvPr id="63" name="TextBox 62"/>
+          <p:cNvSpPr txBox="1"/>
+          <p:nvPr/>
+        </p:nvSpPr>
+        <p:spPr>
+          <a:xfrm>
+            <a:off x="9372599" y="4800600"/>
+            <a:ext cx="914400" cy="320040"/>
+          </a:xfrm>
+          <a:prstGeom prst="rect">
+            <a:avLst/>
+          </a:prstGeom>
+          <a:noFill/>
+        </p:spPr>
+        <p:txBody>
+          <a:bodyPr wrap="square" anchor="t" lIns="73152" rIns="73152">
+            <a:spAutoFit/>
+          </a:bodyPr>
+          <a:lstStyle/>
+          <a:p>
+            <a:pPr algn="ctr">
+              <a:lnSpc>
+                <a:spcPct val="115000"/>
+              </a:lnSpc>
+            </a:pPr>
+            <a:r>
+              <a:rPr sz="1100" b="1" i="0">
+                <a:solidFill>
+                  <a:srgbClr val="B22222"/>
+                </a:solidFill>
+                <a:latin typeface="Calibri"/>
+              </a:rPr>
+              <a:t>SEC-3</a:t>
+            </a:r>
+          </a:p>
+        </p:txBody>
+      </p:sp>
+      <p:sp>
+        <p:nvSpPr>
+          <p:cNvPr id="64" name="5-Point Star 63"/>
+          <p:cNvSpPr/>
+          <p:nvPr/>
+        </p:nvSpPr>
+        <p:spPr>
+          <a:xfrm>
+            <a:off x="10515600" y="4114800"/>
+            <a:ext cx="640080" cy="640080"/>
+          </a:xfrm>
+          <a:prstGeom prst="star5">
+            <a:avLst/>
+          </a:prstGeom>
+          <a:solidFill>
+            <a:srgbClr val="B22222"/>
+          </a:solidFill>
+          <a:ln w="19050">
+            <a:solidFill>
+              <a:srgbClr val="FFFFFF"/>
+            </a:solidFill>
+          </a:ln>
+        </p:spPr>
+        <p:style>
+          <a:lnRef idx="1">
+            <a:schemeClr val="accent1"/>
+          </a:lnRef>
+          <a:fillRef idx="3">
+            <a:schemeClr val="accent1"/>
+          </a:fillRef>
+          <a:effectRef idx="2">
+            <a:schemeClr val="accent1"/>
+          </a:effectRef>
+          <a:fontRef idx="minor">
+            <a:schemeClr val="lt1"/>
+          </a:fontRef>
+        </p:style>
+        <p:txBody>
+          <a:bodyPr rtlCol="0" anchor="ctr"/>
+          <a:lstStyle/>
+          <a:p/>
+        </p:txBody>
+      </p:sp>
+      <p:sp>
+        <p:nvSpPr>
+          <p:cNvPr id="65" name="TextBox 64"/>
+          <p:cNvSpPr txBox="1"/>
+          <p:nvPr/>
+        </p:nvSpPr>
+        <p:spPr>
+          <a:xfrm>
+            <a:off x="10378440" y="4800600"/>
+            <a:ext cx="914400" cy="320040"/>
+          </a:xfrm>
+          <a:prstGeom prst="rect">
+            <a:avLst/>
+          </a:prstGeom>
+          <a:noFill/>
+        </p:spPr>
+        <p:txBody>
+          <a:bodyPr wrap="square" anchor="t" lIns="73152" rIns="73152">
+            <a:spAutoFit/>
+          </a:bodyPr>
+          <a:lstStyle/>
+          <a:p>
+            <a:pPr algn="ctr">
+              <a:lnSpc>
+                <a:spcPct val="115000"/>
+              </a:lnSpc>
+            </a:pPr>
+            <a:r>
+              <a:rPr sz="1100" b="1" i="0">
+                <a:solidFill>
+                  <a:srgbClr val="B22222"/>
+                </a:solidFill>
+                <a:latin typeface="Calibri"/>
+              </a:rPr>
+              <a:t>SEC-4</a:t>
+            </a:r>
+          </a:p>
+        </p:txBody>
+      </p:sp>
+      <p:sp>
+        <p:nvSpPr>
+          <p:cNvPr id="66" name="TextBox 65"/>
+          <p:cNvSpPr txBox="1"/>
+          <p:nvPr/>
+        </p:nvSpPr>
+        <p:spPr>
+          <a:xfrm>
+            <a:off x="6537960" y="5440680"/>
+            <a:ext cx="5212080" cy="685800"/>
+          </a:xfrm>
+          <a:prstGeom prst="rect">
+            <a:avLst/>
+          </a:prstGeom>
+          <a:noFill/>
+        </p:spPr>
+        <p:txBody>
+          <a:bodyPr wrap="square" anchor="t" lIns="73152" rIns="73152">
+            <a:spAutoFit/>
+          </a:bodyPr>
+          <a:lstStyle/>
+          <a:p>
+            <a:pPr algn="ctr">
+              <a:lnSpc>
+                <a:spcPct val="125000"/>
+              </a:lnSpc>
+            </a:pPr>
+            <a:r>
+              <a:rPr sz="1200" b="1" i="1">
+                <a:solidFill>
+                  <a:srgbClr val="2C7FB8"/>
+                </a:solidFill>
+                <a:latin typeface="Calibri"/>
+              </a:rPr>
+              <a:t>4 shared regional secondaries.
+Dispatch routes the closest unit — regardless of town lines.</a:t>
+            </a:r>
+          </a:p>
+        </p:txBody>
+      </p:sp>
+      <p:sp>
+        <p:nvSpPr>
+          <p:cNvPr id="67" name="TextBox 66"/>
+          <p:cNvSpPr txBox="1"/>
+          <p:nvPr/>
+        </p:nvSpPr>
+        <p:spPr>
+          <a:xfrm>
             <a:off x="365760" y="6537960"/>
             <a:ext cx="11430000" cy="274320"/>
           </a:xfrm>
@@ -3473,12 +6286,16 @@
           <a:noFill/>
         </p:spPr>
         <p:txBody>
-          <a:bodyPr wrap="square">
+          <a:bodyPr wrap="square" anchor="t" lIns="73152" rIns="73152">
             <a:spAutoFit/>
           </a:bodyPr>
           <a:lstStyle/>
           <a:p>
-            <a:pPr algn="ctr"/>
+            <a:pPr algn="ctr">
+              <a:lnSpc>
+                <a:spcPct val="115000"/>
+              </a:lnSpc>
+            </a:pPr>
             <a:r>
               <a:rPr sz="900" b="0" i="1">
                 <a:solidFill>
@@ -3486,7 +6303,7 @@
                 </a:solidFill>
                 <a:latin typeface="Calibri"/>
               </a:rPr>
-              <a:t>Methodology: P-Median (facility location) + Erlang-C (queuing) + OpenRouteService (road-network drive times)</a:t>
+              <a:t>Methodology: P-Median facility location (Amazon logistics) · Erlang-C queuing (call-center staffing) · OpenRouteService drive-time validation</a:t>
             </a:r>
           </a:p>
         </p:txBody>
@@ -3509,9 +6326,126 @@
         <p:nvPr/>
       </p:nvGrpSpPr>
       <p:grpSpPr/>
+      <p:sp>
+        <p:nvSpPr>
+          <p:cNvPr id="2" name="TextBox 1"/>
+          <p:cNvSpPr txBox="1"/>
+          <p:nvPr/>
+        </p:nvSpPr>
+        <p:spPr>
+          <a:xfrm>
+            <a:off x="457200" y="274320"/>
+            <a:ext cx="11247120" cy="640080"/>
+          </a:xfrm>
+          <a:prstGeom prst="rect">
+            <a:avLst/>
+          </a:prstGeom>
+          <a:noFill/>
+        </p:spPr>
+        <p:txBody>
+          <a:bodyPr wrap="square" anchor="t" lIns="73152" rIns="73152">
+            <a:spAutoFit/>
+          </a:bodyPr>
+          <a:lstStyle/>
+          <a:p>
+            <a:pPr algn="l">
+              <a:lnSpc>
+                <a:spcPct val="115000"/>
+              </a:lnSpc>
+            </a:pPr>
+            <a:r>
+              <a:rPr sz="3200" b="1" i="0">
+                <a:solidFill>
+                  <a:srgbClr val="111111"/>
+                </a:solidFill>
+                <a:latin typeface="Calibri"/>
+              </a:rPr>
+              <a:t>From Fragmented Backup to Regional Resilience</a:t>
+            </a:r>
+          </a:p>
+        </p:txBody>
+      </p:sp>
+      <p:sp>
+        <p:nvSpPr>
+          <p:cNvPr id="3" name="TextBox 2"/>
+          <p:cNvSpPr txBox="1"/>
+          <p:nvPr/>
+        </p:nvSpPr>
+        <p:spPr>
+          <a:xfrm>
+            <a:off x="457200" y="1005840"/>
+            <a:ext cx="5943600" cy="457200"/>
+          </a:xfrm>
+          <a:prstGeom prst="rect">
+            <a:avLst/>
+          </a:prstGeom>
+          <a:noFill/>
+        </p:spPr>
+        <p:txBody>
+          <a:bodyPr wrap="square" anchor="t" lIns="73152" rIns="73152">
+            <a:spAutoFit/>
+          </a:bodyPr>
+          <a:lstStyle/>
+          <a:p>
+            <a:pPr algn="l">
+              <a:lnSpc>
+                <a:spcPct val="115000"/>
+              </a:lnSpc>
+            </a:pPr>
+            <a:r>
+              <a:rPr sz="2200" b="1" i="0">
+                <a:solidFill>
+                  <a:srgbClr val="B22222"/>
+                </a:solidFill>
+                <a:latin typeface="Calibri"/>
+              </a:rPr>
+              <a:t>BEFORE — Fragmented coverage</a:t>
+            </a:r>
+          </a:p>
+        </p:txBody>
+      </p:sp>
+      <p:sp>
+        <p:nvSpPr>
+          <p:cNvPr id="4" name="TextBox 3"/>
+          <p:cNvSpPr txBox="1"/>
+          <p:nvPr/>
+        </p:nvSpPr>
+        <p:spPr>
+          <a:xfrm>
+            <a:off x="457200" y="1417320"/>
+            <a:ext cx="5943600" cy="457200"/>
+          </a:xfrm>
+          <a:prstGeom prst="rect">
+            <a:avLst/>
+          </a:prstGeom>
+          <a:noFill/>
+        </p:spPr>
+        <p:txBody>
+          <a:bodyPr wrap="square" anchor="t" lIns="73152" rIns="73152">
+            <a:spAutoFit/>
+          </a:bodyPr>
+          <a:lstStyle/>
+          <a:p>
+            <a:pPr algn="l">
+              <a:lnSpc>
+                <a:spcPct val="115000"/>
+              </a:lnSpc>
+            </a:pPr>
+            <a:r>
+              <a:rPr sz="1200" b="0" i="1">
+                <a:solidFill>
+                  <a:srgbClr val="555555"/>
+                </a:solidFill>
+                <a:latin typeface="Calibri"/>
+              </a:rPr>
+              <a:t>41 times in 2024, a caller's primary ambulance was busy AND the department had no backup.</a:t>
+            </a:r>
+          </a:p>
+        </p:txBody>
+      </p:sp>
       <p:pic>
         <p:nvPicPr>
-          <p:cNvPr id="2" name="Picture 1" descr="pitch_slide4_before_after.png"/>
+          <p:cNvPr id="5" name="Picture 4" descr="pitch_slide4_bars_only.png"/>
           <p:cNvPicPr>
             <a:picLocks noChangeAspect="1"/>
           </p:cNvPicPr>
@@ -3525,8 +6459,8 @@
         </p:blipFill>
         <p:spPr>
           <a:xfrm>
-            <a:off x="274320" y="228600"/>
-            <a:ext cx="11643055" cy="6309360"/>
+            <a:off x="274320" y="2011680"/>
+            <a:ext cx="6309360" cy="4206240"/>
           </a:xfrm>
           <a:prstGeom prst="rect">
             <a:avLst/>
@@ -3535,7 +6469,790 @@
       </p:pic>
       <p:sp>
         <p:nvSpPr>
-          <p:cNvPr id="3" name="TextBox 2"/>
+          <p:cNvPr id="6" name="TextBox 5"/>
+          <p:cNvSpPr txBox="1"/>
+          <p:nvPr/>
+        </p:nvSpPr>
+        <p:spPr>
+          <a:xfrm>
+            <a:off x="6766560" y="1005840"/>
+            <a:ext cx="5120640" cy="457200"/>
+          </a:xfrm>
+          <a:prstGeom prst="rect">
+            <a:avLst/>
+          </a:prstGeom>
+          <a:noFill/>
+        </p:spPr>
+        <p:txBody>
+          <a:bodyPr wrap="square" anchor="t" lIns="73152" rIns="73152">
+            <a:spAutoFit/>
+          </a:bodyPr>
+          <a:lstStyle/>
+          <a:p>
+            <a:pPr algn="l">
+              <a:lnSpc>
+                <a:spcPct val="115000"/>
+              </a:lnSpc>
+            </a:pPr>
+            <a:r>
+              <a:rPr sz="2200" b="1" i="0">
+                <a:solidFill>
+                  <a:srgbClr val="2C7FB8"/>
+                </a:solidFill>
+                <a:latin typeface="Calibri"/>
+              </a:rPr>
+              <a:t>AFTER — K=4 Regional Network</a:t>
+            </a:r>
+          </a:p>
+        </p:txBody>
+      </p:sp>
+      <p:sp>
+        <p:nvSpPr>
+          <p:cNvPr id="7" name="TextBox 6"/>
+          <p:cNvSpPr txBox="1"/>
+          <p:nvPr/>
+        </p:nvSpPr>
+        <p:spPr>
+          <a:xfrm>
+            <a:off x="6766560" y="1417320"/>
+            <a:ext cx="5120640" cy="457200"/>
+          </a:xfrm>
+          <a:prstGeom prst="rect">
+            <a:avLst/>
+          </a:prstGeom>
+          <a:noFill/>
+        </p:spPr>
+        <p:txBody>
+          <a:bodyPr wrap="square" anchor="t" lIns="73152" rIns="73152">
+            <a:spAutoFit/>
+          </a:bodyPr>
+          <a:lstStyle/>
+          <a:p>
+            <a:pPr algn="l">
+              <a:lnSpc>
+                <a:spcPct val="115000"/>
+              </a:lnSpc>
+            </a:pPr>
+            <a:r>
+              <a:rPr sz="1200" b="0" i="1">
+                <a:solidFill>
+                  <a:srgbClr val="555555"/>
+                </a:solidFill>
+                <a:latin typeface="Calibri"/>
+              </a:rPr>
+              <a:t>4 regional secondary stations overlay existing primaries.</a:t>
+            </a:r>
+          </a:p>
+        </p:txBody>
+      </p:sp>
+      <p:sp>
+        <p:nvSpPr>
+          <p:cNvPr id="8" name="Rounded Rectangle 7"/>
+          <p:cNvSpPr/>
+          <p:nvPr/>
+        </p:nvSpPr>
+        <p:spPr>
+          <a:xfrm>
+            <a:off x="6766560" y="2011680"/>
+            <a:ext cx="5120640" cy="1325880"/>
+          </a:xfrm>
+          <a:prstGeom prst="roundRect">
+            <a:avLst/>
+          </a:prstGeom>
+          <a:solidFill>
+            <a:srgbClr val="F0F8FF"/>
+          </a:solidFill>
+          <a:ln w="25400">
+            <a:solidFill>
+              <a:srgbClr val="2C7FB8"/>
+            </a:solidFill>
+          </a:ln>
+        </p:spPr>
+        <p:style>
+          <a:lnRef idx="1">
+            <a:schemeClr val="accent1"/>
+          </a:lnRef>
+          <a:fillRef idx="3">
+            <a:schemeClr val="accent1"/>
+          </a:fillRef>
+          <a:effectRef idx="2">
+            <a:schemeClr val="accent1"/>
+          </a:effectRef>
+          <a:fontRef idx="minor">
+            <a:schemeClr val="lt1"/>
+          </a:fontRef>
+        </p:style>
+        <p:txBody>
+          <a:bodyPr rtlCol="0" anchor="ctr"/>
+          <a:lstStyle/>
+          <a:p/>
+        </p:txBody>
+      </p:sp>
+      <p:sp>
+        <p:nvSpPr>
+          <p:cNvPr id="9" name="TextBox 8"/>
+          <p:cNvSpPr txBox="1"/>
+          <p:nvPr/>
+        </p:nvSpPr>
+        <p:spPr>
+          <a:xfrm>
+            <a:off x="6903720" y="2121408"/>
+            <a:ext cx="4846320" cy="365760"/>
+          </a:xfrm>
+          <a:prstGeom prst="rect">
+            <a:avLst/>
+          </a:prstGeom>
+          <a:noFill/>
+        </p:spPr>
+        <p:txBody>
+          <a:bodyPr wrap="square" anchor="t" lIns="73152" rIns="73152">
+            <a:spAutoFit/>
+          </a:bodyPr>
+          <a:lstStyle/>
+          <a:p>
+            <a:pPr algn="l">
+              <a:lnSpc>
+                <a:spcPct val="115000"/>
+              </a:lnSpc>
+            </a:pPr>
+            <a:r>
+              <a:rPr sz="1300" b="1" i="0">
+                <a:solidFill>
+                  <a:srgbClr val="555555"/>
+                </a:solidFill>
+                <a:latin typeface="Calibri"/>
+              </a:rPr>
+              <a:t>Demand covered ≤14 min</a:t>
+            </a:r>
+          </a:p>
+        </p:txBody>
+      </p:sp>
+      <p:sp>
+        <p:nvSpPr>
+          <p:cNvPr id="10" name="TextBox 9"/>
+          <p:cNvSpPr txBox="1"/>
+          <p:nvPr/>
+        </p:nvSpPr>
+        <p:spPr>
+          <a:xfrm>
+            <a:off x="6903720" y="2514600"/>
+            <a:ext cx="1828800" cy="457200"/>
+          </a:xfrm>
+          <a:prstGeom prst="rect">
+            <a:avLst/>
+          </a:prstGeom>
+          <a:noFill/>
+        </p:spPr>
+        <p:txBody>
+          <a:bodyPr wrap="square" anchor="t" lIns="73152" rIns="73152">
+            <a:spAutoFit/>
+          </a:bodyPr>
+          <a:lstStyle/>
+          <a:p>
+            <a:pPr algn="l">
+              <a:lnSpc>
+                <a:spcPct val="115000"/>
+              </a:lnSpc>
+            </a:pPr>
+            <a:r>
+              <a:rPr sz="1400" b="0" i="0">
+                <a:solidFill>
+                  <a:srgbClr val="777777"/>
+                </a:solidFill>
+                <a:latin typeface="Calibri"/>
+              </a:rPr>
+              <a:t>Today: 32%</a:t>
+            </a:r>
+          </a:p>
+        </p:txBody>
+      </p:sp>
+      <p:cxnSp>
+        <p:nvCxnSpPr>
+          <p:cNvPr id="11" name="Connector 10"/>
+          <p:cNvCxnSpPr/>
+          <p:nvPr/>
+        </p:nvCxnSpPr>
+        <p:spPr>
+          <a:xfrm>
+            <a:off x="8778240" y="2697480"/>
+            <a:ext cx="365760" cy="0"/>
+          </a:xfrm>
+          <a:prstGeom prst="line">
+            <a:avLst/>
+          </a:prstGeom>
+          <a:ln w="38100">
+            <a:solidFill>
+              <a:srgbClr val="2C7FB8"/>
+            </a:solidFill>
+            <a:tailEnd type="triangle" w="med" h="med"/>
+          </a:ln>
+        </p:spPr>
+        <p:style>
+          <a:lnRef idx="2">
+            <a:schemeClr val="accent1"/>
+          </a:lnRef>
+          <a:fillRef idx="0">
+            <a:schemeClr val="accent1"/>
+          </a:fillRef>
+          <a:effectRef idx="1">
+            <a:schemeClr val="accent1"/>
+          </a:effectRef>
+          <a:fontRef idx="minor">
+            <a:schemeClr val="tx1"/>
+          </a:fontRef>
+        </p:style>
+      </p:cxnSp>
+      <p:sp>
+        <p:nvSpPr>
+          <p:cNvPr id="12" name="TextBox 11"/>
+          <p:cNvSpPr txBox="1"/>
+          <p:nvPr/>
+        </p:nvSpPr>
+        <p:spPr>
+          <a:xfrm>
+            <a:off x="9281160" y="2514600"/>
+            <a:ext cx="2011680" cy="457200"/>
+          </a:xfrm>
+          <a:prstGeom prst="rect">
+            <a:avLst/>
+          </a:prstGeom>
+          <a:noFill/>
+        </p:spPr>
+        <p:txBody>
+          <a:bodyPr wrap="square" anchor="t" lIns="73152" rIns="73152">
+            <a:spAutoFit/>
+          </a:bodyPr>
+          <a:lstStyle/>
+          <a:p>
+            <a:pPr algn="l">
+              <a:lnSpc>
+                <a:spcPct val="115000"/>
+              </a:lnSpc>
+            </a:pPr>
+            <a:r>
+              <a:rPr sz="1600" b="1" i="0">
+                <a:solidFill>
+                  <a:srgbClr val="2C7FB8"/>
+                </a:solidFill>
+                <a:latin typeface="Calibri"/>
+              </a:rPr>
+              <a:t>K=4: 75%</a:t>
+            </a:r>
+          </a:p>
+        </p:txBody>
+      </p:sp>
+      <p:sp>
+        <p:nvSpPr>
+          <p:cNvPr id="13" name="TextBox 12"/>
+          <p:cNvSpPr txBox="1"/>
+          <p:nvPr/>
+        </p:nvSpPr>
+        <p:spPr>
+          <a:xfrm>
+            <a:off x="6903720" y="2926080"/>
+            <a:ext cx="4754880" cy="365760"/>
+          </a:xfrm>
+          <a:prstGeom prst="rect">
+            <a:avLst/>
+          </a:prstGeom>
+          <a:noFill/>
+        </p:spPr>
+        <p:txBody>
+          <a:bodyPr wrap="square" anchor="t" lIns="73152" rIns="73152">
+            <a:spAutoFit/>
+          </a:bodyPr>
+          <a:lstStyle/>
+          <a:p>
+            <a:pPr algn="r">
+              <a:lnSpc>
+                <a:spcPct val="115000"/>
+              </a:lnSpc>
+            </a:pPr>
+            <a:r>
+              <a:rPr sz="1600" b="1" i="0">
+                <a:solidFill>
+                  <a:srgbClr val="2C7FB8"/>
+                </a:solidFill>
+                <a:latin typeface="Calibri"/>
+              </a:rPr>
+              <a:t>+43 pts</a:t>
+            </a:r>
+          </a:p>
+        </p:txBody>
+      </p:sp>
+      <p:sp>
+        <p:nvSpPr>
+          <p:cNvPr id="14" name="Rounded Rectangle 13"/>
+          <p:cNvSpPr/>
+          <p:nvPr/>
+        </p:nvSpPr>
+        <p:spPr>
+          <a:xfrm>
+            <a:off x="6766560" y="3429000"/>
+            <a:ext cx="5120640" cy="1325880"/>
+          </a:xfrm>
+          <a:prstGeom prst="roundRect">
+            <a:avLst/>
+          </a:prstGeom>
+          <a:solidFill>
+            <a:srgbClr val="F0F8FF"/>
+          </a:solidFill>
+          <a:ln w="25400">
+            <a:solidFill>
+              <a:srgbClr val="2C7FB8"/>
+            </a:solidFill>
+          </a:ln>
+        </p:spPr>
+        <p:style>
+          <a:lnRef idx="1">
+            <a:schemeClr val="accent1"/>
+          </a:lnRef>
+          <a:fillRef idx="3">
+            <a:schemeClr val="accent1"/>
+          </a:fillRef>
+          <a:effectRef idx="2">
+            <a:schemeClr val="accent1"/>
+          </a:effectRef>
+          <a:fontRef idx="minor">
+            <a:schemeClr val="lt1"/>
+          </a:fontRef>
+        </p:style>
+        <p:txBody>
+          <a:bodyPr rtlCol="0" anchor="ctr"/>
+          <a:lstStyle/>
+          <a:p/>
+        </p:txBody>
+      </p:sp>
+      <p:sp>
+        <p:nvSpPr>
+          <p:cNvPr id="15" name="TextBox 14"/>
+          <p:cNvSpPr txBox="1"/>
+          <p:nvPr/>
+        </p:nvSpPr>
+        <p:spPr>
+          <a:xfrm>
+            <a:off x="6903720" y="3538728"/>
+            <a:ext cx="4846320" cy="365760"/>
+          </a:xfrm>
+          <a:prstGeom prst="rect">
+            <a:avLst/>
+          </a:prstGeom>
+          <a:noFill/>
+        </p:spPr>
+        <p:txBody>
+          <a:bodyPr wrap="square" anchor="t" lIns="73152" rIns="73152">
+            <a:spAutoFit/>
+          </a:bodyPr>
+          <a:lstStyle/>
+          <a:p>
+            <a:pPr algn="l">
+              <a:lnSpc>
+                <a:spcPct val="115000"/>
+              </a:lnSpc>
+            </a:pPr>
+            <a:r>
+              <a:rPr sz="1300" b="1" i="0">
+                <a:solidFill>
+                  <a:srgbClr val="555555"/>
+                </a:solidFill>
+                <a:latin typeface="Calibri"/>
+              </a:rPr>
+              <a:t>Avg secondary response time</a:t>
+            </a:r>
+          </a:p>
+        </p:txBody>
+      </p:sp>
+      <p:sp>
+        <p:nvSpPr>
+          <p:cNvPr id="16" name="TextBox 15"/>
+          <p:cNvSpPr txBox="1"/>
+          <p:nvPr/>
+        </p:nvSpPr>
+        <p:spPr>
+          <a:xfrm>
+            <a:off x="6903720" y="3931920"/>
+            <a:ext cx="1828800" cy="457200"/>
+          </a:xfrm>
+          <a:prstGeom prst="rect">
+            <a:avLst/>
+          </a:prstGeom>
+          <a:noFill/>
+        </p:spPr>
+        <p:txBody>
+          <a:bodyPr wrap="square" anchor="t" lIns="73152" rIns="73152">
+            <a:spAutoFit/>
+          </a:bodyPr>
+          <a:lstStyle/>
+          <a:p>
+            <a:pPr algn="l">
+              <a:lnSpc>
+                <a:spcPct val="115000"/>
+              </a:lnSpc>
+            </a:pPr>
+            <a:r>
+              <a:rPr sz="1400" b="0" i="0">
+                <a:solidFill>
+                  <a:srgbClr val="777777"/>
+                </a:solidFill>
+                <a:latin typeface="Calibri"/>
+              </a:rPr>
+              <a:t>Today: 16.6 min</a:t>
+            </a:r>
+          </a:p>
+        </p:txBody>
+      </p:sp>
+      <p:cxnSp>
+        <p:nvCxnSpPr>
+          <p:cNvPr id="17" name="Connector 16"/>
+          <p:cNvCxnSpPr/>
+          <p:nvPr/>
+        </p:nvCxnSpPr>
+        <p:spPr>
+          <a:xfrm>
+            <a:off x="8778240" y="4114800"/>
+            <a:ext cx="365760" cy="0"/>
+          </a:xfrm>
+          <a:prstGeom prst="line">
+            <a:avLst/>
+          </a:prstGeom>
+          <a:ln w="38100">
+            <a:solidFill>
+              <a:srgbClr val="2C7FB8"/>
+            </a:solidFill>
+            <a:tailEnd type="triangle" w="med" h="med"/>
+          </a:ln>
+        </p:spPr>
+        <p:style>
+          <a:lnRef idx="2">
+            <a:schemeClr val="accent1"/>
+          </a:lnRef>
+          <a:fillRef idx="0">
+            <a:schemeClr val="accent1"/>
+          </a:fillRef>
+          <a:effectRef idx="1">
+            <a:schemeClr val="accent1"/>
+          </a:effectRef>
+          <a:fontRef idx="minor">
+            <a:schemeClr val="tx1"/>
+          </a:fontRef>
+        </p:style>
+      </p:cxnSp>
+      <p:sp>
+        <p:nvSpPr>
+          <p:cNvPr id="18" name="TextBox 17"/>
+          <p:cNvSpPr txBox="1"/>
+          <p:nvPr/>
+        </p:nvSpPr>
+        <p:spPr>
+          <a:xfrm>
+            <a:off x="9281160" y="3931920"/>
+            <a:ext cx="2011680" cy="457200"/>
+          </a:xfrm>
+          <a:prstGeom prst="rect">
+            <a:avLst/>
+          </a:prstGeom>
+          <a:noFill/>
+        </p:spPr>
+        <p:txBody>
+          <a:bodyPr wrap="square" anchor="t" lIns="73152" rIns="73152">
+            <a:spAutoFit/>
+          </a:bodyPr>
+          <a:lstStyle/>
+          <a:p>
+            <a:pPr algn="l">
+              <a:lnSpc>
+                <a:spcPct val="115000"/>
+              </a:lnSpc>
+            </a:pPr>
+            <a:r>
+              <a:rPr sz="1600" b="1" i="0">
+                <a:solidFill>
+                  <a:srgbClr val="2C7FB8"/>
+                </a:solidFill>
+                <a:latin typeface="Calibri"/>
+              </a:rPr>
+              <a:t>K=4: 10.8 min</a:t>
+            </a:r>
+          </a:p>
+        </p:txBody>
+      </p:sp>
+      <p:sp>
+        <p:nvSpPr>
+          <p:cNvPr id="19" name="TextBox 18"/>
+          <p:cNvSpPr txBox="1"/>
+          <p:nvPr/>
+        </p:nvSpPr>
+        <p:spPr>
+          <a:xfrm>
+            <a:off x="6903720" y="4343400"/>
+            <a:ext cx="4754880" cy="365760"/>
+          </a:xfrm>
+          <a:prstGeom prst="rect">
+            <a:avLst/>
+          </a:prstGeom>
+          <a:noFill/>
+        </p:spPr>
+        <p:txBody>
+          <a:bodyPr wrap="square" anchor="t" lIns="73152" rIns="73152">
+            <a:spAutoFit/>
+          </a:bodyPr>
+          <a:lstStyle/>
+          <a:p>
+            <a:pPr algn="r">
+              <a:lnSpc>
+                <a:spcPct val="115000"/>
+              </a:lnSpc>
+            </a:pPr>
+            <a:r>
+              <a:rPr sz="1600" b="1" i="0">
+                <a:solidFill>
+                  <a:srgbClr val="2C7FB8"/>
+                </a:solidFill>
+                <a:latin typeface="Calibri"/>
+              </a:rPr>
+              <a:t>−5.8 min</a:t>
+            </a:r>
+          </a:p>
+        </p:txBody>
+      </p:sp>
+      <p:sp>
+        <p:nvSpPr>
+          <p:cNvPr id="20" name="Rounded Rectangle 19"/>
+          <p:cNvSpPr/>
+          <p:nvPr/>
+        </p:nvSpPr>
+        <p:spPr>
+          <a:xfrm>
+            <a:off x="6766560" y="4846320"/>
+            <a:ext cx="5120640" cy="1325880"/>
+          </a:xfrm>
+          <a:prstGeom prst="roundRect">
+            <a:avLst/>
+          </a:prstGeom>
+          <a:solidFill>
+            <a:srgbClr val="F5FFF5"/>
+          </a:solidFill>
+          <a:ln w="25400">
+            <a:solidFill>
+              <a:srgbClr val="228B22"/>
+            </a:solidFill>
+          </a:ln>
+        </p:spPr>
+        <p:style>
+          <a:lnRef idx="1">
+            <a:schemeClr val="accent1"/>
+          </a:lnRef>
+          <a:fillRef idx="3">
+            <a:schemeClr val="accent1"/>
+          </a:fillRef>
+          <a:effectRef idx="2">
+            <a:schemeClr val="accent1"/>
+          </a:effectRef>
+          <a:fontRef idx="minor">
+            <a:schemeClr val="lt1"/>
+          </a:fontRef>
+        </p:style>
+        <p:txBody>
+          <a:bodyPr rtlCol="0" anchor="ctr"/>
+          <a:lstStyle/>
+          <a:p/>
+        </p:txBody>
+      </p:sp>
+      <p:sp>
+        <p:nvSpPr>
+          <p:cNvPr id="21" name="TextBox 20"/>
+          <p:cNvSpPr txBox="1"/>
+          <p:nvPr/>
+        </p:nvSpPr>
+        <p:spPr>
+          <a:xfrm>
+            <a:off x="6903720" y="4956048"/>
+            <a:ext cx="4846320" cy="365760"/>
+          </a:xfrm>
+          <a:prstGeom prst="rect">
+            <a:avLst/>
+          </a:prstGeom>
+          <a:noFill/>
+        </p:spPr>
+        <p:txBody>
+          <a:bodyPr wrap="square" anchor="t" lIns="73152" rIns="73152">
+            <a:spAutoFit/>
+          </a:bodyPr>
+          <a:lstStyle/>
+          <a:p>
+            <a:pPr algn="l">
+              <a:lnSpc>
+                <a:spcPct val="115000"/>
+              </a:lnSpc>
+            </a:pPr>
+            <a:r>
+              <a:rPr sz="1300" b="1" i="0">
+                <a:solidFill>
+                  <a:srgbClr val="555555"/>
+                </a:solidFill>
+                <a:latin typeface="Calibri"/>
+              </a:rPr>
+              <a:t>All-busy events closed by overflow</a:t>
+            </a:r>
+          </a:p>
+        </p:txBody>
+      </p:sp>
+      <p:sp>
+        <p:nvSpPr>
+          <p:cNvPr id="22" name="TextBox 21"/>
+          <p:cNvSpPr txBox="1"/>
+          <p:nvPr/>
+        </p:nvSpPr>
+        <p:spPr>
+          <a:xfrm>
+            <a:off x="6903720" y="5349240"/>
+            <a:ext cx="1828800" cy="457200"/>
+          </a:xfrm>
+          <a:prstGeom prst="rect">
+            <a:avLst/>
+          </a:prstGeom>
+          <a:noFill/>
+        </p:spPr>
+        <p:txBody>
+          <a:bodyPr wrap="square" anchor="t" lIns="73152" rIns="73152">
+            <a:spAutoFit/>
+          </a:bodyPr>
+          <a:lstStyle/>
+          <a:p>
+            <a:pPr algn="l">
+              <a:lnSpc>
+                <a:spcPct val="115000"/>
+              </a:lnSpc>
+            </a:pPr>
+            <a:r>
+              <a:rPr sz="1400" b="0" i="0">
+                <a:solidFill>
+                  <a:srgbClr val="777777"/>
+                </a:solidFill>
+                <a:latin typeface="Calibri"/>
+              </a:rPr>
+              <a:t>Today: 41 / yr</a:t>
+            </a:r>
+          </a:p>
+        </p:txBody>
+      </p:sp>
+      <p:cxnSp>
+        <p:nvCxnSpPr>
+          <p:cNvPr id="23" name="Connector 22"/>
+          <p:cNvCxnSpPr/>
+          <p:nvPr/>
+        </p:nvCxnSpPr>
+        <p:spPr>
+          <a:xfrm>
+            <a:off x="8778240" y="5532120"/>
+            <a:ext cx="365760" cy="0"/>
+          </a:xfrm>
+          <a:prstGeom prst="line">
+            <a:avLst/>
+          </a:prstGeom>
+          <a:ln w="38100">
+            <a:solidFill>
+              <a:srgbClr val="228B22"/>
+            </a:solidFill>
+            <a:tailEnd type="triangle" w="med" h="med"/>
+          </a:ln>
+        </p:spPr>
+        <p:style>
+          <a:lnRef idx="2">
+            <a:schemeClr val="accent1"/>
+          </a:lnRef>
+          <a:fillRef idx="0">
+            <a:schemeClr val="accent1"/>
+          </a:fillRef>
+          <a:effectRef idx="1">
+            <a:schemeClr val="accent1"/>
+          </a:effectRef>
+          <a:fontRef idx="minor">
+            <a:schemeClr val="tx1"/>
+          </a:fontRef>
+        </p:style>
+      </p:cxnSp>
+      <p:sp>
+        <p:nvSpPr>
+          <p:cNvPr id="24" name="TextBox 23"/>
+          <p:cNvSpPr txBox="1"/>
+          <p:nvPr/>
+        </p:nvSpPr>
+        <p:spPr>
+          <a:xfrm>
+            <a:off x="9281160" y="5349240"/>
+            <a:ext cx="2011680" cy="457200"/>
+          </a:xfrm>
+          <a:prstGeom prst="rect">
+            <a:avLst/>
+          </a:prstGeom>
+          <a:noFill/>
+        </p:spPr>
+        <p:txBody>
+          <a:bodyPr wrap="square" anchor="t" lIns="73152" rIns="73152">
+            <a:spAutoFit/>
+          </a:bodyPr>
+          <a:lstStyle/>
+          <a:p>
+            <a:pPr algn="l">
+              <a:lnSpc>
+                <a:spcPct val="115000"/>
+              </a:lnSpc>
+            </a:pPr>
+            <a:r>
+              <a:rPr sz="1600" b="1" i="0">
+                <a:solidFill>
+                  <a:srgbClr val="228B22"/>
+                </a:solidFill>
+                <a:latin typeface="Calibri"/>
+              </a:rPr>
+              <a:t>K=4: ≤5 / yr</a:t>
+            </a:r>
+          </a:p>
+        </p:txBody>
+      </p:sp>
+      <p:sp>
+        <p:nvSpPr>
+          <p:cNvPr id="25" name="TextBox 24"/>
+          <p:cNvSpPr txBox="1"/>
+          <p:nvPr/>
+        </p:nvSpPr>
+        <p:spPr>
+          <a:xfrm>
+            <a:off x="6903720" y="5760720"/>
+            <a:ext cx="4754880" cy="365760"/>
+          </a:xfrm>
+          <a:prstGeom prst="rect">
+            <a:avLst/>
+          </a:prstGeom>
+          <a:noFill/>
+        </p:spPr>
+        <p:txBody>
+          <a:bodyPr wrap="square" anchor="t" lIns="73152" rIns="73152">
+            <a:spAutoFit/>
+          </a:bodyPr>
+          <a:lstStyle/>
+          <a:p>
+            <a:pPr algn="r">
+              <a:lnSpc>
+                <a:spcPct val="115000"/>
+              </a:lnSpc>
+            </a:pPr>
+            <a:r>
+              <a:rPr sz="1600" b="1" i="0">
+                <a:solidFill>
+                  <a:srgbClr val="228B22"/>
+                </a:solidFill>
+                <a:latin typeface="Calibri"/>
+              </a:rPr>
+              <a:t>−36 events</a:t>
+            </a:r>
+          </a:p>
+        </p:txBody>
+      </p:sp>
+      <p:sp>
+        <p:nvSpPr>
+          <p:cNvPr id="26" name="TextBox 25"/>
           <p:cNvSpPr txBox="1"/>
           <p:nvPr/>
         </p:nvSpPr>
@@ -3550,12 +7267,16 @@
           <a:noFill/>
         </p:spPr>
         <p:txBody>
-          <a:bodyPr wrap="square">
+          <a:bodyPr wrap="square" anchor="t" lIns="73152" rIns="73152">
             <a:spAutoFit/>
           </a:bodyPr>
           <a:lstStyle/>
           <a:p>
-            <a:pPr algn="ctr"/>
+            <a:pPr algn="ctr">
+              <a:lnSpc>
+                <a:spcPct val="115000"/>
+              </a:lnSpc>
+            </a:pPr>
             <a:r>
               <a:rPr sz="900" b="0" i="1">
                 <a:solidFill>
@@ -3563,7 +7284,7 @@
                 </a:solidFill>
                 <a:latin typeface="Calibri"/>
               </a:rPr>
-              <a:t>Before: K=2 MCLP T=10 proxy for current patchwork mutual-aid · After: K=4 P-Median optimization on total demand</a:t>
+              <a:t>Before: K=2 MCLP T=10 baseline for current fragmented mutual-aid · After: K=4 P-Median optimization, total demand</a:t>
             </a:r>
           </a:p>
         </p:txBody>
@@ -3586,30 +7307,45 @@
         <p:nvPr/>
       </p:nvGrpSpPr>
       <p:grpSpPr/>
-      <p:pic>
-        <p:nvPicPr>
-          <p:cNvPr id="2" name="Picture 1" descr="pitch_slide5_bottomline.png"/>
-          <p:cNvPicPr>
-            <a:picLocks noChangeAspect="1"/>
-          </p:cNvPicPr>
-          <p:nvPr/>
-        </p:nvPicPr>
-        <p:blipFill>
-          <a:blip r:embed="rId2"/>
-          <a:stretch>
-            <a:fillRect/>
-          </a:stretch>
-        </p:blipFill>
-        <p:spPr>
-          <a:xfrm>
-            <a:off x="274320" y="228600"/>
-            <a:ext cx="11643055" cy="6309360"/>
-          </a:xfrm>
-          <a:prstGeom prst="rect">
-            <a:avLst/>
-          </a:prstGeom>
-        </p:spPr>
-      </p:pic>
+      <p:sp>
+        <p:nvSpPr>
+          <p:cNvPr id="2" name="TextBox 1"/>
+          <p:cNvSpPr txBox="1"/>
+          <p:nvPr/>
+        </p:nvSpPr>
+        <p:spPr>
+          <a:xfrm>
+            <a:off x="457200" y="274320"/>
+            <a:ext cx="11247120" cy="731520"/>
+          </a:xfrm>
+          <a:prstGeom prst="rect">
+            <a:avLst/>
+          </a:prstGeom>
+          <a:noFill/>
+        </p:spPr>
+        <p:txBody>
+          <a:bodyPr wrap="square" anchor="t" lIns="73152" rIns="73152">
+            <a:spAutoFit/>
+          </a:bodyPr>
+          <a:lstStyle/>
+          <a:p>
+            <a:pPr algn="ctr">
+              <a:lnSpc>
+                <a:spcPct val="115000"/>
+              </a:lnSpc>
+            </a:pPr>
+            <a:r>
+              <a:rPr sz="3800" b="1" i="0">
+                <a:solidFill>
+                  <a:srgbClr val="111111"/>
+                </a:solidFill>
+                <a:latin typeface="Calibri"/>
+              </a:rPr>
+              <a:t>The Bottom Line — For the Patient</a:t>
+            </a:r>
+          </a:p>
+        </p:txBody>
+      </p:sp>
       <p:sp>
         <p:nvSpPr>
           <p:cNvPr id="3" name="TextBox 2"/>
@@ -3618,8 +7354,8 @@
         </p:nvSpPr>
         <p:spPr>
           <a:xfrm>
-            <a:off x="365760" y="6537960"/>
-            <a:ext cx="11430000" cy="274320"/>
+            <a:off x="457200" y="1051560"/>
+            <a:ext cx="11247120" cy="457200"/>
           </a:xfrm>
           <a:prstGeom prst="rect">
             <a:avLst/>
@@ -3627,20 +7363,669 @@
           <a:noFill/>
         </p:spPr>
         <p:txBody>
-          <a:bodyPr wrap="square">
+          <a:bodyPr wrap="square" anchor="t" lIns="73152" rIns="73152">
             <a:spAutoFit/>
           </a:bodyPr>
           <a:lstStyle/>
           <a:p>
-            <a:pPr algn="ctr"/>
-            <a:r>
-              <a:rPr sz="900" b="0" i="1">
-                <a:solidFill>
-                  <a:srgbClr val="777777"/>
+            <a:pPr algn="ctr">
+              <a:lnSpc>
+                <a:spcPct val="115000"/>
+              </a:lnSpc>
+            </a:pPr>
+            <a:r>
+              <a:rPr sz="1500" b="0" i="1">
+                <a:solidFill>
+                  <a:srgbClr val="555555"/>
                 </a:solidFill>
                 <a:latin typeface="Calibri"/>
               </a:rPr>
-              <a:t>All figures framed as patient-outcome deltas. Financial model available on request (cost-neutral at hybrid staffing).</a:t>
+              <a:t>In the language that matters to a 911 caller</a:t>
+            </a:r>
+          </a:p>
+        </p:txBody>
+      </p:sp>
+      <p:sp>
+        <p:nvSpPr>
+          <p:cNvPr id="4" name="Rounded Rectangle 3"/>
+          <p:cNvSpPr/>
+          <p:nvPr/>
+        </p:nvSpPr>
+        <p:spPr>
+          <a:xfrm>
+            <a:off x="518007" y="1737360"/>
+            <a:ext cx="3566160" cy="4754880"/>
+          </a:xfrm>
+          <a:prstGeom prst="roundRect">
+            <a:avLst/>
+          </a:prstGeom>
+          <a:solidFill>
+            <a:srgbClr val="FFF5F5"/>
+          </a:solidFill>
+          <a:ln w="38100">
+            <a:solidFill>
+              <a:srgbClr val="B22222"/>
+            </a:solidFill>
+          </a:ln>
+        </p:spPr>
+        <p:style>
+          <a:lnRef idx="1">
+            <a:schemeClr val="accent1"/>
+          </a:lnRef>
+          <a:fillRef idx="3">
+            <a:schemeClr val="accent1"/>
+          </a:fillRef>
+          <a:effectRef idx="2">
+            <a:schemeClr val="accent1"/>
+          </a:effectRef>
+          <a:fontRef idx="minor">
+            <a:schemeClr val="lt1"/>
+          </a:fontRef>
+        </p:style>
+        <p:txBody>
+          <a:bodyPr rtlCol="0" anchor="ctr"/>
+          <a:lstStyle/>
+          <a:p/>
+        </p:txBody>
+      </p:sp>
+      <p:sp>
+        <p:nvSpPr>
+          <p:cNvPr id="5" name="TextBox 4"/>
+          <p:cNvSpPr txBox="1"/>
+          <p:nvPr/>
+        </p:nvSpPr>
+        <p:spPr>
+          <a:xfrm>
+            <a:off x="518007" y="2011680"/>
+            <a:ext cx="3566160" cy="457200"/>
+          </a:xfrm>
+          <a:prstGeom prst="rect">
+            <a:avLst/>
+          </a:prstGeom>
+          <a:noFill/>
+        </p:spPr>
+        <p:txBody>
+          <a:bodyPr wrap="square" anchor="t" lIns="73152" rIns="73152">
+            <a:spAutoFit/>
+          </a:bodyPr>
+          <a:lstStyle/>
+          <a:p>
+            <a:pPr algn="ctr">
+              <a:lnSpc>
+                <a:spcPct val="115000"/>
+              </a:lnSpc>
+            </a:pPr>
+            <a:r>
+              <a:rPr sz="1800" b="1" i="0">
+                <a:solidFill>
+                  <a:srgbClr val="B22222"/>
+                </a:solidFill>
+                <a:latin typeface="Calibri"/>
+              </a:rPr>
+              <a:t>TIME</a:t>
+            </a:r>
+          </a:p>
+        </p:txBody>
+      </p:sp>
+      <p:sp>
+        <p:nvSpPr>
+          <p:cNvPr id="6" name="TextBox 5"/>
+          <p:cNvSpPr txBox="1"/>
+          <p:nvPr/>
+        </p:nvSpPr>
+        <p:spPr>
+          <a:xfrm>
+            <a:off x="518007" y="2651760"/>
+            <a:ext cx="3566160" cy="1188720"/>
+          </a:xfrm>
+          <a:prstGeom prst="rect">
+            <a:avLst/>
+          </a:prstGeom>
+          <a:noFill/>
+        </p:spPr>
+        <p:txBody>
+          <a:bodyPr wrap="square" anchor="t" lIns="73152" rIns="73152">
+            <a:spAutoFit/>
+          </a:bodyPr>
+          <a:lstStyle/>
+          <a:p>
+            <a:pPr algn="ctr">
+              <a:lnSpc>
+                <a:spcPct val="115000"/>
+              </a:lnSpc>
+            </a:pPr>
+            <a:r>
+              <a:rPr sz="5600" b="1" i="0">
+                <a:solidFill>
+                  <a:srgbClr val="B22222"/>
+                </a:solidFill>
+                <a:latin typeface="Calibri"/>
+              </a:rPr>
+              <a:t>−5.8 MIN</a:t>
+            </a:r>
+          </a:p>
+        </p:txBody>
+      </p:sp>
+      <p:sp>
+        <p:nvSpPr>
+          <p:cNvPr id="7" name="TextBox 6"/>
+          <p:cNvSpPr txBox="1"/>
+          <p:nvPr/>
+        </p:nvSpPr>
+        <p:spPr>
+          <a:xfrm>
+            <a:off x="518007" y="4023360"/>
+            <a:ext cx="3566160" cy="914400"/>
+          </a:xfrm>
+          <a:prstGeom prst="rect">
+            <a:avLst/>
+          </a:prstGeom>
+          <a:noFill/>
+        </p:spPr>
+        <p:txBody>
+          <a:bodyPr wrap="square" anchor="t" lIns="73152" rIns="73152">
+            <a:spAutoFit/>
+          </a:bodyPr>
+          <a:lstStyle/>
+          <a:p>
+            <a:pPr algn="ctr">
+              <a:lnSpc>
+                <a:spcPct val="120000"/>
+              </a:lnSpc>
+            </a:pPr>
+            <a:r>
+              <a:rPr sz="1500" b="1" i="0">
+                <a:solidFill>
+                  <a:srgbClr val="111111"/>
+                </a:solidFill>
+                <a:latin typeface="Calibri"/>
+              </a:rPr>
+              <a:t>Faster response during
+concurrent calls</a:t>
+            </a:r>
+          </a:p>
+        </p:txBody>
+      </p:sp>
+      <p:sp>
+        <p:nvSpPr>
+          <p:cNvPr id="8" name="TextBox 7"/>
+          <p:cNvSpPr txBox="1"/>
+          <p:nvPr/>
+        </p:nvSpPr>
+        <p:spPr>
+          <a:xfrm>
+            <a:off x="518007" y="5120640"/>
+            <a:ext cx="3566160" cy="1188720"/>
+          </a:xfrm>
+          <a:prstGeom prst="rect">
+            <a:avLst/>
+          </a:prstGeom>
+          <a:noFill/>
+        </p:spPr>
+        <p:txBody>
+          <a:bodyPr wrap="square" anchor="t" lIns="73152" rIns="73152">
+            <a:spAutoFit/>
+          </a:bodyPr>
+          <a:lstStyle/>
+          <a:p>
+            <a:pPr algn="ctr">
+              <a:lnSpc>
+                <a:spcPct val="125000"/>
+              </a:lnSpc>
+            </a:pPr>
+            <a:r>
+              <a:rPr sz="1200" b="0" i="1">
+                <a:solidFill>
+                  <a:srgbClr val="555555"/>
+                </a:solidFill>
+                <a:latin typeface="Calibri"/>
+              </a:rPr>
+              <a:t>16.6 min → 10.8 min.
+In cardiac arrest, this is
+the difference that matters.</a:t>
+            </a:r>
+          </a:p>
+        </p:txBody>
+      </p:sp>
+      <p:sp>
+        <p:nvSpPr>
+          <p:cNvPr id="9" name="Rounded Rectangle 8"/>
+          <p:cNvSpPr/>
+          <p:nvPr/>
+        </p:nvSpPr>
+        <p:spPr>
+          <a:xfrm>
+            <a:off x="4312767" y="1737360"/>
+            <a:ext cx="3566160" cy="4754880"/>
+          </a:xfrm>
+          <a:prstGeom prst="roundRect">
+            <a:avLst/>
+          </a:prstGeom>
+          <a:solidFill>
+            <a:srgbClr val="F0F8FF"/>
+          </a:solidFill>
+          <a:ln w="38100">
+            <a:solidFill>
+              <a:srgbClr val="2C7FB8"/>
+            </a:solidFill>
+          </a:ln>
+        </p:spPr>
+        <p:style>
+          <a:lnRef idx="1">
+            <a:schemeClr val="accent1"/>
+          </a:lnRef>
+          <a:fillRef idx="3">
+            <a:schemeClr val="accent1"/>
+          </a:fillRef>
+          <a:effectRef idx="2">
+            <a:schemeClr val="accent1"/>
+          </a:effectRef>
+          <a:fontRef idx="minor">
+            <a:schemeClr val="lt1"/>
+          </a:fontRef>
+        </p:style>
+        <p:txBody>
+          <a:bodyPr rtlCol="0" anchor="ctr"/>
+          <a:lstStyle/>
+          <a:p/>
+        </p:txBody>
+      </p:sp>
+      <p:sp>
+        <p:nvSpPr>
+          <p:cNvPr id="10" name="TextBox 9"/>
+          <p:cNvSpPr txBox="1"/>
+          <p:nvPr/>
+        </p:nvSpPr>
+        <p:spPr>
+          <a:xfrm>
+            <a:off x="4312767" y="2011680"/>
+            <a:ext cx="3566160" cy="457200"/>
+          </a:xfrm>
+          <a:prstGeom prst="rect">
+            <a:avLst/>
+          </a:prstGeom>
+          <a:noFill/>
+        </p:spPr>
+        <p:txBody>
+          <a:bodyPr wrap="square" anchor="t" lIns="73152" rIns="73152">
+            <a:spAutoFit/>
+          </a:bodyPr>
+          <a:lstStyle/>
+          <a:p>
+            <a:pPr algn="ctr">
+              <a:lnSpc>
+                <a:spcPct val="115000"/>
+              </a:lnSpc>
+            </a:pPr>
+            <a:r>
+              <a:rPr sz="1800" b="1" i="0">
+                <a:solidFill>
+                  <a:srgbClr val="2C7FB8"/>
+                </a:solidFill>
+                <a:latin typeface="Calibri"/>
+              </a:rPr>
+              <a:t>QUALITY</a:t>
+            </a:r>
+          </a:p>
+        </p:txBody>
+      </p:sp>
+      <p:sp>
+        <p:nvSpPr>
+          <p:cNvPr id="11" name="TextBox 10"/>
+          <p:cNvSpPr txBox="1"/>
+          <p:nvPr/>
+        </p:nvSpPr>
+        <p:spPr>
+          <a:xfrm>
+            <a:off x="4312767" y="2651760"/>
+            <a:ext cx="3566160" cy="1188720"/>
+          </a:xfrm>
+          <a:prstGeom prst="rect">
+            <a:avLst/>
+          </a:prstGeom>
+          <a:noFill/>
+        </p:spPr>
+        <p:txBody>
+          <a:bodyPr wrap="square" anchor="t" lIns="73152" rIns="73152">
+            <a:spAutoFit/>
+          </a:bodyPr>
+          <a:lstStyle/>
+          <a:p>
+            <a:pPr algn="ctr">
+              <a:lnSpc>
+                <a:spcPct val="115000"/>
+              </a:lnSpc>
+            </a:pPr>
+            <a:r>
+              <a:rPr sz="5600" b="1" i="0">
+                <a:solidFill>
+                  <a:srgbClr val="2C7FB8"/>
+                </a:solidFill>
+                <a:latin typeface="Calibri"/>
+              </a:rPr>
+              <a:t>1</a:t>
+            </a:r>
+          </a:p>
+        </p:txBody>
+      </p:sp>
+      <p:sp>
+        <p:nvSpPr>
+          <p:cNvPr id="12" name="TextBox 11"/>
+          <p:cNvSpPr txBox="1"/>
+          <p:nvPr/>
+        </p:nvSpPr>
+        <p:spPr>
+          <a:xfrm>
+            <a:off x="4312767" y="4023360"/>
+            <a:ext cx="3566160" cy="914400"/>
+          </a:xfrm>
+          <a:prstGeom prst="rect">
+            <a:avLst/>
+          </a:prstGeom>
+          <a:noFill/>
+        </p:spPr>
+        <p:txBody>
+          <a:bodyPr wrap="square" anchor="t" lIns="73152" rIns="73152">
+            <a:spAutoFit/>
+          </a:bodyPr>
+          <a:lstStyle/>
+          <a:p>
+            <a:pPr algn="ctr">
+              <a:lnSpc>
+                <a:spcPct val="120000"/>
+              </a:lnSpc>
+            </a:pPr>
+            <a:r>
+              <a:rPr sz="1500" b="1" i="0">
+                <a:solidFill>
+                  <a:srgbClr val="111111"/>
+                </a:solidFill>
+                <a:latin typeface="Calibri"/>
+              </a:rPr>
+              <a:t>Unified medical protocol,
+county-wide</a:t>
+            </a:r>
+          </a:p>
+        </p:txBody>
+      </p:sp>
+      <p:sp>
+        <p:nvSpPr>
+          <p:cNvPr id="13" name="TextBox 12"/>
+          <p:cNvSpPr txBox="1"/>
+          <p:nvPr/>
+        </p:nvSpPr>
+        <p:spPr>
+          <a:xfrm>
+            <a:off x="4312767" y="5120640"/>
+            <a:ext cx="3566160" cy="1188720"/>
+          </a:xfrm>
+          <a:prstGeom prst="rect">
+            <a:avLst/>
+          </a:prstGeom>
+          <a:noFill/>
+        </p:spPr>
+        <p:txBody>
+          <a:bodyPr wrap="square" anchor="t" lIns="73152" rIns="73152">
+            <a:spAutoFit/>
+          </a:bodyPr>
+          <a:lstStyle/>
+          <a:p>
+            <a:pPr algn="ctr">
+              <a:lnSpc>
+                <a:spcPct val="125000"/>
+              </a:lnSpc>
+            </a:pPr>
+            <a:r>
+              <a:rPr sz="1200" b="0" i="1">
+                <a:solidFill>
+                  <a:srgbClr val="555555"/>
+                </a:solidFill>
+                <a:latin typeface="Calibri"/>
+              </a:rPr>
+              <a:t>Today: 12 separate protocols.
+Tomorrow: every patient gets
+the same standard of care.</a:t>
+            </a:r>
+          </a:p>
+        </p:txBody>
+      </p:sp>
+      <p:sp>
+        <p:nvSpPr>
+          <p:cNvPr id="14" name="Rounded Rectangle 13"/>
+          <p:cNvSpPr/>
+          <p:nvPr/>
+        </p:nvSpPr>
+        <p:spPr>
+          <a:xfrm>
+            <a:off x="8107527" y="1737360"/>
+            <a:ext cx="3566160" cy="4754880"/>
+          </a:xfrm>
+          <a:prstGeom prst="roundRect">
+            <a:avLst/>
+          </a:prstGeom>
+          <a:solidFill>
+            <a:srgbClr val="F5FFF5"/>
+          </a:solidFill>
+          <a:ln w="38100">
+            <a:solidFill>
+              <a:srgbClr val="228B22"/>
+            </a:solidFill>
+          </a:ln>
+        </p:spPr>
+        <p:style>
+          <a:lnRef idx="1">
+            <a:schemeClr val="accent1"/>
+          </a:lnRef>
+          <a:fillRef idx="3">
+            <a:schemeClr val="accent1"/>
+          </a:fillRef>
+          <a:effectRef idx="2">
+            <a:schemeClr val="accent1"/>
+          </a:effectRef>
+          <a:fontRef idx="minor">
+            <a:schemeClr val="lt1"/>
+          </a:fontRef>
+        </p:style>
+        <p:txBody>
+          <a:bodyPr rtlCol="0" anchor="ctr"/>
+          <a:lstStyle/>
+          <a:p/>
+        </p:txBody>
+      </p:sp>
+      <p:sp>
+        <p:nvSpPr>
+          <p:cNvPr id="15" name="TextBox 14"/>
+          <p:cNvSpPr txBox="1"/>
+          <p:nvPr/>
+        </p:nvSpPr>
+        <p:spPr>
+          <a:xfrm>
+            <a:off x="8107527" y="2011680"/>
+            <a:ext cx="3566160" cy="457200"/>
+          </a:xfrm>
+          <a:prstGeom prst="rect">
+            <a:avLst/>
+          </a:prstGeom>
+          <a:noFill/>
+        </p:spPr>
+        <p:txBody>
+          <a:bodyPr wrap="square" anchor="t" lIns="73152" rIns="73152">
+            <a:spAutoFit/>
+          </a:bodyPr>
+          <a:lstStyle/>
+          <a:p>
+            <a:pPr algn="ctr">
+              <a:lnSpc>
+                <a:spcPct val="115000"/>
+              </a:lnSpc>
+            </a:pPr>
+            <a:r>
+              <a:rPr sz="1800" b="1" i="0">
+                <a:solidFill>
+                  <a:srgbClr val="228B22"/>
+                </a:solidFill>
+                <a:latin typeface="Calibri"/>
+              </a:rPr>
+              <a:t>COVERAGE</a:t>
+            </a:r>
+          </a:p>
+        </p:txBody>
+      </p:sp>
+      <p:sp>
+        <p:nvSpPr>
+          <p:cNvPr id="16" name="TextBox 15"/>
+          <p:cNvSpPr txBox="1"/>
+          <p:nvPr/>
+        </p:nvSpPr>
+        <p:spPr>
+          <a:xfrm>
+            <a:off x="8107527" y="2651760"/>
+            <a:ext cx="3566160" cy="1188720"/>
+          </a:xfrm>
+          <a:prstGeom prst="rect">
+            <a:avLst/>
+          </a:prstGeom>
+          <a:noFill/>
+        </p:spPr>
+        <p:txBody>
+          <a:bodyPr wrap="square" anchor="t" lIns="73152" rIns="73152">
+            <a:spAutoFit/>
+          </a:bodyPr>
+          <a:lstStyle/>
+          <a:p>
+            <a:pPr algn="ctr">
+              <a:lnSpc>
+                <a:spcPct val="115000"/>
+              </a:lnSpc>
+            </a:pPr>
+            <a:r>
+              <a:rPr sz="5600" b="1" i="0">
+                <a:solidFill>
+                  <a:srgbClr val="228B22"/>
+                </a:solidFill>
+                <a:latin typeface="Calibri"/>
+              </a:rPr>
+              <a:t>41 → 5</a:t>
+            </a:r>
+          </a:p>
+        </p:txBody>
+      </p:sp>
+      <p:sp>
+        <p:nvSpPr>
+          <p:cNvPr id="17" name="TextBox 16"/>
+          <p:cNvSpPr txBox="1"/>
+          <p:nvPr/>
+        </p:nvSpPr>
+        <p:spPr>
+          <a:xfrm>
+            <a:off x="8107527" y="4023360"/>
+            <a:ext cx="3566160" cy="914400"/>
+          </a:xfrm>
+          <a:prstGeom prst="rect">
+            <a:avLst/>
+          </a:prstGeom>
+          <a:noFill/>
+        </p:spPr>
+        <p:txBody>
+          <a:bodyPr wrap="square" anchor="t" lIns="73152" rIns="73152">
+            <a:spAutoFit/>
+          </a:bodyPr>
+          <a:lstStyle/>
+          <a:p>
+            <a:pPr algn="ctr">
+              <a:lnSpc>
+                <a:spcPct val="120000"/>
+              </a:lnSpc>
+            </a:pPr>
+            <a:r>
+              <a:rPr sz="1500" b="1" i="0">
+                <a:solidFill>
+                  <a:srgbClr val="111111"/>
+                </a:solidFill>
+                <a:latin typeface="Calibri"/>
+              </a:rPr>
+              <a:t>All-busy events closed
+per year</a:t>
+            </a:r>
+          </a:p>
+        </p:txBody>
+      </p:sp>
+      <p:sp>
+        <p:nvSpPr>
+          <p:cNvPr id="18" name="TextBox 17"/>
+          <p:cNvSpPr txBox="1"/>
+          <p:nvPr/>
+        </p:nvSpPr>
+        <p:spPr>
+          <a:xfrm>
+            <a:off x="8107527" y="5120640"/>
+            <a:ext cx="3566160" cy="1188720"/>
+          </a:xfrm>
+          <a:prstGeom prst="rect">
+            <a:avLst/>
+          </a:prstGeom>
+          <a:noFill/>
+        </p:spPr>
+        <p:txBody>
+          <a:bodyPr wrap="square" anchor="t" lIns="73152" rIns="73152">
+            <a:spAutoFit/>
+          </a:bodyPr>
+          <a:lstStyle/>
+          <a:p>
+            <a:pPr algn="ctr">
+              <a:lnSpc>
+                <a:spcPct val="125000"/>
+              </a:lnSpc>
+            </a:pPr>
+            <a:r>
+              <a:rPr sz="1200" b="0" i="1">
+                <a:solidFill>
+                  <a:srgbClr val="555555"/>
+                </a:solidFill>
+                <a:latin typeface="Calibri"/>
+              </a:rPr>
+              <a:t>No Jefferson County resident
+waits for mutual aid from
+another county.</a:t>
+            </a:r>
+          </a:p>
+        </p:txBody>
+      </p:sp>
+      <p:sp>
+        <p:nvSpPr>
+          <p:cNvPr id="19" name="TextBox 18"/>
+          <p:cNvSpPr txBox="1"/>
+          <p:nvPr/>
+        </p:nvSpPr>
+        <p:spPr>
+          <a:xfrm>
+            <a:off x="457200" y="6583680"/>
+            <a:ext cx="11247120" cy="274320"/>
+          </a:xfrm>
+          <a:prstGeom prst="rect">
+            <a:avLst/>
+          </a:prstGeom>
+          <a:noFill/>
+        </p:spPr>
+        <p:txBody>
+          <a:bodyPr wrap="square" anchor="t" lIns="73152" rIns="73152">
+            <a:spAutoFit/>
+          </a:bodyPr>
+          <a:lstStyle/>
+          <a:p>
+            <a:pPr algn="ctr">
+              <a:lnSpc>
+                <a:spcPct val="115000"/>
+              </a:lnSpc>
+            </a:pPr>
+            <a:r>
+              <a:rPr sz="1200" b="1" i="1">
+                <a:solidFill>
+                  <a:srgbClr val="555555"/>
+                </a:solidFill>
+                <a:latin typeface="Calibri"/>
+              </a:rPr>
+              <a:t>We're not asking for funding. We're asking for partnership as the Jefferson County EMS Working Group moves into implementation.</a:t>
             </a:r>
           </a:p>
         </p:txBody>
@@ -3671,7 +8056,7 @@
         </p:nvSpPr>
         <p:spPr>
           <a:xfrm>
-            <a:off x="457200" y="1188720"/>
+            <a:off x="457200" y="1371600"/>
             <a:ext cx="11247120" cy="1371600"/>
           </a:xfrm>
           <a:prstGeom prst="rect">
@@ -3680,12 +8065,16 @@
           <a:noFill/>
         </p:spPr>
         <p:txBody>
-          <a:bodyPr wrap="square">
+          <a:bodyPr wrap="square" anchor="t" lIns="73152" rIns="73152">
             <a:spAutoFit/>
           </a:bodyPr>
           <a:lstStyle/>
           <a:p>
-            <a:pPr algn="ctr"/>
+            <a:pPr algn="ctr">
+              <a:lnSpc>
+                <a:spcPct val="115000"/>
+              </a:lnSpc>
+            </a:pPr>
             <a:r>
               <a:rPr sz="7200" b="1" i="0">
                 <a:solidFill>
@@ -3706,7 +8095,7 @@
         </p:nvSpPr>
         <p:spPr>
           <a:xfrm>
-            <a:off x="1371600" y="2651760"/>
+            <a:off x="1371600" y="2834640"/>
             <a:ext cx="9418320" cy="914400"/>
           </a:xfrm>
           <a:prstGeom prst="rect">
@@ -3715,12 +8104,16 @@
           <a:noFill/>
         </p:spPr>
         <p:txBody>
-          <a:bodyPr wrap="square">
+          <a:bodyPr wrap="square" anchor="t" lIns="73152" rIns="73152">
             <a:spAutoFit/>
           </a:bodyPr>
           <a:lstStyle/>
           <a:p>
-            <a:pPr algn="ctr"/>
+            <a:pPr algn="ctr">
+              <a:lnSpc>
+                <a:spcPct val="130000"/>
+              </a:lnSpc>
+            </a:pPr>
             <a:r>
               <a:rPr sz="2000" b="0" i="1">
                 <a:solidFill>
@@ -3728,7 +8121,7 @@
                 </a:solidFill>
                 <a:latin typeface="Calibri"/>
               </a:rPr>
-              <a:t>We're asking for feedback and partnership as the Jefferson County EMS Working Group moves into implementation.</a:t>
+              <a:t>Partnership and feedback as the Jefferson County EMS Working Group moves into implementation.</a:t>
             </a:r>
           </a:p>
         </p:txBody>
@@ -3741,7 +8134,7 @@
         </p:nvSpPr>
         <p:spPr>
           <a:xfrm>
-            <a:off x="1371600" y="4023360"/>
+            <a:off x="1371600" y="4206240"/>
             <a:ext cx="9418320" cy="457200"/>
           </a:xfrm>
           <a:prstGeom prst="rect">
@@ -3750,12 +8143,16 @@
           <a:noFill/>
         </p:spPr>
         <p:txBody>
-          <a:bodyPr wrap="square">
+          <a:bodyPr wrap="square" anchor="t" lIns="73152" rIns="73152">
             <a:spAutoFit/>
           </a:bodyPr>
           <a:lstStyle/>
           <a:p>
-            <a:pPr algn="ctr"/>
+            <a:pPr algn="ctr">
+              <a:lnSpc>
+                <a:spcPct val="115000"/>
+              </a:lnSpc>
+            </a:pPr>
             <a:r>
               <a:rPr sz="1600" b="1" i="0">
                 <a:solidFill>
@@ -3776,7 +8173,7 @@
         </p:nvSpPr>
         <p:spPr>
           <a:xfrm>
-            <a:off x="1371600" y="4480560"/>
+            <a:off x="1371600" y="4663440"/>
             <a:ext cx="9418320" cy="548640"/>
           </a:xfrm>
           <a:prstGeom prst="rect">
@@ -3785,12 +8182,16 @@
           <a:noFill/>
         </p:spPr>
         <p:txBody>
-          <a:bodyPr wrap="square">
+          <a:bodyPr wrap="square" anchor="t" lIns="73152" rIns="73152">
             <a:spAutoFit/>
           </a:bodyPr>
           <a:lstStyle/>
           <a:p>
-            <a:pPr algn="ctr"/>
+            <a:pPr algn="ctr">
+              <a:lnSpc>
+                <a:spcPct val="115000"/>
+              </a:lnSpc>
+            </a:pPr>
             <a:r>
               <a:rPr sz="1400" b="0" i="0">
                 <a:solidFill>
@@ -3811,7 +8212,7 @@
         </p:nvSpPr>
         <p:spPr>
           <a:xfrm>
-            <a:off x="1371600" y="5120640"/>
+            <a:off x="1371600" y="5394960"/>
             <a:ext cx="9418320" cy="457200"/>
           </a:xfrm>
           <a:prstGeom prst="rect">
@@ -3820,12 +8221,16 @@
           <a:noFill/>
         </p:spPr>
         <p:txBody>
-          <a:bodyPr wrap="square">
+          <a:bodyPr wrap="square" anchor="t" lIns="73152" rIns="73152">
             <a:spAutoFit/>
           </a:bodyPr>
           <a:lstStyle/>
           <a:p>
-            <a:pPr algn="ctr"/>
+            <a:pPr algn="ctr">
+              <a:lnSpc>
+                <a:spcPct val="115000"/>
+              </a:lnSpc>
+            </a:pPr>
             <a:r>
               <a:rPr sz="1300" b="0" i="1">
                 <a:solidFill>
@@ -3855,12 +8260,16 @@
           <a:noFill/>
         </p:spPr>
         <p:txBody>
-          <a:bodyPr wrap="square">
+          <a:bodyPr wrap="square" anchor="t" lIns="73152" rIns="73152">
             <a:spAutoFit/>
           </a:bodyPr>
           <a:lstStyle/>
           <a:p>
-            <a:pPr algn="ctr"/>
+            <a:pPr algn="ctr">
+              <a:lnSpc>
+                <a:spcPct val="115000"/>
+              </a:lnSpc>
+            </a:pPr>
             <a:r>
               <a:rPr sz="900" b="0" i="1">
                 <a:solidFill>

--- a/pitch_deck_jefferson_ems.pptx
+++ b/pitch_deck_jefferson_ems.pptx
@@ -11,6 +11,7 @@
     <p:sldId id="259" r:id="rId10"/>
     <p:sldId id="260" r:id="rId11"/>
     <p:sldId id="261" r:id="rId12"/>
+    <p:sldId id="262" r:id="rId13"/>
   </p:sldIdLst>
   <p:sldSz cx="12191695" cy="6858000" type="screen4x3"/>
   <p:notesSz cx="6858000" cy="9144000"/>
@@ -8039,6 +8040,1631 @@
 </file>
 
 <file path=ppt/slides/slide6.xml><?xml version="1.0" encoding="utf-8"?>
+<p:sld xmlns:a="http://schemas.openxmlformats.org/drawingml/2006/main" xmlns:p="http://schemas.openxmlformats.org/presentationml/2006/main" xmlns:r="http://schemas.openxmlformats.org/officeDocument/2006/relationships">
+  <p:cSld>
+    <p:spTree>
+      <p:nvGrpSpPr>
+        <p:cNvPr id="1" name=""/>
+        <p:cNvGrpSpPr/>
+        <p:nvPr/>
+      </p:nvGrpSpPr>
+      <p:grpSpPr/>
+      <p:sp>
+        <p:nvSpPr>
+          <p:cNvPr id="2" name="TextBox 1"/>
+          <p:cNvSpPr txBox="1"/>
+          <p:nvPr/>
+        </p:nvSpPr>
+        <p:spPr>
+          <a:xfrm>
+            <a:off x="457200" y="274320"/>
+            <a:ext cx="11247120" cy="731520"/>
+          </a:xfrm>
+          <a:prstGeom prst="rect">
+            <a:avLst/>
+          </a:prstGeom>
+          <a:noFill/>
+        </p:spPr>
+        <p:txBody>
+          <a:bodyPr wrap="square" anchor="t" lIns="73152" rIns="73152">
+            <a:spAutoFit/>
+          </a:bodyPr>
+          <a:lstStyle/>
+          <a:p>
+            <a:pPr algn="ctr">
+              <a:lnSpc>
+                <a:spcPct val="115000"/>
+              </a:lnSpc>
+            </a:pPr>
+            <a:r>
+              <a:rPr sz="3000" b="1" i="0">
+                <a:solidFill>
+                  <a:srgbClr val="111111"/>
+                </a:solidFill>
+                <a:latin typeface="Calibri"/>
+              </a:rPr>
+              <a:t>The Business Case: Same Spend, Dramatically Better Care</a:t>
+            </a:r>
+          </a:p>
+        </p:txBody>
+      </p:sp>
+      <p:sp>
+        <p:nvSpPr>
+          <p:cNvPr id="3" name="TextBox 2"/>
+          <p:cNvSpPr txBox="1"/>
+          <p:nvPr/>
+        </p:nvSpPr>
+        <p:spPr>
+          <a:xfrm>
+            <a:off x="457200" y="1005840"/>
+            <a:ext cx="11247120" cy="457200"/>
+          </a:xfrm>
+          <a:prstGeom prst="rect">
+            <a:avLst/>
+          </a:prstGeom>
+          <a:noFill/>
+        </p:spPr>
+        <p:txBody>
+          <a:bodyPr wrap="square" anchor="t" lIns="73152" rIns="73152">
+            <a:spAutoFit/>
+          </a:bodyPr>
+          <a:lstStyle/>
+          <a:p>
+            <a:pPr algn="ctr">
+              <a:lnSpc>
+                <a:spcPct val="115000"/>
+              </a:lnSpc>
+            </a:pPr>
+            <a:r>
+              <a:rPr sz="1300" b="0" i="1">
+                <a:solidFill>
+                  <a:srgbClr val="555555"/>
+                </a:solidFill>
+                <a:latin typeface="Calibri"/>
+              </a:rPr>
+              <a:t>Built on Chief Peterson's 24/7 ALS single-unit cost model (6 FTEs, 24/48 schedule, 700 calls/yr)</a:t>
+            </a:r>
+          </a:p>
+        </p:txBody>
+      </p:sp>
+      <p:sp>
+        <p:nvSpPr>
+          <p:cNvPr id="4" name="Rounded Rectangle 3"/>
+          <p:cNvSpPr/>
+          <p:nvPr/>
+        </p:nvSpPr>
+        <p:spPr>
+          <a:xfrm>
+            <a:off x="457200" y="1737360"/>
+            <a:ext cx="3657600" cy="4114800"/>
+          </a:xfrm>
+          <a:prstGeom prst="roundRect">
+            <a:avLst/>
+          </a:prstGeom>
+          <a:solidFill>
+            <a:srgbClr val="FFF5F5"/>
+          </a:solidFill>
+          <a:ln w="25400">
+            <a:solidFill>
+              <a:srgbClr val="B22222"/>
+            </a:solidFill>
+          </a:ln>
+        </p:spPr>
+        <p:style>
+          <a:lnRef idx="1">
+            <a:schemeClr val="accent1"/>
+          </a:lnRef>
+          <a:fillRef idx="3">
+            <a:schemeClr val="accent1"/>
+          </a:fillRef>
+          <a:effectRef idx="2">
+            <a:schemeClr val="accent1"/>
+          </a:effectRef>
+          <a:fontRef idx="minor">
+            <a:schemeClr val="lt1"/>
+          </a:fontRef>
+        </p:style>
+        <p:txBody>
+          <a:bodyPr rtlCol="0" anchor="ctr"/>
+          <a:lstStyle/>
+          <a:p/>
+        </p:txBody>
+      </p:sp>
+      <p:sp>
+        <p:nvSpPr>
+          <p:cNvPr id="5" name="TextBox 4"/>
+          <p:cNvSpPr txBox="1"/>
+          <p:nvPr/>
+        </p:nvSpPr>
+        <p:spPr>
+          <a:xfrm>
+            <a:off x="457200" y="1874519"/>
+            <a:ext cx="3657600" cy="457200"/>
+          </a:xfrm>
+          <a:prstGeom prst="rect">
+            <a:avLst/>
+          </a:prstGeom>
+          <a:noFill/>
+        </p:spPr>
+        <p:txBody>
+          <a:bodyPr wrap="square" anchor="t" lIns="73152" rIns="73152">
+            <a:spAutoFit/>
+          </a:bodyPr>
+          <a:lstStyle/>
+          <a:p>
+            <a:pPr algn="ctr">
+              <a:lnSpc>
+                <a:spcPct val="115000"/>
+              </a:lnSpc>
+            </a:pPr>
+            <a:r>
+              <a:rPr sz="1800" b="1" i="0">
+                <a:solidFill>
+                  <a:srgbClr val="B22222"/>
+                </a:solidFill>
+                <a:latin typeface="Calibri"/>
+              </a:rPr>
+              <a:t>TODAY — Fragmented</a:t>
+            </a:r>
+          </a:p>
+        </p:txBody>
+      </p:sp>
+      <p:sp>
+        <p:nvSpPr>
+          <p:cNvPr id="6" name="TextBox 5"/>
+          <p:cNvSpPr txBox="1"/>
+          <p:nvPr/>
+        </p:nvSpPr>
+        <p:spPr>
+          <a:xfrm>
+            <a:off x="594360" y="2377440"/>
+            <a:ext cx="3383280" cy="365760"/>
+          </a:xfrm>
+          <a:prstGeom prst="rect">
+            <a:avLst/>
+          </a:prstGeom>
+          <a:noFill/>
+        </p:spPr>
+        <p:txBody>
+          <a:bodyPr wrap="square" anchor="t" lIns="73152" rIns="73152">
+            <a:spAutoFit/>
+          </a:bodyPr>
+          <a:lstStyle/>
+          <a:p>
+            <a:pPr algn="l">
+              <a:lnSpc>
+                <a:spcPct val="115000"/>
+              </a:lnSpc>
+            </a:pPr>
+            <a:r>
+              <a:rPr sz="1200" b="0" i="0">
+                <a:solidFill>
+                  <a:srgbClr val="555555"/>
+                </a:solidFill>
+                <a:latin typeface="Calibri"/>
+              </a:rPr>
+              <a:t>Current distributed overhead</a:t>
+            </a:r>
+          </a:p>
+        </p:txBody>
+      </p:sp>
+      <p:sp>
+        <p:nvSpPr>
+          <p:cNvPr id="7" name="TextBox 6"/>
+          <p:cNvSpPr txBox="1"/>
+          <p:nvPr/>
+        </p:nvSpPr>
+        <p:spPr>
+          <a:xfrm>
+            <a:off x="594360" y="2697480"/>
+            <a:ext cx="3383280" cy="822960"/>
+          </a:xfrm>
+          <a:prstGeom prst="rect">
+            <a:avLst/>
+          </a:prstGeom>
+          <a:noFill/>
+        </p:spPr>
+        <p:txBody>
+          <a:bodyPr wrap="square" anchor="t" lIns="73152" rIns="73152">
+            <a:spAutoFit/>
+          </a:bodyPr>
+          <a:lstStyle/>
+          <a:p>
+            <a:pPr algn="l">
+              <a:lnSpc>
+                <a:spcPct val="115000"/>
+              </a:lnSpc>
+            </a:pPr>
+            <a:r>
+              <a:rPr sz="4800" b="1" i="0">
+                <a:solidFill>
+                  <a:srgbClr val="B22222"/>
+                </a:solidFill>
+                <a:latin typeface="Calibri"/>
+              </a:rPr>
+              <a:t>$2.36M</a:t>
+            </a:r>
+          </a:p>
+        </p:txBody>
+      </p:sp>
+      <p:sp>
+        <p:nvSpPr>
+          <p:cNvPr id="8" name="TextBox 7"/>
+          <p:cNvSpPr txBox="1"/>
+          <p:nvPr/>
+        </p:nvSpPr>
+        <p:spPr>
+          <a:xfrm>
+            <a:off x="594360" y="3520440"/>
+            <a:ext cx="3383280" cy="365760"/>
+          </a:xfrm>
+          <a:prstGeom prst="rect">
+            <a:avLst/>
+          </a:prstGeom>
+          <a:noFill/>
+        </p:spPr>
+        <p:txBody>
+          <a:bodyPr wrap="square" anchor="t" lIns="73152" rIns="73152">
+            <a:spAutoFit/>
+          </a:bodyPr>
+          <a:lstStyle/>
+          <a:p>
+            <a:pPr algn="l">
+              <a:lnSpc>
+                <a:spcPct val="115000"/>
+              </a:lnSpc>
+            </a:pPr>
+            <a:r>
+              <a:rPr sz="1200" b="0" i="1">
+                <a:solidFill>
+                  <a:srgbClr val="555555"/>
+                </a:solidFill>
+                <a:latin typeface="Calibri"/>
+              </a:rPr>
+              <a:t>per year, across 7 departments</a:t>
+            </a:r>
+          </a:p>
+        </p:txBody>
+      </p:sp>
+      <p:cxnSp>
+        <p:nvCxnSpPr>
+          <p:cNvPr id="9" name="Connector 8"/>
+          <p:cNvCxnSpPr/>
+          <p:nvPr/>
+        </p:nvCxnSpPr>
+        <p:spPr>
+          <a:xfrm>
+            <a:off x="640080" y="3977639"/>
+            <a:ext cx="3291840" cy="0"/>
+          </a:xfrm>
+          <a:prstGeom prst="bentConnector3">
+            <a:avLst/>
+          </a:prstGeom>
+          <a:ln w="12700">
+            <a:solidFill>
+              <a:srgbClr val="CCCCCC"/>
+            </a:solidFill>
+          </a:ln>
+        </p:spPr>
+        <p:style>
+          <a:lnRef idx="2">
+            <a:schemeClr val="accent1"/>
+          </a:lnRef>
+          <a:fillRef idx="0">
+            <a:schemeClr val="accent1"/>
+          </a:fillRef>
+          <a:effectRef idx="1">
+            <a:schemeClr val="accent1"/>
+          </a:effectRef>
+          <a:fontRef idx="minor">
+            <a:schemeClr val="tx1"/>
+          </a:fontRef>
+        </p:style>
+      </p:cxnSp>
+      <p:sp>
+        <p:nvSpPr>
+          <p:cNvPr id="10" name="TextBox 9"/>
+          <p:cNvSpPr txBox="1"/>
+          <p:nvPr/>
+        </p:nvSpPr>
+        <p:spPr>
+          <a:xfrm>
+            <a:off x="640080" y="4114800"/>
+            <a:ext cx="3291840" cy="1645920"/>
+          </a:xfrm>
+          <a:prstGeom prst="rect">
+            <a:avLst/>
+          </a:prstGeom>
+          <a:noFill/>
+        </p:spPr>
+        <p:txBody>
+          <a:bodyPr wrap="square" anchor="t" lIns="73152" rIns="73152">
+            <a:spAutoFit/>
+          </a:bodyPr>
+          <a:lstStyle/>
+          <a:p>
+            <a:pPr algn="l">
+              <a:spcAft>
+                <a:spcPts val="600"/>
+              </a:spcAft>
+            </a:pPr>
+            <a:r>
+              <a:rPr sz="1100" b="1" i="0">
+                <a:solidFill>
+                  <a:srgbClr val="555555"/>
+                </a:solidFill>
+                <a:latin typeface="Calibri"/>
+              </a:rPr>
+              <a:t>What that buys today:</a:t>
+            </a:r>
+          </a:p>
+          <a:p>
+            <a:pPr algn="l">
+              <a:spcAft>
+                <a:spcPts val="300"/>
+              </a:spcAft>
+            </a:pPr>
+            <a:r>
+              <a:rPr sz="1100" b="0" i="0">
+                <a:solidFill>
+                  <a:srgbClr val="111111"/>
+                </a:solidFill>
+                <a:latin typeface="Calibri"/>
+              </a:rPr>
+              <a:t>• 12 independent backup ambulances</a:t>
+            </a:r>
+          </a:p>
+          <a:p>
+            <a:pPr algn="l">
+              <a:spcAft>
+                <a:spcPts val="300"/>
+              </a:spcAft>
+            </a:pPr>
+            <a:r>
+              <a:rPr sz="1100" b="0" i="0">
+                <a:solidFill>
+                  <a:srgbClr val="111111"/>
+                </a:solidFill>
+                <a:latin typeface="Calibri"/>
+              </a:rPr>
+              <a:t>• 10–15% utilization per unit</a:t>
+            </a:r>
+          </a:p>
+          <a:p>
+            <a:pPr algn="l">
+              <a:spcAft>
+                <a:spcPts val="300"/>
+              </a:spcAft>
+            </a:pPr>
+            <a:r>
+              <a:rPr sz="1100" b="1" i="0">
+                <a:solidFill>
+                  <a:srgbClr val="B22222"/>
+                </a:solidFill>
+                <a:latin typeface="Calibri"/>
+              </a:rPr>
+              <a:t>• 41 all-busy gaps per year</a:t>
+            </a:r>
+          </a:p>
+          <a:p>
+            <a:pPr algn="l"/>
+            <a:r>
+              <a:rPr sz="1100" b="0" i="0">
+                <a:solidFill>
+                  <a:srgbClr val="111111"/>
+                </a:solidFill>
+                <a:latin typeface="Calibri"/>
+              </a:rPr>
+              <a:t>• Only 32% of concurrent demand covered ≤14 min</a:t>
+            </a:r>
+          </a:p>
+        </p:txBody>
+      </p:sp>
+      <p:cxnSp>
+        <p:nvCxnSpPr>
+          <p:cNvPr id="11" name="Connector 10"/>
+          <p:cNvCxnSpPr/>
+          <p:nvPr/>
+        </p:nvCxnSpPr>
+        <p:spPr>
+          <a:xfrm>
+            <a:off x="4297680" y="3657600"/>
+            <a:ext cx="365760" cy="0"/>
+          </a:xfrm>
+          <a:prstGeom prst="line">
+            <a:avLst/>
+          </a:prstGeom>
+          <a:ln w="50800">
+            <a:solidFill>
+              <a:srgbClr val="111111"/>
+            </a:solidFill>
+            <a:tailEnd type="triangle" w="med" h="med"/>
+          </a:ln>
+        </p:spPr>
+        <p:style>
+          <a:lnRef idx="2">
+            <a:schemeClr val="accent1"/>
+          </a:lnRef>
+          <a:fillRef idx="0">
+            <a:schemeClr val="accent1"/>
+          </a:fillRef>
+          <a:effectRef idx="1">
+            <a:schemeClr val="accent1"/>
+          </a:effectRef>
+          <a:fontRef idx="minor">
+            <a:schemeClr val="tx1"/>
+          </a:fontRef>
+        </p:style>
+      </p:cxnSp>
+      <p:sp>
+        <p:nvSpPr>
+          <p:cNvPr id="12" name="TextBox 11"/>
+          <p:cNvSpPr txBox="1"/>
+          <p:nvPr/>
+        </p:nvSpPr>
+        <p:spPr>
+          <a:xfrm>
+            <a:off x="4023360" y="3200400"/>
+            <a:ext cx="822960" cy="365760"/>
+          </a:xfrm>
+          <a:prstGeom prst="rect">
+            <a:avLst/>
+          </a:prstGeom>
+          <a:noFill/>
+        </p:spPr>
+        <p:txBody>
+          <a:bodyPr wrap="square" anchor="t" lIns="73152" rIns="73152">
+            <a:spAutoFit/>
+          </a:bodyPr>
+          <a:lstStyle/>
+          <a:p>
+            <a:pPr algn="ctr">
+              <a:lnSpc>
+                <a:spcPct val="110000"/>
+              </a:lnSpc>
+            </a:pPr>
+            <a:r>
+              <a:rPr sz="1100" b="1" i="1">
+                <a:solidFill>
+                  <a:srgbClr val="111111"/>
+                </a:solidFill>
+                <a:latin typeface="Calibri"/>
+              </a:rPr>
+              <a:t>Same
+budget</a:t>
+            </a:r>
+          </a:p>
+        </p:txBody>
+      </p:sp>
+      <p:sp>
+        <p:nvSpPr>
+          <p:cNvPr id="13" name="Rounded Rectangle 12"/>
+          <p:cNvSpPr/>
+          <p:nvPr/>
+        </p:nvSpPr>
+        <p:spPr>
+          <a:xfrm>
+            <a:off x="4846320" y="1737360"/>
+            <a:ext cx="6903720" cy="4114800"/>
+          </a:xfrm>
+          <a:prstGeom prst="roundRect">
+            <a:avLst/>
+          </a:prstGeom>
+          <a:solidFill>
+            <a:srgbClr val="F0F8FF"/>
+          </a:solidFill>
+          <a:ln w="25400">
+            <a:solidFill>
+              <a:srgbClr val="2C7FB8"/>
+            </a:solidFill>
+          </a:ln>
+        </p:spPr>
+        <p:style>
+          <a:lnRef idx="1">
+            <a:schemeClr val="accent1"/>
+          </a:lnRef>
+          <a:fillRef idx="3">
+            <a:schemeClr val="accent1"/>
+          </a:fillRef>
+          <a:effectRef idx="2">
+            <a:schemeClr val="accent1"/>
+          </a:effectRef>
+          <a:fontRef idx="minor">
+            <a:schemeClr val="lt1"/>
+          </a:fontRef>
+        </p:style>
+        <p:txBody>
+          <a:bodyPr rtlCol="0" anchor="ctr"/>
+          <a:lstStyle/>
+          <a:p/>
+        </p:txBody>
+      </p:sp>
+      <p:sp>
+        <p:nvSpPr>
+          <p:cNvPr id="14" name="TextBox 13"/>
+          <p:cNvSpPr txBox="1"/>
+          <p:nvPr/>
+        </p:nvSpPr>
+        <p:spPr>
+          <a:xfrm>
+            <a:off x="4846320" y="1874519"/>
+            <a:ext cx="6903720" cy="457200"/>
+          </a:xfrm>
+          <a:prstGeom prst="rect">
+            <a:avLst/>
+          </a:prstGeom>
+          <a:noFill/>
+        </p:spPr>
+        <p:txBody>
+          <a:bodyPr wrap="square" anchor="t" lIns="73152" rIns="73152">
+            <a:spAutoFit/>
+          </a:bodyPr>
+          <a:lstStyle/>
+          <a:p>
+            <a:pPr algn="ctr">
+              <a:lnSpc>
+                <a:spcPct val="115000"/>
+              </a:lnSpc>
+            </a:pPr>
+            <a:r>
+              <a:rPr sz="1800" b="1" i="0">
+                <a:solidFill>
+                  <a:srgbClr val="2C7FB8"/>
+                </a:solidFill>
+                <a:latin typeface="Calibri"/>
+              </a:rPr>
+              <a:t>TOMORROW — Regional (K=4)</a:t>
+            </a:r>
+          </a:p>
+        </p:txBody>
+      </p:sp>
+      <p:sp>
+        <p:nvSpPr>
+          <p:cNvPr id="15" name="Rounded Rectangle 14"/>
+          <p:cNvSpPr/>
+          <p:nvPr/>
+        </p:nvSpPr>
+        <p:spPr>
+          <a:xfrm>
+            <a:off x="4956048" y="2423160"/>
+            <a:ext cx="2148840" cy="3246120"/>
+          </a:xfrm>
+          <a:prstGeom prst="roundRect">
+            <a:avLst/>
+          </a:prstGeom>
+          <a:solidFill>
+            <a:srgbClr val="FFFFFF"/>
+          </a:solidFill>
+          <a:ln w="15240">
+            <a:solidFill>
+              <a:srgbClr val="2C7FB8"/>
+            </a:solidFill>
+          </a:ln>
+        </p:spPr>
+        <p:style>
+          <a:lnRef idx="1">
+            <a:schemeClr val="accent1"/>
+          </a:lnRef>
+          <a:fillRef idx="3">
+            <a:schemeClr val="accent1"/>
+          </a:fillRef>
+          <a:effectRef idx="2">
+            <a:schemeClr val="accent1"/>
+          </a:effectRef>
+          <a:fontRef idx="minor">
+            <a:schemeClr val="lt1"/>
+          </a:fontRef>
+        </p:style>
+        <p:txBody>
+          <a:bodyPr rtlCol="0" anchor="ctr"/>
+          <a:lstStyle/>
+          <a:p/>
+        </p:txBody>
+      </p:sp>
+      <p:sp>
+        <p:nvSpPr>
+          <p:cNvPr id="16" name="TextBox 15"/>
+          <p:cNvSpPr txBox="1"/>
+          <p:nvPr/>
+        </p:nvSpPr>
+        <p:spPr>
+          <a:xfrm>
+            <a:off x="4956048" y="2514600"/>
+            <a:ext cx="2148840" cy="320040"/>
+          </a:xfrm>
+          <a:prstGeom prst="rect">
+            <a:avLst/>
+          </a:prstGeom>
+          <a:noFill/>
+        </p:spPr>
+        <p:txBody>
+          <a:bodyPr wrap="square" anchor="t" lIns="73152" rIns="73152">
+            <a:spAutoFit/>
+          </a:bodyPr>
+          <a:lstStyle/>
+          <a:p>
+            <a:pPr algn="ctr">
+              <a:lnSpc>
+                <a:spcPct val="115000"/>
+              </a:lnSpc>
+            </a:pPr>
+            <a:r>
+              <a:rPr sz="1300" b="1" i="0">
+                <a:solidFill>
+                  <a:srgbClr val="2C7FB8"/>
+                </a:solidFill>
+                <a:latin typeface="Calibri"/>
+              </a:rPr>
+              <a:t>Scenario A</a:t>
+            </a:r>
+          </a:p>
+        </p:txBody>
+      </p:sp>
+      <p:sp>
+        <p:nvSpPr>
+          <p:cNvPr id="17" name="TextBox 16"/>
+          <p:cNvSpPr txBox="1"/>
+          <p:nvPr/>
+        </p:nvSpPr>
+        <p:spPr>
+          <a:xfrm>
+            <a:off x="4956048" y="2834640"/>
+            <a:ext cx="2148840" cy="457200"/>
+          </a:xfrm>
+          <a:prstGeom prst="rect">
+            <a:avLst/>
+          </a:prstGeom>
+          <a:noFill/>
+        </p:spPr>
+        <p:txBody>
+          <a:bodyPr wrap="square" anchor="t" lIns="73152" rIns="73152">
+            <a:spAutoFit/>
+          </a:bodyPr>
+          <a:lstStyle/>
+          <a:p>
+            <a:pPr algn="ctr">
+              <a:lnSpc>
+                <a:spcPct val="115000"/>
+              </a:lnSpc>
+            </a:pPr>
+            <a:r>
+              <a:rPr sz="1000" b="0" i="1">
+                <a:solidFill>
+                  <a:srgbClr val="555555"/>
+                </a:solidFill>
+                <a:latin typeface="Calibri"/>
+              </a:rPr>
+              <a:t>All 4 stations 24/7 ALS</a:t>
+            </a:r>
+          </a:p>
+        </p:txBody>
+      </p:sp>
+      <p:sp>
+        <p:nvSpPr>
+          <p:cNvPr id="18" name="TextBox 17"/>
+          <p:cNvSpPr txBox="1"/>
+          <p:nvPr/>
+        </p:nvSpPr>
+        <p:spPr>
+          <a:xfrm>
+            <a:off x="4956048" y="3383280"/>
+            <a:ext cx="2148840" cy="502920"/>
+          </a:xfrm>
+          <a:prstGeom prst="rect">
+            <a:avLst/>
+          </a:prstGeom>
+          <a:noFill/>
+        </p:spPr>
+        <p:txBody>
+          <a:bodyPr wrap="square" anchor="t" lIns="73152" rIns="73152">
+            <a:spAutoFit/>
+          </a:bodyPr>
+          <a:lstStyle/>
+          <a:p>
+            <a:pPr algn="ctr">
+              <a:lnSpc>
+                <a:spcPct val="115000"/>
+              </a:lnSpc>
+            </a:pPr>
+            <a:r>
+              <a:rPr sz="2600" b="1" i="0">
+                <a:solidFill>
+                  <a:srgbClr val="2C7FB8"/>
+                </a:solidFill>
+                <a:latin typeface="Calibri"/>
+              </a:rPr>
+              <a:t>$1.00M</a:t>
+            </a:r>
+          </a:p>
+        </p:txBody>
+      </p:sp>
+      <p:sp>
+        <p:nvSpPr>
+          <p:cNvPr id="19" name="TextBox 18"/>
+          <p:cNvSpPr txBox="1"/>
+          <p:nvPr/>
+        </p:nvSpPr>
+        <p:spPr>
+          <a:xfrm>
+            <a:off x="4956048" y="3886200"/>
+            <a:ext cx="2148840" cy="274320"/>
+          </a:xfrm>
+          <a:prstGeom prst="rect">
+            <a:avLst/>
+          </a:prstGeom>
+          <a:noFill/>
+        </p:spPr>
+        <p:txBody>
+          <a:bodyPr wrap="square" anchor="t" lIns="73152" rIns="73152">
+            <a:spAutoFit/>
+          </a:bodyPr>
+          <a:lstStyle/>
+          <a:p>
+            <a:pPr algn="ctr">
+              <a:lnSpc>
+                <a:spcPct val="115000"/>
+              </a:lnSpc>
+            </a:pPr>
+            <a:r>
+              <a:rPr sz="1000" b="0" i="1">
+                <a:solidFill>
+                  <a:srgbClr val="555555"/>
+                </a:solidFill>
+                <a:latin typeface="Calibri"/>
+              </a:rPr>
+              <a:t>net / year</a:t>
+            </a:r>
+          </a:p>
+        </p:txBody>
+      </p:sp>
+      <p:sp>
+        <p:nvSpPr>
+          <p:cNvPr id="20" name="TextBox 19"/>
+          <p:cNvSpPr txBox="1"/>
+          <p:nvPr/>
+        </p:nvSpPr>
+        <p:spPr>
+          <a:xfrm>
+            <a:off x="5001768" y="4206240"/>
+            <a:ext cx="2057400" cy="640080"/>
+          </a:xfrm>
+          <a:prstGeom prst="rect">
+            <a:avLst/>
+          </a:prstGeom>
+          <a:noFill/>
+        </p:spPr>
+        <p:txBody>
+          <a:bodyPr wrap="square" anchor="t" lIns="73152" rIns="73152">
+            <a:spAutoFit/>
+          </a:bodyPr>
+          <a:lstStyle/>
+          <a:p>
+            <a:pPr algn="ctr">
+              <a:spcAft>
+                <a:spcPts val="200"/>
+              </a:spcAft>
+            </a:pPr>
+            <a:r>
+              <a:rPr sz="1000" b="0" i="0">
+                <a:solidFill>
+                  <a:srgbClr val="555555"/>
+                </a:solidFill>
+                <a:latin typeface="Calibri"/>
+              </a:rPr>
+              <a:t>Operating: $2.87M</a:t>
+            </a:r>
+          </a:p>
+          <a:p>
+            <a:pPr algn="ctr">
+              <a:spcAft>
+                <a:spcPts val="200"/>
+              </a:spcAft>
+            </a:pPr>
+            <a:r>
+              <a:rPr sz="1000" b="0" i="0">
+                <a:solidFill>
+                  <a:srgbClr val="555555"/>
+                </a:solidFill>
+                <a:latin typeface="Calibri"/>
+              </a:rPr>
+              <a:t>Revenue:  $1.86M</a:t>
+            </a:r>
+          </a:p>
+          <a:p>
+            <a:pPr algn="ctr"/>
+            <a:r>
+              <a:rPr sz="1000" b="1" i="0">
+                <a:solidFill>
+                  <a:srgbClr val="111111"/>
+                </a:solidFill>
+                <a:latin typeface="Calibri"/>
+              </a:rPr>
+              <a:t>29 FTE</a:t>
+            </a:r>
+          </a:p>
+        </p:txBody>
+      </p:sp>
+      <p:sp>
+        <p:nvSpPr>
+          <p:cNvPr id="21" name="TextBox 20"/>
+          <p:cNvSpPr txBox="1"/>
+          <p:nvPr/>
+        </p:nvSpPr>
+        <p:spPr>
+          <a:xfrm>
+            <a:off x="5047488" y="4892040"/>
+            <a:ext cx="1965960" cy="731520"/>
+          </a:xfrm>
+          <a:prstGeom prst="rect">
+            <a:avLst/>
+          </a:prstGeom>
+          <a:noFill/>
+        </p:spPr>
+        <p:txBody>
+          <a:bodyPr wrap="square" anchor="t" lIns="73152" rIns="73152">
+            <a:spAutoFit/>
+          </a:bodyPr>
+          <a:lstStyle/>
+          <a:p>
+            <a:pPr algn="ctr">
+              <a:lnSpc>
+                <a:spcPct val="120000"/>
+              </a:lnSpc>
+            </a:pPr>
+            <a:r>
+              <a:rPr sz="900" b="0" i="1">
+                <a:solidFill>
+                  <a:srgbClr val="555555"/>
+                </a:solidFill>
+                <a:latin typeface="Calibri"/>
+              </a:rPr>
+              <a:t>Maximum coverage.
+Higher cost; delivers ≤14-min
+coverage to 75% of demand.</a:t>
+            </a:r>
+          </a:p>
+        </p:txBody>
+      </p:sp>
+      <p:sp>
+        <p:nvSpPr>
+          <p:cNvPr id="22" name="Rounded Rectangle 21"/>
+          <p:cNvSpPr/>
+          <p:nvPr/>
+        </p:nvSpPr>
+        <p:spPr>
+          <a:xfrm>
+            <a:off x="7214616" y="2423160"/>
+            <a:ext cx="2148840" cy="3246120"/>
+          </a:xfrm>
+          <a:prstGeom prst="roundRect">
+            <a:avLst/>
+          </a:prstGeom>
+          <a:solidFill>
+            <a:srgbClr val="FFFFFF"/>
+          </a:solidFill>
+          <a:ln w="15240">
+            <a:solidFill>
+              <a:srgbClr val="2C7FB8"/>
+            </a:solidFill>
+          </a:ln>
+        </p:spPr>
+        <p:style>
+          <a:lnRef idx="1">
+            <a:schemeClr val="accent1"/>
+          </a:lnRef>
+          <a:fillRef idx="3">
+            <a:schemeClr val="accent1"/>
+          </a:fillRef>
+          <a:effectRef idx="2">
+            <a:schemeClr val="accent1"/>
+          </a:effectRef>
+          <a:fontRef idx="minor">
+            <a:schemeClr val="lt1"/>
+          </a:fontRef>
+        </p:style>
+        <p:txBody>
+          <a:bodyPr rtlCol="0" anchor="ctr"/>
+          <a:lstStyle/>
+          <a:p/>
+        </p:txBody>
+      </p:sp>
+      <p:sp>
+        <p:nvSpPr>
+          <p:cNvPr id="23" name="TextBox 22"/>
+          <p:cNvSpPr txBox="1"/>
+          <p:nvPr/>
+        </p:nvSpPr>
+        <p:spPr>
+          <a:xfrm>
+            <a:off x="7214616" y="2514600"/>
+            <a:ext cx="2148840" cy="320040"/>
+          </a:xfrm>
+          <a:prstGeom prst="rect">
+            <a:avLst/>
+          </a:prstGeom>
+          <a:noFill/>
+        </p:spPr>
+        <p:txBody>
+          <a:bodyPr wrap="square" anchor="t" lIns="73152" rIns="73152">
+            <a:spAutoFit/>
+          </a:bodyPr>
+          <a:lstStyle/>
+          <a:p>
+            <a:pPr algn="ctr">
+              <a:lnSpc>
+                <a:spcPct val="115000"/>
+              </a:lnSpc>
+            </a:pPr>
+            <a:r>
+              <a:rPr sz="1300" b="1" i="0">
+                <a:solidFill>
+                  <a:srgbClr val="2C7FB8"/>
+                </a:solidFill>
+                <a:latin typeface="Calibri"/>
+              </a:rPr>
+              <a:t>Scenario B</a:t>
+            </a:r>
+          </a:p>
+        </p:txBody>
+      </p:sp>
+      <p:sp>
+        <p:nvSpPr>
+          <p:cNvPr id="24" name="TextBox 23"/>
+          <p:cNvSpPr txBox="1"/>
+          <p:nvPr/>
+        </p:nvSpPr>
+        <p:spPr>
+          <a:xfrm>
+            <a:off x="7214616" y="2834640"/>
+            <a:ext cx="2148840" cy="457200"/>
+          </a:xfrm>
+          <a:prstGeom prst="rect">
+            <a:avLst/>
+          </a:prstGeom>
+          <a:noFill/>
+        </p:spPr>
+        <p:txBody>
+          <a:bodyPr wrap="square" anchor="t" lIns="73152" rIns="73152">
+            <a:spAutoFit/>
+          </a:bodyPr>
+          <a:lstStyle/>
+          <a:p>
+            <a:pPr algn="ctr">
+              <a:lnSpc>
+                <a:spcPct val="115000"/>
+              </a:lnSpc>
+            </a:pPr>
+            <a:r>
+              <a:rPr sz="1000" b="0" i="1">
+                <a:solidFill>
+                  <a:srgbClr val="555555"/>
+                </a:solidFill>
+                <a:latin typeface="Calibri"/>
+              </a:rPr>
+              <a:t>All 4 peak-only (8 AM–8 PM)</a:t>
+            </a:r>
+          </a:p>
+        </p:txBody>
+      </p:sp>
+      <p:sp>
+        <p:nvSpPr>
+          <p:cNvPr id="25" name="TextBox 24"/>
+          <p:cNvSpPr txBox="1"/>
+          <p:nvPr/>
+        </p:nvSpPr>
+        <p:spPr>
+          <a:xfrm>
+            <a:off x="7214616" y="3383280"/>
+            <a:ext cx="2148840" cy="502920"/>
+          </a:xfrm>
+          <a:prstGeom prst="rect">
+            <a:avLst/>
+          </a:prstGeom>
+          <a:noFill/>
+        </p:spPr>
+        <p:txBody>
+          <a:bodyPr wrap="square" anchor="t" lIns="73152" rIns="73152">
+            <a:spAutoFit/>
+          </a:bodyPr>
+          <a:lstStyle/>
+          <a:p>
+            <a:pPr algn="ctr">
+              <a:lnSpc>
+                <a:spcPct val="115000"/>
+              </a:lnSpc>
+            </a:pPr>
+            <a:r>
+              <a:rPr sz="2600" b="1" i="0">
+                <a:solidFill>
+                  <a:srgbClr val="2C7FB8"/>
+                </a:solidFill>
+                <a:latin typeface="Calibri"/>
+              </a:rPr>
+              <a:t>$851K</a:t>
+            </a:r>
+          </a:p>
+        </p:txBody>
+      </p:sp>
+      <p:sp>
+        <p:nvSpPr>
+          <p:cNvPr id="26" name="TextBox 25"/>
+          <p:cNvSpPr txBox="1"/>
+          <p:nvPr/>
+        </p:nvSpPr>
+        <p:spPr>
+          <a:xfrm>
+            <a:off x="7214616" y="3886200"/>
+            <a:ext cx="2148840" cy="274320"/>
+          </a:xfrm>
+          <a:prstGeom prst="rect">
+            <a:avLst/>
+          </a:prstGeom>
+          <a:noFill/>
+        </p:spPr>
+        <p:txBody>
+          <a:bodyPr wrap="square" anchor="t" lIns="73152" rIns="73152">
+            <a:spAutoFit/>
+          </a:bodyPr>
+          <a:lstStyle/>
+          <a:p>
+            <a:pPr algn="ctr">
+              <a:lnSpc>
+                <a:spcPct val="115000"/>
+              </a:lnSpc>
+            </a:pPr>
+            <a:r>
+              <a:rPr sz="1000" b="0" i="1">
+                <a:solidFill>
+                  <a:srgbClr val="555555"/>
+                </a:solidFill>
+                <a:latin typeface="Calibri"/>
+              </a:rPr>
+              <a:t>net / year</a:t>
+            </a:r>
+          </a:p>
+        </p:txBody>
+      </p:sp>
+      <p:sp>
+        <p:nvSpPr>
+          <p:cNvPr id="27" name="TextBox 26"/>
+          <p:cNvSpPr txBox="1"/>
+          <p:nvPr/>
+        </p:nvSpPr>
+        <p:spPr>
+          <a:xfrm>
+            <a:off x="7260336" y="4206240"/>
+            <a:ext cx="2057400" cy="640080"/>
+          </a:xfrm>
+          <a:prstGeom prst="rect">
+            <a:avLst/>
+          </a:prstGeom>
+          <a:noFill/>
+        </p:spPr>
+        <p:txBody>
+          <a:bodyPr wrap="square" anchor="t" lIns="73152" rIns="73152">
+            <a:spAutoFit/>
+          </a:bodyPr>
+          <a:lstStyle/>
+          <a:p>
+            <a:pPr algn="ctr">
+              <a:spcAft>
+                <a:spcPts val="200"/>
+              </a:spcAft>
+            </a:pPr>
+            <a:r>
+              <a:rPr sz="1000" b="0" i="0">
+                <a:solidFill>
+                  <a:srgbClr val="555555"/>
+                </a:solidFill>
+                <a:latin typeface="Calibri"/>
+              </a:rPr>
+              <a:t>Operating: $2.06M</a:t>
+            </a:r>
+          </a:p>
+          <a:p>
+            <a:pPr algn="ctr">
+              <a:spcAft>
+                <a:spcPts val="200"/>
+              </a:spcAft>
+            </a:pPr>
+            <a:r>
+              <a:rPr sz="1000" b="0" i="0">
+                <a:solidFill>
+                  <a:srgbClr val="555555"/>
+                </a:solidFill>
+                <a:latin typeface="Calibri"/>
+              </a:rPr>
+              <a:t>Revenue:  $1.21M</a:t>
+            </a:r>
+          </a:p>
+          <a:p>
+            <a:pPr algn="ctr"/>
+            <a:r>
+              <a:rPr sz="1000" b="1" i="0">
+                <a:solidFill>
+                  <a:srgbClr val="111111"/>
+                </a:solidFill>
+                <a:latin typeface="Calibri"/>
+              </a:rPr>
+              <a:t>19 FTE</a:t>
+            </a:r>
+          </a:p>
+        </p:txBody>
+      </p:sp>
+      <p:sp>
+        <p:nvSpPr>
+          <p:cNvPr id="28" name="TextBox 27"/>
+          <p:cNvSpPr txBox="1"/>
+          <p:nvPr/>
+        </p:nvSpPr>
+        <p:spPr>
+          <a:xfrm>
+            <a:off x="7306056" y="4892040"/>
+            <a:ext cx="1965960" cy="731520"/>
+          </a:xfrm>
+          <a:prstGeom prst="rect">
+            <a:avLst/>
+          </a:prstGeom>
+          <a:noFill/>
+        </p:spPr>
+        <p:txBody>
+          <a:bodyPr wrap="square" anchor="t" lIns="73152" rIns="73152">
+            <a:spAutoFit/>
+          </a:bodyPr>
+          <a:lstStyle/>
+          <a:p>
+            <a:pPr algn="ctr">
+              <a:lnSpc>
+                <a:spcPct val="120000"/>
+              </a:lnSpc>
+            </a:pPr>
+            <a:r>
+              <a:rPr sz="900" b="0" i="1">
+                <a:solidFill>
+                  <a:srgbClr val="555555"/>
+                </a:solidFill>
+                <a:latin typeface="Calibri"/>
+              </a:rPr>
+              <a:t>Peak-hour focus — covers
+90% of call volume during
+the 12-hour daytime window.</a:t>
+            </a:r>
+          </a:p>
+        </p:txBody>
+      </p:sp>
+      <p:sp>
+        <p:nvSpPr>
+          <p:cNvPr id="29" name="Rounded Rectangle 28"/>
+          <p:cNvSpPr/>
+          <p:nvPr/>
+        </p:nvSpPr>
+        <p:spPr>
+          <a:xfrm>
+            <a:off x="9473184" y="2423160"/>
+            <a:ext cx="2148840" cy="3246120"/>
+          </a:xfrm>
+          <a:prstGeom prst="roundRect">
+            <a:avLst/>
+          </a:prstGeom>
+          <a:solidFill>
+            <a:srgbClr val="FFFFFF"/>
+          </a:solidFill>
+          <a:ln w="31750">
+            <a:solidFill>
+              <a:srgbClr val="228B22"/>
+            </a:solidFill>
+          </a:ln>
+        </p:spPr>
+        <p:style>
+          <a:lnRef idx="1">
+            <a:schemeClr val="accent1"/>
+          </a:lnRef>
+          <a:fillRef idx="3">
+            <a:schemeClr val="accent1"/>
+          </a:fillRef>
+          <a:effectRef idx="2">
+            <a:schemeClr val="accent1"/>
+          </a:effectRef>
+          <a:fontRef idx="minor">
+            <a:schemeClr val="lt1"/>
+          </a:fontRef>
+        </p:style>
+        <p:txBody>
+          <a:bodyPr rtlCol="0" anchor="ctr"/>
+          <a:lstStyle/>
+          <a:p/>
+        </p:txBody>
+      </p:sp>
+      <p:sp>
+        <p:nvSpPr>
+          <p:cNvPr id="30" name="TextBox 29"/>
+          <p:cNvSpPr txBox="1"/>
+          <p:nvPr/>
+        </p:nvSpPr>
+        <p:spPr>
+          <a:xfrm>
+            <a:off x="9473184" y="2514600"/>
+            <a:ext cx="2148840" cy="320040"/>
+          </a:xfrm>
+          <a:prstGeom prst="rect">
+            <a:avLst/>
+          </a:prstGeom>
+          <a:noFill/>
+        </p:spPr>
+        <p:txBody>
+          <a:bodyPr wrap="square" anchor="t" lIns="73152" rIns="73152">
+            <a:spAutoFit/>
+          </a:bodyPr>
+          <a:lstStyle/>
+          <a:p>
+            <a:pPr algn="ctr">
+              <a:lnSpc>
+                <a:spcPct val="115000"/>
+              </a:lnSpc>
+            </a:pPr>
+            <a:r>
+              <a:rPr sz="1300" b="1" i="0">
+                <a:solidFill>
+                  <a:srgbClr val="228B22"/>
+                </a:solidFill>
+                <a:latin typeface="Calibri"/>
+              </a:rPr>
+              <a:t>Scenario C</a:t>
+            </a:r>
+          </a:p>
+        </p:txBody>
+      </p:sp>
+      <p:sp>
+        <p:nvSpPr>
+          <p:cNvPr id="31" name="TextBox 30"/>
+          <p:cNvSpPr txBox="1"/>
+          <p:nvPr/>
+        </p:nvSpPr>
+        <p:spPr>
+          <a:xfrm>
+            <a:off x="9473184" y="2834640"/>
+            <a:ext cx="2148840" cy="457200"/>
+          </a:xfrm>
+          <a:prstGeom prst="rect">
+            <a:avLst/>
+          </a:prstGeom>
+          <a:noFill/>
+        </p:spPr>
+        <p:txBody>
+          <a:bodyPr wrap="square" anchor="t" lIns="73152" rIns="73152">
+            <a:spAutoFit/>
+          </a:bodyPr>
+          <a:lstStyle/>
+          <a:p>
+            <a:pPr algn="ctr">
+              <a:lnSpc>
+                <a:spcPct val="115000"/>
+              </a:lnSpc>
+            </a:pPr>
+            <a:r>
+              <a:rPr sz="1000" b="0" i="1">
+                <a:solidFill>
+                  <a:srgbClr val="555555"/>
+                </a:solidFill>
+                <a:latin typeface="Calibri"/>
+              </a:rPr>
+              <a:t>Hybrid: 1×24/7 + 3×peak</a:t>
+            </a:r>
+          </a:p>
+        </p:txBody>
+      </p:sp>
+      <p:sp>
+        <p:nvSpPr>
+          <p:cNvPr id="32" name="TextBox 31"/>
+          <p:cNvSpPr txBox="1"/>
+          <p:nvPr/>
+        </p:nvSpPr>
+        <p:spPr>
+          <a:xfrm>
+            <a:off x="9473184" y="3383280"/>
+            <a:ext cx="2148840" cy="502920"/>
+          </a:xfrm>
+          <a:prstGeom prst="rect">
+            <a:avLst/>
+          </a:prstGeom>
+          <a:noFill/>
+        </p:spPr>
+        <p:txBody>
+          <a:bodyPr wrap="square" anchor="t" lIns="73152" rIns="73152">
+            <a:spAutoFit/>
+          </a:bodyPr>
+          <a:lstStyle/>
+          <a:p>
+            <a:pPr algn="ctr">
+              <a:lnSpc>
+                <a:spcPct val="115000"/>
+              </a:lnSpc>
+            </a:pPr>
+            <a:r>
+              <a:rPr sz="2600" b="1" i="0">
+                <a:solidFill>
+                  <a:srgbClr val="228B22"/>
+                </a:solidFill>
+                <a:latin typeface="Calibri"/>
+              </a:rPr>
+              <a:t>$902K</a:t>
+            </a:r>
+          </a:p>
+        </p:txBody>
+      </p:sp>
+      <p:sp>
+        <p:nvSpPr>
+          <p:cNvPr id="33" name="TextBox 32"/>
+          <p:cNvSpPr txBox="1"/>
+          <p:nvPr/>
+        </p:nvSpPr>
+        <p:spPr>
+          <a:xfrm>
+            <a:off x="9473184" y="3886200"/>
+            <a:ext cx="2148840" cy="274320"/>
+          </a:xfrm>
+          <a:prstGeom prst="rect">
+            <a:avLst/>
+          </a:prstGeom>
+          <a:noFill/>
+        </p:spPr>
+        <p:txBody>
+          <a:bodyPr wrap="square" anchor="t" lIns="73152" rIns="73152">
+            <a:spAutoFit/>
+          </a:bodyPr>
+          <a:lstStyle/>
+          <a:p>
+            <a:pPr algn="ctr">
+              <a:lnSpc>
+                <a:spcPct val="115000"/>
+              </a:lnSpc>
+            </a:pPr>
+            <a:r>
+              <a:rPr sz="1000" b="0" i="1">
+                <a:solidFill>
+                  <a:srgbClr val="555555"/>
+                </a:solidFill>
+                <a:latin typeface="Calibri"/>
+              </a:rPr>
+              <a:t>net / year</a:t>
+            </a:r>
+          </a:p>
+        </p:txBody>
+      </p:sp>
+      <p:sp>
+        <p:nvSpPr>
+          <p:cNvPr id="34" name="TextBox 33"/>
+          <p:cNvSpPr txBox="1"/>
+          <p:nvPr/>
+        </p:nvSpPr>
+        <p:spPr>
+          <a:xfrm>
+            <a:off x="9518904" y="4206240"/>
+            <a:ext cx="2057400" cy="640080"/>
+          </a:xfrm>
+          <a:prstGeom prst="rect">
+            <a:avLst/>
+          </a:prstGeom>
+          <a:noFill/>
+        </p:spPr>
+        <p:txBody>
+          <a:bodyPr wrap="square" anchor="t" lIns="73152" rIns="73152">
+            <a:spAutoFit/>
+          </a:bodyPr>
+          <a:lstStyle/>
+          <a:p>
+            <a:pPr algn="ctr">
+              <a:spcAft>
+                <a:spcPts val="200"/>
+              </a:spcAft>
+            </a:pPr>
+            <a:r>
+              <a:rPr sz="1000" b="0" i="0">
+                <a:solidFill>
+                  <a:srgbClr val="555555"/>
+                </a:solidFill>
+                <a:latin typeface="Calibri"/>
+              </a:rPr>
+              <a:t>Operating: $2.33M</a:t>
+            </a:r>
+          </a:p>
+          <a:p>
+            <a:pPr algn="ctr">
+              <a:spcAft>
+                <a:spcPts val="200"/>
+              </a:spcAft>
+            </a:pPr>
+            <a:r>
+              <a:rPr sz="1000" b="0" i="0">
+                <a:solidFill>
+                  <a:srgbClr val="555555"/>
+                </a:solidFill>
+                <a:latin typeface="Calibri"/>
+              </a:rPr>
+              <a:t>Revenue:  $1.43M</a:t>
+            </a:r>
+          </a:p>
+          <a:p>
+            <a:pPr algn="ctr"/>
+            <a:r>
+              <a:rPr sz="1000" b="1" i="0">
+                <a:solidFill>
+                  <a:srgbClr val="111111"/>
+                </a:solidFill>
+                <a:latin typeface="Calibri"/>
+              </a:rPr>
+              <a:t>22 FTE</a:t>
+            </a:r>
+          </a:p>
+        </p:txBody>
+      </p:sp>
+      <p:sp>
+        <p:nvSpPr>
+          <p:cNvPr id="35" name="TextBox 34"/>
+          <p:cNvSpPr txBox="1"/>
+          <p:nvPr/>
+        </p:nvSpPr>
+        <p:spPr>
+          <a:xfrm>
+            <a:off x="9564624" y="4892040"/>
+            <a:ext cx="1965960" cy="731520"/>
+          </a:xfrm>
+          <a:prstGeom prst="rect">
+            <a:avLst/>
+          </a:prstGeom>
+          <a:noFill/>
+        </p:spPr>
+        <p:txBody>
+          <a:bodyPr wrap="square" anchor="t" lIns="73152" rIns="73152">
+            <a:spAutoFit/>
+          </a:bodyPr>
+          <a:lstStyle/>
+          <a:p>
+            <a:pPr algn="ctr">
+              <a:lnSpc>
+                <a:spcPct val="120000"/>
+              </a:lnSpc>
+            </a:pPr>
+            <a:r>
+              <a:rPr sz="900" b="0" i="1">
+                <a:solidFill>
+                  <a:srgbClr val="555555"/>
+                </a:solidFill>
+                <a:latin typeface="Calibri"/>
+              </a:rPr>
+              <a:t>Recommended balance.
+24/7 anchor + peak-only
+coverage where demand spikes.</a:t>
+            </a:r>
+          </a:p>
+        </p:txBody>
+      </p:sp>
+      <p:sp>
+        <p:nvSpPr>
+          <p:cNvPr id="36" name="TextBox 35"/>
+          <p:cNvSpPr txBox="1"/>
+          <p:nvPr/>
+        </p:nvSpPr>
+        <p:spPr>
+          <a:xfrm>
+            <a:off x="9473184" y="2167128"/>
+            <a:ext cx="2148840" cy="274320"/>
+          </a:xfrm>
+          <a:prstGeom prst="rect">
+            <a:avLst/>
+          </a:prstGeom>
+          <a:noFill/>
+        </p:spPr>
+        <p:txBody>
+          <a:bodyPr wrap="square" anchor="t" lIns="73152" rIns="73152">
+            <a:spAutoFit/>
+          </a:bodyPr>
+          <a:lstStyle/>
+          <a:p>
+            <a:pPr algn="ctr">
+              <a:lnSpc>
+                <a:spcPct val="115000"/>
+              </a:lnSpc>
+            </a:pPr>
+            <a:r>
+              <a:rPr sz="1000" b="1" i="0">
+                <a:solidFill>
+                  <a:srgbClr val="228B22"/>
+                </a:solidFill>
+                <a:latin typeface="Calibri"/>
+              </a:rPr>
+              <a:t>★ RECOMMENDED</a:t>
+            </a:r>
+          </a:p>
+        </p:txBody>
+      </p:sp>
+      <p:sp>
+        <p:nvSpPr>
+          <p:cNvPr id="37" name="TextBox 36"/>
+          <p:cNvSpPr txBox="1"/>
+          <p:nvPr/>
+        </p:nvSpPr>
+        <p:spPr>
+          <a:xfrm>
+            <a:off x="457200" y="5989320"/>
+            <a:ext cx="11247120" cy="548640"/>
+          </a:xfrm>
+          <a:prstGeom prst="rect">
+            <a:avLst/>
+          </a:prstGeom>
+          <a:noFill/>
+        </p:spPr>
+        <p:txBody>
+          <a:bodyPr wrap="square" anchor="t" lIns="73152" rIns="73152">
+            <a:spAutoFit/>
+          </a:bodyPr>
+          <a:lstStyle/>
+          <a:p>
+            <a:pPr algn="ctr">
+              <a:lnSpc>
+                <a:spcPct val="120000"/>
+              </a:lnSpc>
+            </a:pPr>
+            <a:r>
+              <a:rPr sz="1400" b="1" i="1">
+                <a:solidFill>
+                  <a:srgbClr val="111111"/>
+                </a:solidFill>
+                <a:latin typeface="Calibri"/>
+              </a:rPr>
+              <a:t>The hybrid regional network costs ≈ $900K net — within the envelope the county already spends on fragmented backup.</a:t>
+            </a:r>
+          </a:p>
+        </p:txBody>
+      </p:sp>
+      <p:sp>
+        <p:nvSpPr>
+          <p:cNvPr id="38" name="TextBox 37"/>
+          <p:cNvSpPr txBox="1"/>
+          <p:nvPr/>
+        </p:nvSpPr>
+        <p:spPr>
+          <a:xfrm>
+            <a:off x="365760" y="6537960"/>
+            <a:ext cx="11430000" cy="274320"/>
+          </a:xfrm>
+          <a:prstGeom prst="rect">
+            <a:avLst/>
+          </a:prstGeom>
+          <a:noFill/>
+        </p:spPr>
+        <p:txBody>
+          <a:bodyPr wrap="square" anchor="t" lIns="73152" rIns="73152">
+            <a:spAutoFit/>
+          </a:bodyPr>
+          <a:lstStyle/>
+          <a:p>
+            <a:pPr algn="ctr">
+              <a:lnSpc>
+                <a:spcPct val="115000"/>
+              </a:lnSpc>
+            </a:pPr>
+            <a:r>
+              <a:rPr sz="900" b="0" i="1">
+                <a:solidFill>
+                  <a:srgbClr val="777777"/>
+                </a:solidFill>
+                <a:latin typeface="Calibri"/>
+              </a:rPr>
+              <a:t>Source: Chief Peterson 24/7 ALS cost projection (6 FTEs, 700 calls/yr) scaled to K=4 · Current distributed overhead estimated from 7-dept staffing data</a:t>
+            </a:r>
+          </a:p>
+        </p:txBody>
+      </p:sp>
+    </p:spTree>
+  </p:cSld>
+  <p:clrMapOvr>
+    <a:masterClrMapping/>
+  </p:clrMapOvr>
+</p:sld>
+</file>
+
+<file path=ppt/slides/slide7.xml><?xml version="1.0" encoding="utf-8"?>
 <p:sld xmlns:a="http://schemas.openxmlformats.org/drawingml/2006/main" xmlns:p="http://schemas.openxmlformats.org/presentationml/2006/main" xmlns:r="http://schemas.openxmlformats.org/officeDocument/2006/relationships">
   <p:cSld>
     <p:spTree>
